--- a/work/loo_simulation/output/loo_simulation_visual_summary.pptx
+++ b/work/loo_simulation/output/loo_simulation_visual_summary.pptx
@@ -2,20 +2,20 @@
 <file path=ppt/presentation.xml><?xml version="1.0" encoding="utf-8"?>
 <p:presentation xmlns:p="http://schemas.openxmlformats.org/presentationml/2006/main">
   <p:sldMasterIdLst>
-    <p:sldMasterId xmlns:r="http://schemas.openxmlformats.org/officeDocument/2006/relationships" id="2147483648" r:id="R29a7310edd1f486a"/>
+    <p:sldMasterId xmlns:r="http://schemas.openxmlformats.org/officeDocument/2006/relationships" id="2147483648" r:id="R182d8546ca6149c0"/>
   </p:sldMasterIdLst>
   <p:notesMasterIdLst>
-    <p:notesMasterId xmlns:r="http://schemas.openxmlformats.org/officeDocument/2006/relationships" r:id="R71e3d62667b448db"/>
+    <p:notesMasterId xmlns:r="http://schemas.openxmlformats.org/officeDocument/2006/relationships" r:id="Rf32741dc02474714"/>
   </p:notesMasterIdLst>
   <p:sldIdLst>
-    <p:sldId xmlns:r="http://schemas.openxmlformats.org/officeDocument/2006/relationships" id="256" r:id="R0c2738d0b8904dbc"/>
-    <p:sldId xmlns:r="http://schemas.openxmlformats.org/officeDocument/2006/relationships" id="257" r:id="R29a12638f91f46d1"/>
-    <p:sldId xmlns:r="http://schemas.openxmlformats.org/officeDocument/2006/relationships" id="258" r:id="R05b7d951927d41dd"/>
-    <p:sldId xmlns:r="http://schemas.openxmlformats.org/officeDocument/2006/relationships" id="259" r:id="Ra88995c80ca145d5"/>
-    <p:sldId xmlns:r="http://schemas.openxmlformats.org/officeDocument/2006/relationships" id="260" r:id="Re599e9ae19c7452a"/>
-    <p:sldId xmlns:r="http://schemas.openxmlformats.org/officeDocument/2006/relationships" id="261" r:id="Re69109e6255b4363"/>
-    <p:sldId xmlns:r="http://schemas.openxmlformats.org/officeDocument/2006/relationships" id="262" r:id="Rec56c19b4cd64124"/>
-    <p:sldId xmlns:r="http://schemas.openxmlformats.org/officeDocument/2006/relationships" id="263" r:id="R908a27f76d9842a2"/>
+    <p:sldId xmlns:r="http://schemas.openxmlformats.org/officeDocument/2006/relationships" id="256" r:id="R1a3b4cf75c754299"/>
+    <p:sldId xmlns:r="http://schemas.openxmlformats.org/officeDocument/2006/relationships" id="257" r:id="R13bbf09a599748ac"/>
+    <p:sldId xmlns:r="http://schemas.openxmlformats.org/officeDocument/2006/relationships" id="258" r:id="R9712621daa3f4022"/>
+    <p:sldId xmlns:r="http://schemas.openxmlformats.org/officeDocument/2006/relationships" id="259" r:id="Rd849460cec6e431d"/>
+    <p:sldId xmlns:r="http://schemas.openxmlformats.org/officeDocument/2006/relationships" id="260" r:id="Rfeefaacb4fb245e9"/>
+    <p:sldId xmlns:r="http://schemas.openxmlformats.org/officeDocument/2006/relationships" id="261" r:id="R23b5dce3b9854139"/>
+    <p:sldId xmlns:r="http://schemas.openxmlformats.org/officeDocument/2006/relationships" id="262" r:id="Rc3f3cd01737c441f"/>
+    <p:sldId xmlns:r="http://schemas.openxmlformats.org/officeDocument/2006/relationships" id="263" r:id="Rbf98c4febd994edd"/>
   </p:sldIdLst>
   <p:sldSz cx="12192000" cy="6858000"/>
   <p:notesSz cx="6858000" cy="9144000"/>
@@ -734,7 +734,12 @@
           </a:p>
           <a:p xmlns:a="http://schemas.openxmlformats.org/drawingml/2006/main">
             <a:r>
-              <a:t>- C:\Users\A8327\OneDrive\Documents\OI\work\loo_simulation\results\dgp_estimator_matrix_cluster_v2\merged\attempt_summary.csv</a:t>
+              <a:t>- C:\Users\A8327\OneDrive\Documents\OI\work\loo_simulation\src\loo_sim\low_rank.py</a:t>
+            </a:r>
+          </a:p>
+          <a:p xmlns:a="http://schemas.openxmlformats.org/drawingml/2006/main">
+            <a:r>
+              <a:t>- C:\Users\A8327\OneDrive\Documents\OI\work\loo_simulation\DGP_ESTIMATOR_RESULTS.tex</a:t>
             </a:r>
           </a:p>
           <a:p xmlns:a="http://schemas.openxmlformats.org/drawingml/2006/main">
@@ -909,12 +914,12 @@
           </a:p>
           <a:p xmlns:a="http://schemas.openxmlformats.org/drawingml/2006/main">
             <a:r>
+              <a:t>- C:\Users\A8327\OneDrive\Documents\OI\work\loo_simulation\src\loo_sim\low_rank.py</a:t>
+            </a:r>
+          </a:p>
+          <a:p xmlns:a="http://schemas.openxmlformats.org/drawingml/2006/main">
+            <a:r>
               <a:t>- C:\Users\A8327\OneDrive\Documents\OI\work\loo_simulation\DGP_ESTIMATOR_RESULTS.tex</a:t>
-            </a:r>
-          </a:p>
-          <a:p xmlns:a="http://schemas.openxmlformats.org/drawingml/2006/main">
-            <a:r>
-              <a:t>- C:\Users\A8327\OneDrive\Documents\OI\work\loo_simulation\src\loo_sim</a:t>
             </a:r>
           </a:p>
           <a:p xmlns:a="http://schemas.openxmlformats.org/drawingml/2006/main">
@@ -1089,17 +1094,22 @@
           </a:p>
           <a:p xmlns:a="http://schemas.openxmlformats.org/drawingml/2006/main">
             <a:r>
+              <a:t>- C:\Users\A8327\OneDrive\Documents\OI\work\loo_simulation\README.md</a:t>
+            </a:r>
+          </a:p>
+          <a:p xmlns:a="http://schemas.openxmlformats.org/drawingml/2006/main">
+            <a:r>
               <a:t>- C:\Users\A8327\OneDrive\Documents\OI\work\loo_simulation\DGP_ESTIMATOR_RESULTS.tex</a:t>
             </a:r>
           </a:p>
           <a:p xmlns:a="http://schemas.openxmlformats.org/drawingml/2006/main">
             <a:r>
-              <a:t>- C:\Users\A8327\OneDrive\Documents\OI\work\loo_simulation\reports\dgp_estimator_matrix_cluster_v2</a:t>
-            </a:r>
-          </a:p>
-          <a:p xmlns:a="http://schemas.openxmlformats.org/drawingml/2006/main">
-            <a:r>
-              <a:t>- C:\Users\A8327\OneDrive\Documents\OI\work\loo_simulation\results\dgp_estimator_matrix_cluster_v2\merged</a:t>
+              <a:t>- C:\Users\A8327\OneDrive\Documents\OI\work\loo_simulation\src\loo_sim\low_rank.py</a:t>
+            </a:r>
+          </a:p>
+          <a:p xmlns:a="http://schemas.openxmlformats.org/drawingml/2006/main">
+            <a:r>
+              <a:t>- C:\Users\A8327\OneDrive\Documents\OI\work\loo_simulation\configs\dgp_estimator_matrix_cluster.json</a:t>
             </a:r>
           </a:p>
           <a:p xmlns:a="http://schemas.openxmlformats.org/drawingml/2006/main">
@@ -1172,7 +1182,7 @@
   </p:cSld>
   <p:clrMap bg1="lt1" tx1="dk1" bg2="lt2" tx2="dk2" accent1="accent1" accent2="accent2" accent3="accent3" accent4="accent4" accent5="accent5" accent6="accent6" hlink="hlink" folHlink="folHlink"/>
   <p:sldLayoutIdLst>
-    <p:sldLayoutId xmlns:r="http://schemas.openxmlformats.org/officeDocument/2006/relationships" id="2147483649" r:id="R2714af99ff164419"/>
+    <p:sldLayoutId xmlns:r="http://schemas.openxmlformats.org/officeDocument/2006/relationships" id="2147483649" r:id="Ra8e010257d7548ec"/>
   </p:sldLayoutIdLst>
   <p:txStyles>
     <p:titleStyle>
@@ -1723,7 +1733,7 @@
           <p:cNvPr id="10" name="cover-overline">
             <a:extLst xmlns:a="http://schemas.openxmlformats.org/drawingml/2006/main">
               <a:ext uri="{FF2B5EF4-FFF2-40B4-BE49-F238E27FC236}">
-                <a16:creationId xmlns:a16="http://schemas.microsoft.com/office/drawing/2014/main" id="{1F27148F-6A90-4ECC-BF79-78AC82CF3070}"/>
+                <a16:creationId xmlns:a16="http://schemas.microsoft.com/office/drawing/2014/main" id="{4D3C5875-B09C-401D-A253-8FF2A6EA877F}"/>
               </a:ext>
             </a:extLst>
           </p:cNvPr>
@@ -1781,7 +1791,7 @@
           <p:cNvPr id="2" name="cover-accent">
             <a:extLst xmlns:a="http://schemas.openxmlformats.org/drawingml/2006/main">
               <a:ext uri="{FF2B5EF4-FFF2-40B4-BE49-F238E27FC236}">
-                <a16:creationId xmlns:a16="http://schemas.microsoft.com/office/drawing/2014/main" id="{91427FD9-5E7B-4608-851E-4D6EEC87ED7A}"/>
+                <a16:creationId xmlns:a16="http://schemas.microsoft.com/office/drawing/2014/main" id="{D52928FA-1164-4D2C-B52D-9491E5386228}"/>
               </a:ext>
             </a:extLst>
           </p:cNvPr>
@@ -1812,7 +1822,7 @@
           <p:cNvPr id="3" name="cover-title">
             <a:extLst xmlns:a="http://schemas.openxmlformats.org/drawingml/2006/main">
               <a:ext uri="{FF2B5EF4-FFF2-40B4-BE49-F238E27FC236}">
-                <a16:creationId xmlns:a16="http://schemas.microsoft.com/office/drawing/2014/main" id="{66D4F8E2-DA28-4F24-8223-3BB5999D762D}"/>
+                <a16:creationId xmlns:a16="http://schemas.microsoft.com/office/drawing/2014/main" id="{C6F071C6-C4EF-4245-A5CB-E20BA6579906}"/>
               </a:ext>
             </a:extLst>
           </p:cNvPr>
@@ -1893,7 +1903,7 @@
           <p:cNvPr id="4" name="cover-subtitle">
             <a:extLst xmlns:a="http://schemas.openxmlformats.org/drawingml/2006/main">
               <a:ext uri="{FF2B5EF4-FFF2-40B4-BE49-F238E27FC236}">
-                <a16:creationId xmlns:a16="http://schemas.microsoft.com/office/drawing/2014/main" id="{3186C8F7-F985-4DCE-983F-A628691114E4}"/>
+                <a16:creationId xmlns:a16="http://schemas.microsoft.com/office/drawing/2014/main" id="{69F87016-FBA3-46A7-B7E7-EB5200BE1B2D}"/>
               </a:ext>
             </a:extLst>
           </p:cNvPr>
@@ -1951,7 +1961,7 @@
           <p:cNvPr id="5" name="cover-rule">
             <a:extLst xmlns:a="http://schemas.openxmlformats.org/drawingml/2006/main">
               <a:ext uri="{FF2B5EF4-FFF2-40B4-BE49-F238E27FC236}">
-                <a16:creationId xmlns:a16="http://schemas.microsoft.com/office/drawing/2014/main" id="{88F7944E-BD2E-411C-A2BB-A1977B100E88}"/>
+                <a16:creationId xmlns:a16="http://schemas.microsoft.com/office/drawing/2014/main" id="{84FC2B0B-4EFC-435D-9BE5-29B90B2EA9FF}"/>
               </a:ext>
             </a:extLst>
           </p:cNvPr>
@@ -1982,7 +1992,7 @@
           <p:cNvPr id="6" name="cover-design">
             <a:extLst xmlns:a="http://schemas.openxmlformats.org/drawingml/2006/main">
               <a:ext uri="{FF2B5EF4-FFF2-40B4-BE49-F238E27FC236}">
-                <a16:creationId xmlns:a16="http://schemas.microsoft.com/office/drawing/2014/main" id="{881401FD-8A9C-4FCE-94BB-2771CE289AC7}"/>
+                <a16:creationId xmlns:a16="http://schemas.microsoft.com/office/drawing/2014/main" id="{46D25E82-B3C2-467E-B621-6710F85347BB}"/>
               </a:ext>
             </a:extLst>
           </p:cNvPr>
@@ -2040,7 +2050,7 @@
           <p:cNvPr id="7" name="cover-caveat">
             <a:extLst xmlns:a="http://schemas.openxmlformats.org/drawingml/2006/main">
               <a:ext uri="{FF2B5EF4-FFF2-40B4-BE49-F238E27FC236}">
-                <a16:creationId xmlns:a16="http://schemas.microsoft.com/office/drawing/2014/main" id="{06EF694E-5C89-4400-A6E5-8D4C5576DC11}"/>
+                <a16:creationId xmlns:a16="http://schemas.microsoft.com/office/drawing/2014/main" id="{2E79BA3B-09C0-4659-9EB4-0A45AA02A3A4}"/>
               </a:ext>
             </a:extLst>
           </p:cNvPr>
@@ -2098,7 +2108,7 @@
           <p:cNvPr id="8" name="slide-1-footer-label">
             <a:extLst xmlns:a="http://schemas.openxmlformats.org/drawingml/2006/main">
               <a:ext uri="{FF2B5EF4-FFF2-40B4-BE49-F238E27FC236}">
-                <a16:creationId xmlns:a16="http://schemas.microsoft.com/office/drawing/2014/main" id="{33DEA9A4-AA95-48C0-8CF9-3C4C0D83042E}"/>
+                <a16:creationId xmlns:a16="http://schemas.microsoft.com/office/drawing/2014/main" id="{784BBAF3-932A-4992-93A5-6CF96E442EA3}"/>
               </a:ext>
             </a:extLst>
           </p:cNvPr>
@@ -2156,7 +2166,7 @@
           <p:cNvPr id="9" name="slide-1-footer-number">
             <a:extLst xmlns:a="http://schemas.openxmlformats.org/drawingml/2006/main">
               <a:ext uri="{FF2B5EF4-FFF2-40B4-BE49-F238E27FC236}">
-                <a16:creationId xmlns:a16="http://schemas.microsoft.com/office/drawing/2014/main" id="{65E3B7FD-27B9-4FBC-A078-DC11C7893F38}"/>
+                <a16:creationId xmlns:a16="http://schemas.microsoft.com/office/drawing/2014/main" id="{17F8FFC5-AA17-403A-9E56-B44DBF7E39F3}"/>
               </a:ext>
             </a:extLst>
           </p:cNvPr>
@@ -2212,7 +2222,7 @@
     </p:spTree>
     <p:extLst>
       <p:ext uri="{BB962C8B-B14F-4D97-AF65-F5344CB8AC3E}">
-        <p14:creationId xmlns:p14="http://schemas.microsoft.com/office/powerpoint/2010/main" val="1932211662"/>
+        <p14:creationId xmlns:p14="http://schemas.microsoft.com/office/powerpoint/2010/main" val="1176502252"/>
       </p:ext>
     </p:extLst>
   </p:cSld>
@@ -2243,7 +2253,7 @@
           <p:cNvPr id="8" name="slide-2-title">
             <a:extLst xmlns:a="http://schemas.openxmlformats.org/drawingml/2006/main">
               <a:ext uri="{FF2B5EF4-FFF2-40B4-BE49-F238E27FC236}">
-                <a16:creationId xmlns:a16="http://schemas.microsoft.com/office/drawing/2014/main" id="{A9BEBD5A-3754-4077-B4B1-273DD832FDFA}"/>
+                <a16:creationId xmlns:a16="http://schemas.microsoft.com/office/drawing/2014/main" id="{EBF4F72F-93C7-46A0-B058-1FA62B16B5A8}"/>
               </a:ext>
             </a:extLst>
           </p:cNvPr>
@@ -2301,7 +2311,7 @@
           <p:cNvPr id="2" name="slide-2-title-rule">
             <a:extLst xmlns:a="http://schemas.openxmlformats.org/drawingml/2006/main">
               <a:ext uri="{FF2B5EF4-FFF2-40B4-BE49-F238E27FC236}">
-                <a16:creationId xmlns:a16="http://schemas.microsoft.com/office/drawing/2014/main" id="{41468502-B836-4172-8F9B-07554E27C65D}"/>
+                <a16:creationId xmlns:a16="http://schemas.microsoft.com/office/drawing/2014/main" id="{C6275909-45E4-4594-8471-0B48DD8A248D}"/>
               </a:ext>
             </a:extLst>
           </p:cNvPr>
@@ -2332,7 +2342,7 @@
           <p:cNvPr id="3" name="model-equation">
             <a:extLst xmlns:a="http://schemas.openxmlformats.org/drawingml/2006/main">
               <a:ext uri="{FF2B5EF4-FFF2-40B4-BE49-F238E27FC236}">
-                <a16:creationId xmlns:a16="http://schemas.microsoft.com/office/drawing/2014/main" id="{D4A87FDE-E4EB-4224-9AE4-BADCAD78F8CA}"/>
+                <a16:creationId xmlns:a16="http://schemas.microsoft.com/office/drawing/2014/main" id="{2BF86A62-F380-462D-A07D-86B904BF8F09}"/>
               </a:ext>
             </a:extLst>
           </p:cNvPr>
@@ -2390,7 +2400,7 @@
           <p:cNvPr id="4" name="simulation-restriction">
             <a:extLst xmlns:a="http://schemas.openxmlformats.org/drawingml/2006/main">
               <a:ext uri="{FF2B5EF4-FFF2-40B4-BE49-F238E27FC236}">
-                <a16:creationId xmlns:a16="http://schemas.microsoft.com/office/drawing/2014/main" id="{D54F7CC3-F44B-4F59-B3F7-F202AE1636CA}"/>
+                <a16:creationId xmlns:a16="http://schemas.microsoft.com/office/drawing/2014/main" id="{F97EB65E-41EF-4D6F-84F8-DEB4F7F1A1F6}"/>
               </a:ext>
             </a:extLst>
           </p:cNvPr>
@@ -2452,7 +2462,7 @@
           <p:nvPr/>
         </p:nvPicPr>
         <p:blipFill>
-          <a:blip xmlns:r="http://schemas.openxmlformats.org/officeDocument/2006/relationships" xmlns:a="http://schemas.openxmlformats.org/drawingml/2006/main" r:embed="R11d6b0ede3a24268"/>
+          <a:blip xmlns:r="http://schemas.openxmlformats.org/officeDocument/2006/relationships" xmlns:a="http://schemas.openxmlformats.org/drawingml/2006/main" r:embed="R4c33d064d4154890"/>
           <a:stretch xmlns:a="http://schemas.openxmlformats.org/drawingml/2006/main"/>
         </p:blipFill>
         <p:spPr>
@@ -2470,7 +2480,7 @@
           <p:cNvPr id="6" name="slide-2-footer-label">
             <a:extLst xmlns:a="http://schemas.openxmlformats.org/drawingml/2006/main">
               <a:ext uri="{FF2B5EF4-FFF2-40B4-BE49-F238E27FC236}">
-                <a16:creationId xmlns:a16="http://schemas.microsoft.com/office/drawing/2014/main" id="{BAF41C9C-1BD0-4EF0-B844-5D1DC3FC4844}"/>
+                <a16:creationId xmlns:a16="http://schemas.microsoft.com/office/drawing/2014/main" id="{974AF172-7769-476E-9F27-F87819A3C10D}"/>
               </a:ext>
             </a:extLst>
           </p:cNvPr>
@@ -2528,7 +2538,7 @@
           <p:cNvPr id="7" name="slide-2-footer-number">
             <a:extLst xmlns:a="http://schemas.openxmlformats.org/drawingml/2006/main">
               <a:ext uri="{FF2B5EF4-FFF2-40B4-BE49-F238E27FC236}">
-                <a16:creationId xmlns:a16="http://schemas.microsoft.com/office/drawing/2014/main" id="{7D2A3012-1AB9-411A-825A-3197B1891165}"/>
+                <a16:creationId xmlns:a16="http://schemas.microsoft.com/office/drawing/2014/main" id="{F816A203-EFA9-4ACE-8D49-30723F5B59C0}"/>
               </a:ext>
             </a:extLst>
           </p:cNvPr>
@@ -2584,7 +2594,7 @@
     </p:spTree>
     <p:extLst>
       <p:ext uri="{BB962C8B-B14F-4D97-AF65-F5344CB8AC3E}">
-        <p14:creationId xmlns:p14="http://schemas.microsoft.com/office/powerpoint/2010/main" val="571532722"/>
+        <p14:creationId xmlns:p14="http://schemas.microsoft.com/office/powerpoint/2010/main" val="1055638390"/>
       </p:ext>
     </p:extLst>
   </p:cSld>
@@ -2615,7 +2625,7 @@
           <p:cNvPr id="16" name="slide-3-title">
             <a:extLst xmlns:a="http://schemas.openxmlformats.org/drawingml/2006/main">
               <a:ext uri="{FF2B5EF4-FFF2-40B4-BE49-F238E27FC236}">
-                <a16:creationId xmlns:a16="http://schemas.microsoft.com/office/drawing/2014/main" id="{ED233650-B0AF-4A9F-AB5B-C4973FA8C2EF}"/>
+                <a16:creationId xmlns:a16="http://schemas.microsoft.com/office/drawing/2014/main" id="{F8E55A13-C37F-4B40-9331-33E49D04BD40}"/>
               </a:ext>
             </a:extLst>
           </p:cNvPr>
@@ -2673,7 +2683,7 @@
           <p:cNvPr id="2" name="slide-3-title-rule">
             <a:extLst xmlns:a="http://schemas.openxmlformats.org/drawingml/2006/main">
               <a:ext uri="{FF2B5EF4-FFF2-40B4-BE49-F238E27FC236}">
-                <a16:creationId xmlns:a16="http://schemas.microsoft.com/office/drawing/2014/main" id="{747F0258-BBBE-42B5-89D1-2FD9F57E7534}"/>
+                <a16:creationId xmlns:a16="http://schemas.microsoft.com/office/drawing/2014/main" id="{63CDA433-43FF-43FC-BB2D-73030277FF69}"/>
               </a:ext>
             </a:extLst>
           </p:cNvPr>
@@ -2708,7 +2718,7 @@
           <p:nvPr/>
         </p:nvPicPr>
         <p:blipFill>
-          <a:blip xmlns:r="http://schemas.openxmlformats.org/officeDocument/2006/relationships" xmlns:a="http://schemas.openxmlformats.org/drawingml/2006/main" r:embed="R276e9ce280a44675"/>
+          <a:blip xmlns:r="http://schemas.openxmlformats.org/officeDocument/2006/relationships" xmlns:a="http://schemas.openxmlformats.org/drawingml/2006/main" r:embed="R7bd5b1e338c2499b"/>
           <a:stretch xmlns:a="http://schemas.openxmlformats.org/drawingml/2006/main"/>
         </p:blipFill>
         <p:spPr>
@@ -2726,7 +2736,7 @@
           <p:cNvPr id="4" name="kss-head">
             <a:extLst xmlns:a="http://schemas.openxmlformats.org/drawingml/2006/main">
               <a:ext uri="{FF2B5EF4-FFF2-40B4-BE49-F238E27FC236}">
-                <a16:creationId xmlns:a16="http://schemas.microsoft.com/office/drawing/2014/main" id="{860CACE8-3E35-4D4F-B190-A4C33D85B249}"/>
+                <a16:creationId xmlns:a16="http://schemas.microsoft.com/office/drawing/2014/main" id="{A58D89D9-9586-4A10-A1A7-5910FBB3657B}"/>
               </a:ext>
             </a:extLst>
           </p:cNvPr>
@@ -2784,7 +2794,7 @@
           <p:cNvPr id="5" name="kss-number">
             <a:extLst xmlns:a="http://schemas.openxmlformats.org/drawingml/2006/main">
               <a:ext uri="{FF2B5EF4-FFF2-40B4-BE49-F238E27FC236}">
-                <a16:creationId xmlns:a16="http://schemas.microsoft.com/office/drawing/2014/main" id="{CF4B086B-B8AE-425E-A992-7F685E65489D}"/>
+                <a16:creationId xmlns:a16="http://schemas.microsoft.com/office/drawing/2014/main" id="{3C48B35B-E680-4E3C-A400-A7A8277BAA3E}"/>
               </a:ext>
             </a:extLst>
           </p:cNvPr>
@@ -2842,7 +2852,7 @@
           <p:cNvPr id="6" name="kss-body">
             <a:extLst xmlns:a="http://schemas.openxmlformats.org/drawingml/2006/main">
               <a:ext uri="{FF2B5EF4-FFF2-40B4-BE49-F238E27FC236}">
-                <a16:creationId xmlns:a16="http://schemas.microsoft.com/office/drawing/2014/main" id="{44AA0ACC-675C-4E2E-A473-007DB9359A21}"/>
+                <a16:creationId xmlns:a16="http://schemas.microsoft.com/office/drawing/2014/main" id="{5510A23D-D337-4044-8B5F-E0BED8408C12}"/>
               </a:ext>
             </a:extLst>
           </p:cNvPr>
@@ -2900,7 +2910,7 @@
           <p:cNvPr id="7" name="rail-rule-1">
             <a:extLst xmlns:a="http://schemas.openxmlformats.org/drawingml/2006/main">
               <a:ext uri="{FF2B5EF4-FFF2-40B4-BE49-F238E27FC236}">
-                <a16:creationId xmlns:a16="http://schemas.microsoft.com/office/drawing/2014/main" id="{7F6CE3E0-D417-4280-AEAB-A780541A1182}"/>
+                <a16:creationId xmlns:a16="http://schemas.microsoft.com/office/drawing/2014/main" id="{A96E000F-F20A-499C-A1AE-3ABCA59EBBC9}"/>
               </a:ext>
             </a:extLst>
           </p:cNvPr>
@@ -2931,7 +2941,7 @@
           <p:cNvPr id="8" name="blm-head">
             <a:extLst xmlns:a="http://schemas.openxmlformats.org/drawingml/2006/main">
               <a:ext uri="{FF2B5EF4-FFF2-40B4-BE49-F238E27FC236}">
-                <a16:creationId xmlns:a16="http://schemas.microsoft.com/office/drawing/2014/main" id="{6B337A66-291C-4A70-AE36-CBDEA9F08BF3}"/>
+                <a16:creationId xmlns:a16="http://schemas.microsoft.com/office/drawing/2014/main" id="{7B127482-6F07-4AB2-A321-ABCECFF0B6A4}"/>
               </a:ext>
             </a:extLst>
           </p:cNvPr>
@@ -2989,7 +2999,7 @@
           <p:cNvPr id="9" name="blm-number">
             <a:extLst xmlns:a="http://schemas.openxmlformats.org/drawingml/2006/main">
               <a:ext uri="{FF2B5EF4-FFF2-40B4-BE49-F238E27FC236}">
-                <a16:creationId xmlns:a16="http://schemas.microsoft.com/office/drawing/2014/main" id="{17125124-5BBF-43BE-B79A-99A1C57C62BD}"/>
+                <a16:creationId xmlns:a16="http://schemas.microsoft.com/office/drawing/2014/main" id="{678E9A15-C835-4369-B58F-8BBEA65DC269}"/>
               </a:ext>
             </a:extLst>
           </p:cNvPr>
@@ -3047,7 +3057,7 @@
           <p:cNvPr id="10" name="blm-body">
             <a:extLst xmlns:a="http://schemas.openxmlformats.org/drawingml/2006/main">
               <a:ext uri="{FF2B5EF4-FFF2-40B4-BE49-F238E27FC236}">
-                <a16:creationId xmlns:a16="http://schemas.microsoft.com/office/drawing/2014/main" id="{18D53551-7C05-4BA1-A457-2F57842AE914}"/>
+                <a16:creationId xmlns:a16="http://schemas.microsoft.com/office/drawing/2014/main" id="{D1C625F6-6DDE-453D-8454-7320F57CD6FA}"/>
               </a:ext>
             </a:extLst>
           </p:cNvPr>
@@ -3105,7 +3115,7 @@
           <p:cNvPr id="11" name="rail-rule-2">
             <a:extLst xmlns:a="http://schemas.openxmlformats.org/drawingml/2006/main">
               <a:ext uri="{FF2B5EF4-FFF2-40B4-BE49-F238E27FC236}">
-                <a16:creationId xmlns:a16="http://schemas.microsoft.com/office/drawing/2014/main" id="{873792FE-6058-4CFF-BBBA-46CA6751EA25}"/>
+                <a16:creationId xmlns:a16="http://schemas.microsoft.com/office/drawing/2014/main" id="{1BE94DDD-05DB-46C5-BADE-4447B03D5263}"/>
               </a:ext>
             </a:extLst>
           </p:cNvPr>
@@ -3136,7 +3146,7 @@
           <p:cNvPr id="12" name="bs20-head">
             <a:extLst xmlns:a="http://schemas.openxmlformats.org/drawingml/2006/main">
               <a:ext uri="{FF2B5EF4-FFF2-40B4-BE49-F238E27FC236}">
-                <a16:creationId xmlns:a16="http://schemas.microsoft.com/office/drawing/2014/main" id="{201D1C18-6089-465C-88AB-F72F64EB17EB}"/>
+                <a16:creationId xmlns:a16="http://schemas.microsoft.com/office/drawing/2014/main" id="{1B94169B-8621-4CDD-B4FE-86E5E1CE5072}"/>
               </a:ext>
             </a:extLst>
           </p:cNvPr>
@@ -3194,7 +3204,7 @@
           <p:cNvPr id="13" name="bs20-body">
             <a:extLst xmlns:a="http://schemas.openxmlformats.org/drawingml/2006/main">
               <a:ext uri="{FF2B5EF4-FFF2-40B4-BE49-F238E27FC236}">
-                <a16:creationId xmlns:a16="http://schemas.microsoft.com/office/drawing/2014/main" id="{D3E15319-A228-4AD8-9D1C-5B0C718B62E7}"/>
+                <a16:creationId xmlns:a16="http://schemas.microsoft.com/office/drawing/2014/main" id="{7E513B98-3620-4F58-B102-792884FABA13}"/>
               </a:ext>
             </a:extLst>
           </p:cNvPr>
@@ -3252,7 +3262,7 @@
           <p:cNvPr id="14" name="slide-3-footer-label">
             <a:extLst xmlns:a="http://schemas.openxmlformats.org/drawingml/2006/main">
               <a:ext uri="{FF2B5EF4-FFF2-40B4-BE49-F238E27FC236}">
-                <a16:creationId xmlns:a16="http://schemas.microsoft.com/office/drawing/2014/main" id="{FCE472D1-6EB5-48FA-BC54-18935660CEB8}"/>
+                <a16:creationId xmlns:a16="http://schemas.microsoft.com/office/drawing/2014/main" id="{B4B7F824-3CE4-4AA1-80F3-5CD42C8BE3C0}"/>
               </a:ext>
             </a:extLst>
           </p:cNvPr>
@@ -3310,7 +3320,7 @@
           <p:cNvPr id="15" name="slide-3-footer-number">
             <a:extLst xmlns:a="http://schemas.openxmlformats.org/drawingml/2006/main">
               <a:ext uri="{FF2B5EF4-FFF2-40B4-BE49-F238E27FC236}">
-                <a16:creationId xmlns:a16="http://schemas.microsoft.com/office/drawing/2014/main" id="{B7AD18AF-77E6-4F24-B403-4DAF50055589}"/>
+                <a16:creationId xmlns:a16="http://schemas.microsoft.com/office/drawing/2014/main" id="{047B7D2D-4D68-45FB-A35F-03A247AA7157}"/>
               </a:ext>
             </a:extLst>
           </p:cNvPr>
@@ -3366,7 +3376,7 @@
     </p:spTree>
     <p:extLst>
       <p:ext uri="{BB962C8B-B14F-4D97-AF65-F5344CB8AC3E}">
-        <p14:creationId xmlns:p14="http://schemas.microsoft.com/office/powerpoint/2010/main" val="44191911"/>
+        <p14:creationId xmlns:p14="http://schemas.microsoft.com/office/powerpoint/2010/main" val="1497452354"/>
       </p:ext>
     </p:extLst>
   </p:cSld>
@@ -3394,10 +3404,10 @@
       </p:grpSpPr>
       <p:sp>
         <p:nvSpPr>
-          <p:cNvPr id="14" name="slide-4-title">
-            <a:extLst xmlns:a="http://schemas.openxmlformats.org/drawingml/2006/main">
-              <a:ext uri="{FF2B5EF4-FFF2-40B4-BE49-F238E27FC236}">
-                <a16:creationId xmlns:a16="http://schemas.microsoft.com/office/drawing/2014/main" id="{FACEDE1E-F9B7-486A-B638-2199B0418AEC}"/>
+          <p:cNvPr id="15" name="slide-4-title">
+            <a:extLst xmlns:a="http://schemas.openxmlformats.org/drawingml/2006/main">
+              <a:ext uri="{FF2B5EF4-FFF2-40B4-BE49-F238E27FC236}">
+                <a16:creationId xmlns:a16="http://schemas.microsoft.com/office/drawing/2014/main" id="{045C974F-CC63-47AB-94A8-0E877E64290F}"/>
               </a:ext>
             </a:extLst>
           </p:cNvPr>
@@ -3427,7 +3437,7 @@
           <a:lstStyle xmlns:a="http://schemas.openxmlformats.org/drawingml/2006/main"/>
           <a:p xmlns:a="http://schemas.openxmlformats.org/drawingml/2006/main">
             <a:pPr algn="l">
-              <a:defRPr sz="2700" b="1" i="0">
+              <a:defRPr sz="2625" b="1" i="0">
                 <a:solidFill>
                   <a:srgbClr val="000000"/>
                 </a:solidFill>
@@ -3437,7 +3447,7 @@
               </a:defRPr>
             </a:pPr>
             <a:r>
-              <a:rPr sz="2700" b="1" i="0">
+              <a:rPr sz="2625" b="1" i="0">
                 <a:solidFill>
                   <a:srgbClr val="000000"/>
                 </a:solidFill>
@@ -3445,7 +3455,7 @@
                 <a:ea typeface="Arial"/>
                 <a:cs typeface="Arial"/>
               </a:rPr>
-              <a:t>Correct rank selection does not guarantee stable completion</a:t>
+              <a:t>Correct rank selection does not guarantee reproducible completion</a:t>
             </a:r>
           </a:p>
         </p:txBody>
@@ -3455,7 +3465,7 @@
           <p:cNvPr id="2" name="slide-4-title-rule">
             <a:extLst xmlns:a="http://schemas.openxmlformats.org/drawingml/2006/main">
               <a:ext uri="{FF2B5EF4-FFF2-40B4-BE49-F238E27FC236}">
-                <a16:creationId xmlns:a16="http://schemas.microsoft.com/office/drawing/2014/main" id="{7A9DC66E-47A1-4DD2-8EDC-8513D0EFD5D7}"/>
+                <a16:creationId xmlns:a16="http://schemas.microsoft.com/office/drawing/2014/main" id="{98806755-6C03-4AE5-BE95-118CC32A6FDD}"/>
               </a:ext>
             </a:extLst>
           </p:cNvPr>
@@ -3483,20 +3493,20 @@
       </p:sp>
       <p:pic>
         <p:nvPicPr>
-          <p:cNvPr id="16" name=""/>
+          <p:cNvPr id="17" name=""/>
           <p:cNvPicPr>
             <a:picLocks xmlns:a="http://schemas.openxmlformats.org/drawingml/2006/main" noChangeAspect="1"/>
           </p:cNvPicPr>
           <p:nvPr/>
         </p:nvPicPr>
         <p:blipFill>
-          <a:blip xmlns:r="http://schemas.openxmlformats.org/officeDocument/2006/relationships" xmlns:a="http://schemas.openxmlformats.org/drawingml/2006/main" r:embed="R3602a9d7721e4fb8"/>
+          <a:blip xmlns:r="http://schemas.openxmlformats.org/officeDocument/2006/relationships" xmlns:a="http://schemas.openxmlformats.org/drawingml/2006/main" r:embed="R34c4ffbd91b24a49"/>
           <a:stretch xmlns:a="http://schemas.openxmlformats.org/drawingml/2006/main"/>
         </p:blipFill>
         <p:spPr>
           <a:xfrm xmlns:a="http://schemas.openxmlformats.org/drawingml/2006/main">
-            <a:off x="304800" y="1160057"/>
-            <a:ext cx="8286750" cy="4928411"/>
+            <a:off x="228600" y="1202418"/>
+            <a:ext cx="8096250" cy="4815114"/>
           </a:xfrm>
           <a:prstGeom xmlns:a="http://schemas.openxmlformats.org/drawingml/2006/main" prst="rect">
             <a:avLst/>
@@ -3508,19 +3518,19 @@
           <p:cNvPr id="4" name="rank-total">
             <a:extLst xmlns:a="http://schemas.openxmlformats.org/drawingml/2006/main">
               <a:ext uri="{FF2B5EF4-FFF2-40B4-BE49-F238E27FC236}">
-                <a16:creationId xmlns:a16="http://schemas.microsoft.com/office/drawing/2014/main" id="{9FFBD362-AD23-404D-B99C-690B27A9BE57}"/>
-              </a:ext>
-            </a:extLst>
-          </p:cNvPr>
-          <p:cNvSpPr>
-            <a:spLocks xmlns:a="http://schemas.openxmlformats.org/drawingml/2006/main" noGrp="1"/>
-          </p:cNvSpPr>
-          <p:nvPr/>
-        </p:nvSpPr>
-        <p:spPr>
-          <a:xfrm xmlns:a="http://schemas.openxmlformats.org/drawingml/2006/main">
-            <a:off x="8858250" y="1333500"/>
-            <a:ext cx="2714625" cy="666750"/>
+                <a16:creationId xmlns:a16="http://schemas.microsoft.com/office/drawing/2014/main" id="{AE059CC9-B835-4516-8E07-77579192089B}"/>
+              </a:ext>
+            </a:extLst>
+          </p:cNvPr>
+          <p:cNvSpPr>
+            <a:spLocks xmlns:a="http://schemas.openxmlformats.org/drawingml/2006/main" noGrp="1"/>
+          </p:cNvSpPr>
+          <p:nvPr/>
+        </p:nvSpPr>
+        <p:spPr>
+          <a:xfrm xmlns:a="http://schemas.openxmlformats.org/drawingml/2006/main">
+            <a:off x="8667750" y="1162050"/>
+            <a:ext cx="2952750" cy="495300"/>
           </a:xfrm>
           <a:prstGeom xmlns:a="http://schemas.openxmlformats.org/drawingml/2006/main" prst="rect">
             <a:avLst/>
@@ -3538,7 +3548,7 @@
           <a:lstStyle xmlns:a="http://schemas.openxmlformats.org/drawingml/2006/main"/>
           <a:p xmlns:a="http://schemas.openxmlformats.org/drawingml/2006/main">
             <a:pPr algn="l">
-              <a:defRPr sz="3900" b="1" i="0">
+              <a:defRPr sz="3150" b="1" i="0">
                 <a:solidFill>
                   <a:srgbClr val="3D8DFF"/>
                 </a:solidFill>
@@ -3548,7 +3558,7 @@
               </a:defRPr>
             </a:pPr>
             <a:r>
-              <a:rPr sz="3900" b="1" i="0">
+              <a:rPr sz="3150" b="1" i="0">
                 <a:solidFill>
                   <a:srgbClr val="3D8DFF"/>
                 </a:solidFill>
@@ -3566,37 +3576,37 @@
           <p:cNvPr id="5" name="rank-total-label">
             <a:extLst xmlns:a="http://schemas.openxmlformats.org/drawingml/2006/main">
               <a:ext uri="{FF2B5EF4-FFF2-40B4-BE49-F238E27FC236}">
-                <a16:creationId xmlns:a16="http://schemas.microsoft.com/office/drawing/2014/main" id="{1596AC5D-43EC-4C5B-85AE-76D151362C80}"/>
-              </a:ext>
-            </a:extLst>
-          </p:cNvPr>
-          <p:cNvSpPr>
-            <a:spLocks xmlns:a="http://schemas.openxmlformats.org/drawingml/2006/main" noGrp="1"/>
-          </p:cNvSpPr>
-          <p:nvPr/>
-        </p:nvSpPr>
-        <p:spPr>
-          <a:xfrm xmlns:a="http://schemas.openxmlformats.org/drawingml/2006/main">
-            <a:off x="8858250" y="2038350"/>
-            <a:ext cx="2714625" cy="533400"/>
-          </a:xfrm>
-          <a:prstGeom xmlns:a="http://schemas.openxmlformats.org/drawingml/2006/main" prst="rect">
-            <a:avLst/>
-          </a:prstGeom>
-          <a:noFill xmlns:a="http://schemas.openxmlformats.org/drawingml/2006/main"/>
-          <a:ln xmlns:a="http://schemas.openxmlformats.org/drawingml/2006/main" w="0">
-            <a:noFill/>
-            <a:prstDash val="solid"/>
-          </a:ln>
-        </p:spPr>
-        <p:txBody>
-          <a:bodyPr xmlns:a="http://schemas.openxmlformats.org/drawingml/2006/main" lIns="0" tIns="0" rIns="0" bIns="0" anchor="t">
-            <a:normAutofit fontScale="100000"/>
+                <a16:creationId xmlns:a16="http://schemas.microsoft.com/office/drawing/2014/main" id="{E6693113-C868-4DFA-8191-347EF12AFE7F}"/>
+              </a:ext>
+            </a:extLst>
+          </p:cNvPr>
+          <p:cNvSpPr>
+            <a:spLocks xmlns:a="http://schemas.openxmlformats.org/drawingml/2006/main" noGrp="1"/>
+          </p:cNvSpPr>
+          <p:nvPr/>
+        </p:nvSpPr>
+        <p:spPr>
+          <a:xfrm xmlns:a="http://schemas.openxmlformats.org/drawingml/2006/main">
+            <a:off x="8667750" y="1685925"/>
+            <a:ext cx="2952750" cy="285750"/>
+          </a:xfrm>
+          <a:prstGeom xmlns:a="http://schemas.openxmlformats.org/drawingml/2006/main" prst="rect">
+            <a:avLst/>
+          </a:prstGeom>
+          <a:noFill xmlns:a="http://schemas.openxmlformats.org/drawingml/2006/main"/>
+          <a:ln xmlns:a="http://schemas.openxmlformats.org/drawingml/2006/main" w="0">
+            <a:noFill/>
+            <a:prstDash val="solid"/>
+          </a:ln>
+        </p:spPr>
+        <p:txBody>
+          <a:bodyPr xmlns:a="http://schemas.openxmlformats.org/drawingml/2006/main" lIns="0" tIns="0" rIns="0" bIns="0" anchor="t">
+            <a:noAutofit/>
           </a:bodyPr>
           <a:lstStyle xmlns:a="http://schemas.openxmlformats.org/drawingml/2006/main"/>
           <a:p xmlns:a="http://schemas.openxmlformats.org/drawingml/2006/main">
             <a:pPr algn="l">
-              <a:defRPr sz="1350" b="0" i="0">
+              <a:defRPr sz="1275" b="0" i="0">
                 <a:solidFill>
                   <a:srgbClr val="59616D"/>
                 </a:solidFill>
@@ -3606,7 +3616,7 @@
               </a:defRPr>
             </a:pPr>
             <a:r>
-              <a:rPr sz="1350" b="0" i="0">
+              <a:rPr sz="1275" b="0" i="0">
                 <a:solidFill>
                   <a:srgbClr val="59616D"/>
                 </a:solidFill>
@@ -3624,19 +3634,19 @@
           <p:cNvPr id="6" name="rank-rule">
             <a:extLst xmlns:a="http://schemas.openxmlformats.org/drawingml/2006/main">
               <a:ext uri="{FF2B5EF4-FFF2-40B4-BE49-F238E27FC236}">
-                <a16:creationId xmlns:a16="http://schemas.microsoft.com/office/drawing/2014/main" id="{8FE759E1-9DB3-40C1-8441-C5EF45FB980A}"/>
-              </a:ext>
-            </a:extLst>
-          </p:cNvPr>
-          <p:cNvSpPr>
-            <a:spLocks xmlns:a="http://schemas.openxmlformats.org/drawingml/2006/main" noGrp="1"/>
-          </p:cNvSpPr>
-          <p:nvPr/>
-        </p:nvSpPr>
-        <p:spPr>
-          <a:xfrm xmlns:a="http://schemas.openxmlformats.org/drawingml/2006/main">
-            <a:off x="8858250" y="2781300"/>
-            <a:ext cx="2714625" cy="9525"/>
+                <a16:creationId xmlns:a16="http://schemas.microsoft.com/office/drawing/2014/main" id="{D8700B41-A51B-45C9-9EC7-3E854D0DFBF5}"/>
+              </a:ext>
+            </a:extLst>
+          </p:cNvPr>
+          <p:cNvSpPr>
+            <a:spLocks xmlns:a="http://schemas.openxmlformats.org/drawingml/2006/main" noGrp="1"/>
+          </p:cNvSpPr>
+          <p:nvPr/>
+        </p:nvSpPr>
+        <p:spPr>
+          <a:xfrm xmlns:a="http://schemas.openxmlformats.org/drawingml/2006/main">
+            <a:off x="8667750" y="2114550"/>
+            <a:ext cx="2952750" cy="9525"/>
           </a:xfrm>
           <a:prstGeom xmlns:a="http://schemas.openxmlformats.org/drawingml/2006/main" prst="rect">
             <a:avLst/>
@@ -3655,19 +3665,19 @@
           <p:cNvPr id="7" name="warn-head">
             <a:extLst xmlns:a="http://schemas.openxmlformats.org/drawingml/2006/main">
               <a:ext uri="{FF2B5EF4-FFF2-40B4-BE49-F238E27FC236}">
-                <a16:creationId xmlns:a16="http://schemas.microsoft.com/office/drawing/2014/main" id="{A474B6F9-BE2A-47A5-B556-42EC1DB000F3}"/>
-              </a:ext>
-            </a:extLst>
-          </p:cNvPr>
-          <p:cNvSpPr>
-            <a:spLocks xmlns:a="http://schemas.openxmlformats.org/drawingml/2006/main" noGrp="1"/>
-          </p:cNvSpPr>
-          <p:nvPr/>
-        </p:nvSpPr>
-        <p:spPr>
-          <a:xfrm xmlns:a="http://schemas.openxmlformats.org/drawingml/2006/main">
-            <a:off x="8858250" y="3009900"/>
-            <a:ext cx="2714625" cy="304800"/>
+                <a16:creationId xmlns:a16="http://schemas.microsoft.com/office/drawing/2014/main" id="{6150743C-616D-4749-A2DA-0802E38BD87D}"/>
+              </a:ext>
+            </a:extLst>
+          </p:cNvPr>
+          <p:cNvSpPr>
+            <a:spLocks xmlns:a="http://schemas.openxmlformats.org/drawingml/2006/main" noGrp="1"/>
+          </p:cNvSpPr>
+          <p:nvPr/>
+        </p:nvSpPr>
+        <p:spPr>
+          <a:xfrm xmlns:a="http://schemas.openxmlformats.org/drawingml/2006/main">
+            <a:off x="8667750" y="2305050"/>
+            <a:ext cx="2952750" cy="323850"/>
           </a:xfrm>
           <a:prstGeom xmlns:a="http://schemas.openxmlformats.org/drawingml/2006/main" prst="rect">
             <a:avLst/>
@@ -3685,7 +3695,7 @@
           <a:lstStyle xmlns:a="http://schemas.openxmlformats.org/drawingml/2006/main"/>
           <a:p xmlns:a="http://schemas.openxmlformats.org/drawingml/2006/main">
             <a:pPr algn="l">
-              <a:defRPr sz="1800" b="1" i="0">
+              <a:defRPr sz="1725" b="1" i="0">
                 <a:solidFill>
                   <a:srgbClr val="000000"/>
                 </a:solidFill>
@@ -3695,7 +3705,7 @@
               </a:defRPr>
             </a:pPr>
             <a:r>
-              <a:rPr sz="1800" b="1" i="0">
+              <a:rPr sz="1725" b="1" i="0">
                 <a:solidFill>
                   <a:srgbClr val="000000"/>
                 </a:solidFill>
@@ -3703,47 +3713,290 @@
                 <a:ea typeface="Arial"/>
                 <a:cs typeface="Arial"/>
               </a:rPr>
-              <a:t>Project warnings</a:t>
-            </a:r>
-          </a:p>
-        </p:txBody>
-      </p:sp>
-      <p:sp>
-        <p:nvSpPr>
-          <p:cNvPr id="8" name="warn-crippa">
-            <a:extLst xmlns:a="http://schemas.openxmlformats.org/drawingml/2006/main">
-              <a:ext uri="{FF2B5EF4-FFF2-40B4-BE49-F238E27FC236}">
-                <a16:creationId xmlns:a16="http://schemas.microsoft.com/office/drawing/2014/main" id="{5E2506F3-3B1E-4100-8446-21885CF15364}"/>
-              </a:ext>
-            </a:extLst>
-          </p:cNvPr>
-          <p:cNvSpPr>
-            <a:spLocks xmlns:a="http://schemas.openxmlformats.org/drawingml/2006/main" noGrp="1"/>
-          </p:cNvSpPr>
-          <p:nvPr/>
-        </p:nvSpPr>
-        <p:spPr>
-          <a:xfrm xmlns:a="http://schemas.openxmlformats.org/drawingml/2006/main">
-            <a:off x="8858250" y="3486150"/>
-            <a:ext cx="2714625" cy="285750"/>
-          </a:xfrm>
-          <a:prstGeom xmlns:a="http://schemas.openxmlformats.org/drawingml/2006/main" prst="rect">
-            <a:avLst/>
-          </a:prstGeom>
-          <a:noFill xmlns:a="http://schemas.openxmlformats.org/drawingml/2006/main"/>
-          <a:ln xmlns:a="http://schemas.openxmlformats.org/drawingml/2006/main" w="0">
-            <a:noFill/>
-            <a:prstDash val="solid"/>
-          </a:ln>
-        </p:spPr>
-        <p:txBody>
-          <a:bodyPr xmlns:a="http://schemas.openxmlformats.org/drawingml/2006/main" lIns="0" tIns="0" rIns="0" bIns="0" anchor="t">
-            <a:noAutofit/>
+              <a:t>What is a project warning?</a:t>
+            </a:r>
+          </a:p>
+        </p:txBody>
+      </p:sp>
+      <p:sp>
+        <p:nvSpPr>
+          <p:cNvPr id="8" name="warn-definition">
+            <a:extLst xmlns:a="http://schemas.openxmlformats.org/drawingml/2006/main">
+              <a:ext uri="{FF2B5EF4-FFF2-40B4-BE49-F238E27FC236}">
+                <a16:creationId xmlns:a16="http://schemas.microsoft.com/office/drawing/2014/main" id="{A58E9CD7-2306-4114-B66E-EFCBBC8D9E92}"/>
+              </a:ext>
+            </a:extLst>
+          </p:cNvPr>
+          <p:cNvSpPr>
+            <a:spLocks xmlns:a="http://schemas.openxmlformats.org/drawingml/2006/main" noGrp="1"/>
+          </p:cNvSpPr>
+          <p:nvPr/>
+        </p:nvSpPr>
+        <p:spPr>
+          <a:xfrm xmlns:a="http://schemas.openxmlformats.org/drawingml/2006/main">
+            <a:off x="8667750" y="2724150"/>
+            <a:ext cx="2952750" cy="628650"/>
+          </a:xfrm>
+          <a:prstGeom xmlns:a="http://schemas.openxmlformats.org/drawingml/2006/main" prst="rect">
+            <a:avLst/>
+          </a:prstGeom>
+          <a:noFill xmlns:a="http://schemas.openxmlformats.org/drawingml/2006/main"/>
+          <a:ln xmlns:a="http://schemas.openxmlformats.org/drawingml/2006/main" w="0">
+            <a:noFill/>
+            <a:prstDash val="solid"/>
+          </a:ln>
+        </p:spPr>
+        <p:txBody>
+          <a:bodyPr xmlns:a="http://schemas.openxmlformats.org/drawingml/2006/main" lIns="0" tIns="0" rIns="0" bIns="0" anchor="t">
+            <a:normAutofit fontScale="100000"/>
           </a:bodyPr>
           <a:lstStyle xmlns:a="http://schemas.openxmlformats.org/drawingml/2006/main"/>
           <a:p xmlns:a="http://schemas.openxmlformats.org/drawingml/2006/main">
             <a:pPr algn="l">
-              <a:defRPr sz="1575" b="1" i="0">
+              <a:defRPr sz="1275" b="0" i="0">
+                <a:solidFill>
+                  <a:srgbClr val="59616D"/>
+                </a:solidFill>
+                <a:latin typeface="Arial"/>
+                <a:ea typeface="Arial"/>
+                <a:cs typeface="Arial"/>
+              </a:defRPr>
+            </a:pPr>
+            <a:r>
+              <a:rPr sz="1275" b="0" i="0">
+                <a:solidFill>
+                  <a:srgbClr val="59616D"/>
+                </a:solidFill>
+                <a:latin typeface="Arial"/>
+                <a:ea typeface="Arial"/>
+                <a:cs typeface="Arial"/>
+              </a:rPr>
+              <a:t>A finite estimate was returned, but its positive-rank fit failed at least one reproducibility condition:</a:t>
+            </a:r>
+          </a:p>
+        </p:txBody>
+      </p:sp>
+      <p:sp>
+        <p:nvSpPr>
+          <p:cNvPr id="9" name="warn-conditions">
+            <a:extLst xmlns:a="http://schemas.openxmlformats.org/drawingml/2006/main">
+              <a:ext uri="{FF2B5EF4-FFF2-40B4-BE49-F238E27FC236}">
+                <a16:creationId xmlns:a16="http://schemas.microsoft.com/office/drawing/2014/main" id="{5F932116-D009-4C5B-820D-8E0BEB4B889E}"/>
+              </a:ext>
+            </a:extLst>
+          </p:cNvPr>
+          <p:cNvSpPr>
+            <a:spLocks xmlns:a="http://schemas.openxmlformats.org/drawingml/2006/main" noGrp="1"/>
+          </p:cNvSpPr>
+          <p:nvPr/>
+        </p:nvSpPr>
+        <p:spPr>
+          <a:xfrm xmlns:a="http://schemas.openxmlformats.org/drawingml/2006/main">
+            <a:off x="8810625" y="3429000"/>
+            <a:ext cx="2809875" cy="1123950"/>
+          </a:xfrm>
+          <a:prstGeom xmlns:a="http://schemas.openxmlformats.org/drawingml/2006/main" prst="rect">
+            <a:avLst/>
+          </a:prstGeom>
+          <a:noFill xmlns:a="http://schemas.openxmlformats.org/drawingml/2006/main"/>
+          <a:ln xmlns:a="http://schemas.openxmlformats.org/drawingml/2006/main" w="0">
+            <a:noFill/>
+            <a:prstDash val="solid"/>
+          </a:ln>
+        </p:spPr>
+        <p:txBody>
+          <a:bodyPr xmlns:a="http://schemas.openxmlformats.org/drawingml/2006/main" lIns="0" tIns="0" rIns="0" bIns="0" anchor="t">
+            <a:normAutofit fontScale="100000"/>
+          </a:bodyPr>
+          <a:lstStyle xmlns:a="http://schemas.openxmlformats.org/drawingml/2006/main"/>
+          <a:p xmlns:a="http://schemas.openxmlformats.org/drawingml/2006/main">
+            <a:pPr algn="l">
+              <a:defRPr sz="1275" b="1" i="0">
+                <a:solidFill>
+                  <a:srgbClr val="000000"/>
+                </a:solidFill>
+                <a:latin typeface="Arial"/>
+                <a:ea typeface="Arial"/>
+                <a:cs typeface="Arial"/>
+              </a:defRPr>
+            </a:pPr>
+            <a:r>
+              <a:rPr sz="1275" b="1" i="0">
+                <a:solidFill>
+                  <a:srgbClr val="000000"/>
+                </a:solidFill>
+                <a:latin typeface="Arial"/>
+                <a:ea typeface="Arial"/>
+                <a:cs typeface="Arial"/>
+              </a:rPr>
+              <a:t>1. Best ALS fit did not converge.</a:t>
+            </a:r>
+          </a:p>
+          <a:p xmlns:a="http://schemas.openxmlformats.org/drawingml/2006/main">
+            <a:pPr algn="l">
+              <a:defRPr sz="1275" b="1" i="0">
+                <a:solidFill>
+                  <a:srgbClr val="000000"/>
+                </a:solidFill>
+                <a:latin typeface="Arial"/>
+                <a:ea typeface="Arial"/>
+                <a:cs typeface="Arial"/>
+              </a:defRPr>
+            </a:pPr>
+            <a:r>
+              <a:rPr sz="1275" b="1" i="0">
+                <a:solidFill>
+                  <a:srgbClr val="000000"/>
+                </a:solidFill>
+                <a:latin typeface="Arial"/>
+                <a:ea typeface="Arial"/>
+                <a:cs typeface="Arial"/>
+              </a:rPr>
+              <a:t>2. Fewer than two near-best starts.</a:t>
+            </a:r>
+          </a:p>
+          <a:p xmlns:a="http://schemas.openxmlformats.org/drawingml/2006/main">
+            <a:pPr algn="l">
+              <a:defRPr sz="1275" b="1" i="0">
+                <a:solidFill>
+                  <a:srgbClr val="000000"/>
+                </a:solidFill>
+                <a:latin typeface="Arial"/>
+                <a:ea typeface="Arial"/>
+                <a:cs typeface="Arial"/>
+              </a:defRPr>
+            </a:pPr>
+            <a:r>
+              <a:rPr sz="1275" b="1" i="0">
+                <a:solidFill>
+                  <a:srgbClr val="000000"/>
+                </a:solidFill>
+                <a:latin typeface="Arial"/>
+                <a:ea typeface="Arial"/>
+                <a:cs typeface="Arial"/>
+              </a:rPr>
+              <a:t>3. Near-best starts disagree on Q_F, H_F, or C^w_assign beyond tolerance.</a:t>
+            </a:r>
+          </a:p>
+        </p:txBody>
+      </p:sp>
+      <p:sp>
+        <p:nvSpPr>
+          <p:cNvPr id="10" name="warn-thresholds">
+            <a:extLst xmlns:a="http://schemas.openxmlformats.org/drawingml/2006/main">
+              <a:ext uri="{FF2B5EF4-FFF2-40B4-BE49-F238E27FC236}">
+                <a16:creationId xmlns:a16="http://schemas.microsoft.com/office/drawing/2014/main" id="{CD0667F9-5EAC-4AE3-8057-6025EE9EC730}"/>
+              </a:ext>
+            </a:extLst>
+          </p:cNvPr>
+          <p:cNvSpPr>
+            <a:spLocks xmlns:a="http://schemas.openxmlformats.org/drawingml/2006/main" noGrp="1"/>
+          </p:cNvSpPr>
+          <p:nvPr/>
+        </p:nvSpPr>
+        <p:spPr>
+          <a:xfrm xmlns:a="http://schemas.openxmlformats.org/drawingml/2006/main">
+            <a:off x="8667750" y="4657725"/>
+            <a:ext cx="2952750" cy="552450"/>
+          </a:xfrm>
+          <a:prstGeom xmlns:a="http://schemas.openxmlformats.org/drawingml/2006/main" prst="rect">
+            <a:avLst/>
+          </a:prstGeom>
+          <a:noFill xmlns:a="http://schemas.openxmlformats.org/drawingml/2006/main"/>
+          <a:ln xmlns:a="http://schemas.openxmlformats.org/drawingml/2006/main" w="0">
+            <a:noFill/>
+            <a:prstDash val="solid"/>
+          </a:ln>
+        </p:spPr>
+        <p:txBody>
+          <a:bodyPr xmlns:a="http://schemas.openxmlformats.org/drawingml/2006/main" lIns="0" tIns="0" rIns="0" bIns="0" anchor="t">
+            <a:normAutofit fontScale="98934"/>
+          </a:bodyPr>
+          <a:lstStyle xmlns:a="http://schemas.openxmlformats.org/drawingml/2006/main"/>
+          <a:p xmlns:a="http://schemas.openxmlformats.org/drawingml/2006/main">
+            <a:pPr algn="l">
+              <a:defRPr sz="1200" b="0" i="0">
+                <a:solidFill>
+                  <a:srgbClr val="59616D"/>
+                </a:solidFill>
+                <a:latin typeface="Arial"/>
+                <a:ea typeface="Arial"/>
+                <a:cs typeface="Arial"/>
+              </a:defRPr>
+            </a:pPr>
+            <a:r>
+              <a:rPr sz="1200" b="0" i="0">
+                <a:solidFill>
+                  <a:srgbClr val="59616D"/>
+                </a:solidFill>
+                <a:latin typeface="Arial"/>
+                <a:ea typeface="Arial"/>
+                <a:cs typeface="Arial"/>
+              </a:rPr>
+              <a:t>Near-best objective: within 10^-4 max(1,O*).</a:t>
+            </a:r>
+          </a:p>
+          <a:p xmlns:a="http://schemas.openxmlformats.org/drawingml/2006/main">
+            <a:pPr algn="l">
+              <a:defRPr sz="1200" b="0" i="0">
+                <a:solidFill>
+                  <a:srgbClr val="59616D"/>
+                </a:solidFill>
+                <a:latin typeface="Arial"/>
+                <a:ea typeface="Arial"/>
+                <a:cs typeface="Arial"/>
+              </a:defRPr>
+            </a:pPr>
+            <a:r>
+              <a:rPr sz="1200" b="0" i="0">
+                <a:solidFill>
+                  <a:srgbClr val="59616D"/>
+                </a:solidFill>
+                <a:latin typeface="Arial"/>
+                <a:ea typeface="Arial"/>
+                <a:cs typeface="Arial"/>
+              </a:rPr>
+              <a:t>Functional spread limit: 10^-3 max(1,|theta*|).</a:t>
+            </a:r>
+          </a:p>
+        </p:txBody>
+      </p:sp>
+      <p:sp>
+        <p:nvSpPr>
+          <p:cNvPr id="11" name="warn-counts">
+            <a:extLst xmlns:a="http://schemas.openxmlformats.org/drawingml/2006/main">
+              <a:ext uri="{FF2B5EF4-FFF2-40B4-BE49-F238E27FC236}">
+                <a16:creationId xmlns:a16="http://schemas.microsoft.com/office/drawing/2014/main" id="{F91C85BF-B5E9-43FF-8D58-A358B0C23A1A}"/>
+              </a:ext>
+            </a:extLst>
+          </p:cNvPr>
+          <p:cNvSpPr>
+            <a:spLocks xmlns:a="http://schemas.openxmlformats.org/drawingml/2006/main" noGrp="1"/>
+          </p:cNvSpPr>
+          <p:nvPr/>
+        </p:nvSpPr>
+        <p:spPr>
+          <a:xfrm xmlns:a="http://schemas.openxmlformats.org/drawingml/2006/main">
+            <a:off x="8667750" y="5353050"/>
+            <a:ext cx="2952750" cy="438150"/>
+          </a:xfrm>
+          <a:prstGeom xmlns:a="http://schemas.openxmlformats.org/drawingml/2006/main" prst="rect">
+            <a:avLst/>
+          </a:prstGeom>
+          <a:noFill xmlns:a="http://schemas.openxmlformats.org/drawingml/2006/main"/>
+          <a:ln xmlns:a="http://schemas.openxmlformats.org/drawingml/2006/main" w="0">
+            <a:noFill/>
+            <a:prstDash val="solid"/>
+          </a:ln>
+        </p:spPr>
+        <p:txBody>
+          <a:bodyPr xmlns:a="http://schemas.openxmlformats.org/drawingml/2006/main" lIns="0" tIns="0" rIns="0" bIns="0" anchor="t">
+            <a:normAutofit fontScale="100000"/>
+          </a:bodyPr>
+          <a:lstStyle xmlns:a="http://schemas.openxmlformats.org/drawingml/2006/main"/>
+          <a:p xmlns:a="http://schemas.openxmlformats.org/drawingml/2006/main">
+            <a:pPr algn="l">
+              <a:defRPr sz="1275" b="1" i="0">
                 <a:solidFill>
                   <a:srgbClr val="D55E00"/>
                 </a:solidFill>
@@ -3753,7 +4006,7 @@
               </a:defRPr>
             </a:pPr>
             <a:r>
-              <a:rPr sz="1575" b="1" i="0">
+              <a:rPr sz="1275" b="1" i="0">
                 <a:solidFill>
                   <a:srgbClr val="D55E00"/>
                 </a:solidFill>
@@ -3761,163 +4014,47 @@
                 <a:ea typeface="Arial"/>
                 <a:cs typeface="Arial"/>
               </a:rPr>
-              <a:t>61%   Crippa/Tukey</a:t>
-            </a:r>
-          </a:p>
-        </p:txBody>
-      </p:sp>
-      <p:sp>
-        <p:nvSpPr>
-          <p:cNvPr id="9" name="warn-blm">
-            <a:extLst xmlns:a="http://schemas.openxmlformats.org/drawingml/2006/main">
-              <a:ext uri="{FF2B5EF4-FFF2-40B4-BE49-F238E27FC236}">
-                <a16:creationId xmlns:a16="http://schemas.microsoft.com/office/drawing/2014/main" id="{2026CFC7-5033-4323-84AE-ABCA776EF1ED}"/>
-              </a:ext>
-            </a:extLst>
-          </p:cNvPr>
-          <p:cNvSpPr>
-            <a:spLocks xmlns:a="http://schemas.openxmlformats.org/drawingml/2006/main" noGrp="1"/>
-          </p:cNvSpPr>
-          <p:nvPr/>
-        </p:nvSpPr>
-        <p:spPr>
-          <a:xfrm xmlns:a="http://schemas.openxmlformats.org/drawingml/2006/main">
-            <a:off x="8858250" y="3905250"/>
-            <a:ext cx="2714625" cy="285750"/>
-          </a:xfrm>
-          <a:prstGeom xmlns:a="http://schemas.openxmlformats.org/drawingml/2006/main" prst="rect">
-            <a:avLst/>
-          </a:prstGeom>
-          <a:noFill xmlns:a="http://schemas.openxmlformats.org/drawingml/2006/main"/>
-          <a:ln xmlns:a="http://schemas.openxmlformats.org/drawingml/2006/main" w="0">
-            <a:noFill/>
-            <a:prstDash val="solid"/>
-          </a:ln>
-        </p:spPr>
-        <p:txBody>
-          <a:bodyPr xmlns:a="http://schemas.openxmlformats.org/drawingml/2006/main" lIns="0" tIns="0" rIns="0" bIns="0" anchor="t">
-            <a:noAutofit/>
+              <a:t>Warnings: 61 Crippa/Tukey  |  15 BLM  |  7 low-rank</a:t>
+            </a:r>
+          </a:p>
+        </p:txBody>
+      </p:sp>
+      <p:sp>
+        <p:nvSpPr>
+          <p:cNvPr id="12" name="rank-takeaway">
+            <a:extLst xmlns:a="http://schemas.openxmlformats.org/drawingml/2006/main">
+              <a:ext uri="{FF2B5EF4-FFF2-40B4-BE49-F238E27FC236}">
+                <a16:creationId xmlns:a16="http://schemas.microsoft.com/office/drawing/2014/main" id="{5F26D06C-A244-4700-B489-0939606E7A17}"/>
+              </a:ext>
+            </a:extLst>
+          </p:cNvPr>
+          <p:cNvSpPr>
+            <a:spLocks xmlns:a="http://schemas.openxmlformats.org/drawingml/2006/main" noGrp="1"/>
+          </p:cNvSpPr>
+          <p:nvPr/>
+        </p:nvSpPr>
+        <p:spPr>
+          <a:xfrm xmlns:a="http://schemas.openxmlformats.org/drawingml/2006/main">
+            <a:off x="8667750" y="5857875"/>
+            <a:ext cx="2952750" cy="457200"/>
+          </a:xfrm>
+          <a:prstGeom xmlns:a="http://schemas.openxmlformats.org/drawingml/2006/main" prst="rect">
+            <a:avLst/>
+          </a:prstGeom>
+          <a:noFill xmlns:a="http://schemas.openxmlformats.org/drawingml/2006/main"/>
+          <a:ln xmlns:a="http://schemas.openxmlformats.org/drawingml/2006/main" w="0">
+            <a:noFill/>
+            <a:prstDash val="solid"/>
+          </a:ln>
+        </p:spPr>
+        <p:txBody>
+          <a:bodyPr xmlns:a="http://schemas.openxmlformats.org/drawingml/2006/main" lIns="0" tIns="0" rIns="0" bIns="0" anchor="t">
+            <a:normAutofit fontScale="83333"/>
           </a:bodyPr>
           <a:lstStyle xmlns:a="http://schemas.openxmlformats.org/drawingml/2006/main"/>
           <a:p xmlns:a="http://schemas.openxmlformats.org/drawingml/2006/main">
             <a:pPr algn="l">
-              <a:defRPr sz="1575" b="1" i="0">
-                <a:solidFill>
-                  <a:srgbClr val="D55E00"/>
-                </a:solidFill>
-                <a:latin typeface="Arial"/>
-                <a:ea typeface="Arial"/>
-                <a:cs typeface="Arial"/>
-              </a:defRPr>
-            </a:pPr>
-            <a:r>
-              <a:rPr sz="1575" b="1" i="0">
-                <a:solidFill>
-                  <a:srgbClr val="D55E00"/>
-                </a:solidFill>
-                <a:latin typeface="Arial"/>
-                <a:ea typeface="Arial"/>
-                <a:cs typeface="Arial"/>
-              </a:rPr>
-              <a:t>15%   BLM types</a:t>
-            </a:r>
-          </a:p>
-        </p:txBody>
-      </p:sp>
-      <p:sp>
-        <p:nvSpPr>
-          <p:cNvPr id="10" name="warn-lr">
-            <a:extLst xmlns:a="http://schemas.openxmlformats.org/drawingml/2006/main">
-              <a:ext uri="{FF2B5EF4-FFF2-40B4-BE49-F238E27FC236}">
-                <a16:creationId xmlns:a16="http://schemas.microsoft.com/office/drawing/2014/main" id="{E5EFC7F6-93B1-4672-8402-A07133DCFB48}"/>
-              </a:ext>
-            </a:extLst>
-          </p:cNvPr>
-          <p:cNvSpPr>
-            <a:spLocks xmlns:a="http://schemas.openxmlformats.org/drawingml/2006/main" noGrp="1"/>
-          </p:cNvSpPr>
-          <p:nvPr/>
-        </p:nvSpPr>
-        <p:spPr>
-          <a:xfrm xmlns:a="http://schemas.openxmlformats.org/drawingml/2006/main">
-            <a:off x="8858250" y="4324350"/>
-            <a:ext cx="2714625" cy="285750"/>
-          </a:xfrm>
-          <a:prstGeom xmlns:a="http://schemas.openxmlformats.org/drawingml/2006/main" prst="rect">
-            <a:avLst/>
-          </a:prstGeom>
-          <a:noFill xmlns:a="http://schemas.openxmlformats.org/drawingml/2006/main"/>
-          <a:ln xmlns:a="http://schemas.openxmlformats.org/drawingml/2006/main" w="0">
-            <a:noFill/>
-            <a:prstDash val="solid"/>
-          </a:ln>
-        </p:spPr>
-        <p:txBody>
-          <a:bodyPr xmlns:a="http://schemas.openxmlformats.org/drawingml/2006/main" lIns="0" tIns="0" rIns="0" bIns="0" anchor="t">
-            <a:noAutofit/>
-          </a:bodyPr>
-          <a:lstStyle xmlns:a="http://schemas.openxmlformats.org/drawingml/2006/main"/>
-          <a:p xmlns:a="http://schemas.openxmlformats.org/drawingml/2006/main">
-            <a:pPr algn="l">
-              <a:defRPr sz="1575" b="1" i="0">
-                <a:solidFill>
-                  <a:srgbClr val="D55E00"/>
-                </a:solidFill>
-                <a:latin typeface="Arial"/>
-                <a:ea typeface="Arial"/>
-                <a:cs typeface="Arial"/>
-              </a:defRPr>
-            </a:pPr>
-            <a:r>
-              <a:rPr sz="1575" b="1" i="0">
-                <a:solidFill>
-                  <a:srgbClr val="D55E00"/>
-                </a:solidFill>
-                <a:latin typeface="Arial"/>
-                <a:ea typeface="Arial"/>
-                <a:cs typeface="Arial"/>
-              </a:rPr>
-              <a:t>7%     Low-rank factors</a:t>
-            </a:r>
-          </a:p>
-        </p:txBody>
-      </p:sp>
-      <p:sp>
-        <p:nvSpPr>
-          <p:cNvPr id="11" name="rank-takeaway">
-            <a:extLst xmlns:a="http://schemas.openxmlformats.org/drawingml/2006/main">
-              <a:ext uri="{FF2B5EF4-FFF2-40B4-BE49-F238E27FC236}">
-                <a16:creationId xmlns:a16="http://schemas.microsoft.com/office/drawing/2014/main" id="{EBCF3057-ECBE-4369-8E15-D22D057F5832}"/>
-              </a:ext>
-            </a:extLst>
-          </p:cNvPr>
-          <p:cNvSpPr>
-            <a:spLocks xmlns:a="http://schemas.openxmlformats.org/drawingml/2006/main" noGrp="1"/>
-          </p:cNvSpPr>
-          <p:nvPr/>
-        </p:nvSpPr>
-        <p:spPr>
-          <a:xfrm xmlns:a="http://schemas.openxmlformats.org/drawingml/2006/main">
-            <a:off x="8858250" y="5086350"/>
-            <a:ext cx="2714625" cy="838200"/>
-          </a:xfrm>
-          <a:prstGeom xmlns:a="http://schemas.openxmlformats.org/drawingml/2006/main" prst="rect">
-            <a:avLst/>
-          </a:prstGeom>
-          <a:noFill xmlns:a="http://schemas.openxmlformats.org/drawingml/2006/main"/>
-          <a:ln xmlns:a="http://schemas.openxmlformats.org/drawingml/2006/main" w="0">
-            <a:noFill/>
-            <a:prstDash val="solid"/>
-          </a:ln>
-        </p:spPr>
-        <p:txBody>
-          <a:bodyPr xmlns:a="http://schemas.openxmlformats.org/drawingml/2006/main" lIns="0" tIns="0" rIns="0" bIns="0" anchor="t">
-            <a:normAutofit fontScale="100000"/>
-          </a:bodyPr>
-          <a:lstStyle xmlns:a="http://schemas.openxmlformats.org/drawingml/2006/main"/>
-          <a:p xmlns:a="http://schemas.openxmlformats.org/drawingml/2006/main">
-            <a:pPr algn="l">
-              <a:defRPr sz="1650" b="1" i="0">
+              <a:defRPr sz="1200" b="1" i="0">
                 <a:solidFill>
                   <a:srgbClr val="000000"/>
                 </a:solidFill>
@@ -3927,7 +4064,7 @@
               </a:defRPr>
             </a:pPr>
             <a:r>
-              <a:rPr sz="1650" b="1" i="0">
+              <a:rPr sz="1200" b="1" i="0">
                 <a:solidFill>
                   <a:srgbClr val="000000"/>
                 </a:solidFill>
@@ -3935,17 +4072,17 @@
                 <a:ea typeface="Arial"/>
                 <a:cs typeface="Arial"/>
               </a:rPr>
-              <a:t>Model order and numerical conditioning are separate problems.</a:t>
-            </a:r>
-          </a:p>
-        </p:txBody>
-      </p:sp>
-      <p:sp>
-        <p:nvSpPr>
-          <p:cNvPr id="12" name="slide-4-footer-label">
-            <a:extLst xmlns:a="http://schemas.openxmlformats.org/drawingml/2006/main">
-              <a:ext uri="{FF2B5EF4-FFF2-40B4-BE49-F238E27FC236}">
-                <a16:creationId xmlns:a16="http://schemas.microsoft.com/office/drawing/2014/main" id="{57F7EE6D-2CA4-4464-91AF-F69AD3AD69ED}"/>
+              <a:t>Rank asks which model size wins. A warning asks whether nearly equal-fitting solutions imply the same economic objects.</a:t>
+            </a:r>
+          </a:p>
+        </p:txBody>
+      </p:sp>
+      <p:sp>
+        <p:nvSpPr>
+          <p:cNvPr id="13" name="slide-4-footer-label">
+            <a:extLst xmlns:a="http://schemas.openxmlformats.org/drawingml/2006/main">
+              <a:ext uri="{FF2B5EF4-FFF2-40B4-BE49-F238E27FC236}">
+                <a16:creationId xmlns:a16="http://schemas.microsoft.com/office/drawing/2014/main" id="{504BAC25-DF8D-4E9F-8A51-C3891BA37E91}"/>
               </a:ext>
             </a:extLst>
           </p:cNvPr>
@@ -4000,10 +4137,10 @@
       </p:sp>
       <p:sp>
         <p:nvSpPr>
-          <p:cNvPr id="13" name="slide-4-footer-number">
-            <a:extLst xmlns:a="http://schemas.openxmlformats.org/drawingml/2006/main">
-              <a:ext uri="{FF2B5EF4-FFF2-40B4-BE49-F238E27FC236}">
-                <a16:creationId xmlns:a16="http://schemas.microsoft.com/office/drawing/2014/main" id="{E44519DC-63E9-4745-AB0C-860BF839C89F}"/>
+          <p:cNvPr id="14" name="slide-4-footer-number">
+            <a:extLst xmlns:a="http://schemas.openxmlformats.org/drawingml/2006/main">
+              <a:ext uri="{FF2B5EF4-FFF2-40B4-BE49-F238E27FC236}">
+                <a16:creationId xmlns:a16="http://schemas.microsoft.com/office/drawing/2014/main" id="{75C6E853-F77B-467A-9F9D-903D7A6D0BC2}"/>
               </a:ext>
             </a:extLst>
           </p:cNvPr>
@@ -4059,7 +4196,7 @@
     </p:spTree>
     <p:extLst>
       <p:ext uri="{BB962C8B-B14F-4D97-AF65-F5344CB8AC3E}">
-        <p14:creationId xmlns:p14="http://schemas.microsoft.com/office/powerpoint/2010/main" val="1924462243"/>
+        <p14:creationId xmlns:p14="http://schemas.microsoft.com/office/powerpoint/2010/main" val="1886181678"/>
       </p:ext>
     </p:extLst>
   </p:cSld>
@@ -4087,10 +4224,10 @@
       </p:grpSpPr>
       <p:sp>
         <p:nvSpPr>
-          <p:cNvPr id="17" name="slide-5-title">
-            <a:extLst xmlns:a="http://schemas.openxmlformats.org/drawingml/2006/main">
-              <a:ext uri="{FF2B5EF4-FFF2-40B4-BE49-F238E27FC236}">
-                <a16:creationId xmlns:a16="http://schemas.microsoft.com/office/drawing/2014/main" id="{A77B34A0-4634-4F2F-A848-54A2AFF72A52}"/>
+          <p:cNvPr id="19" name="slide-5-title">
+            <a:extLst xmlns:a="http://schemas.openxmlformats.org/drawingml/2006/main">
+              <a:ext uri="{FF2B5EF4-FFF2-40B4-BE49-F238E27FC236}">
+                <a16:creationId xmlns:a16="http://schemas.microsoft.com/office/drawing/2014/main" id="{A899B96F-54D9-48ED-AF95-6B4EC0F5C566}"/>
               </a:ext>
             </a:extLst>
           </p:cNvPr>
@@ -4138,7 +4275,7 @@
                 <a:ea typeface="Arial"/>
                 <a:cs typeface="Arial"/>
               </a:rPr>
-              <a:t>Rare warning cases dominate project plug-in RMSE</a:t>
+              <a:t>Warning fits create the large RMSE tail</a:t>
             </a:r>
           </a:p>
         </p:txBody>
@@ -4148,7 +4285,7 @@
           <p:cNvPr id="2" name="slide-5-title-rule">
             <a:extLst xmlns:a="http://schemas.openxmlformats.org/drawingml/2006/main">
               <a:ext uri="{FF2B5EF4-FFF2-40B4-BE49-F238E27FC236}">
-                <a16:creationId xmlns:a16="http://schemas.microsoft.com/office/drawing/2014/main" id="{3F572AD1-21AE-43CD-B15C-B9705D1A633B}"/>
+                <a16:creationId xmlns:a16="http://schemas.microsoft.com/office/drawing/2014/main" id="{75002525-067E-421B-BF7F-E699F960DAED}"/>
               </a:ext>
             </a:extLst>
           </p:cNvPr>
@@ -4176,22 +4313,80 @@
       </p:sp>
       <p:sp>
         <p:nvSpPr>
-          <p:cNvPr id="3" name="tail-legend-returned">
-            <a:extLst xmlns:a="http://schemas.openxmlformats.org/drawingml/2006/main">
-              <a:ext uri="{FF2B5EF4-FFF2-40B4-BE49-F238E27FC236}">
-                <a16:creationId xmlns:a16="http://schemas.microsoft.com/office/drawing/2014/main" id="{F2F19644-5750-43C4-8CFE-279E19C4165D}"/>
-              </a:ext>
-            </a:extLst>
-          </p:cNvPr>
-          <p:cNvSpPr>
-            <a:spLocks xmlns:a="http://schemas.openxmlformats.org/drawingml/2006/main" noGrp="1"/>
-          </p:cNvSpPr>
-          <p:nvPr/>
-        </p:nvSpPr>
-        <p:spPr>
-          <a:xfrm xmlns:a="http://schemas.openxmlformats.org/drawingml/2006/main">
-            <a:off x="4000500" y="1066800"/>
-            <a:ext cx="1714500" cy="247650"/>
+          <p:cNvPr id="3" name="tail-dgps">
+            <a:extLst xmlns:a="http://schemas.openxmlformats.org/drawingml/2006/main">
+              <a:ext uri="{FF2B5EF4-FFF2-40B4-BE49-F238E27FC236}">
+                <a16:creationId xmlns:a16="http://schemas.microsoft.com/office/drawing/2014/main" id="{08983F22-46F2-465C-BF0E-6E1C8253D51E}"/>
+              </a:ext>
+            </a:extLst>
+          </p:cNvPr>
+          <p:cNvSpPr>
+            <a:spLocks xmlns:a="http://schemas.openxmlformats.org/drawingml/2006/main" noGrp="1"/>
+          </p:cNvSpPr>
+          <p:nvPr/>
+        </p:nvSpPr>
+        <p:spPr>
+          <a:xfrm xmlns:a="http://schemas.openxmlformats.org/drawingml/2006/main">
+            <a:off x="457200" y="1028700"/>
+            <a:ext cx="6858000" cy="247650"/>
+          </a:xfrm>
+          <a:prstGeom xmlns:a="http://schemas.openxmlformats.org/drawingml/2006/main" prst="rect">
+            <a:avLst/>
+          </a:prstGeom>
+          <a:noFill xmlns:a="http://schemas.openxmlformats.org/drawingml/2006/main"/>
+          <a:ln xmlns:a="http://schemas.openxmlformats.org/drawingml/2006/main" w="0">
+            <a:noFill/>
+            <a:prstDash val="solid"/>
+          </a:ln>
+        </p:spPr>
+        <p:txBody>
+          <a:bodyPr xmlns:a="http://schemas.openxmlformats.org/drawingml/2006/main" lIns="0" tIns="0" rIns="0" bIns="0" anchor="t">
+            <a:noAutofit/>
+          </a:bodyPr>
+          <a:lstStyle xmlns:a="http://schemas.openxmlformats.org/drawingml/2006/main"/>
+          <a:p xmlns:a="http://schemas.openxmlformats.org/drawingml/2006/main">
+            <a:pPr algn="l">
+              <a:defRPr sz="1275" b="1" i="0">
+                <a:solidFill>
+                  <a:srgbClr val="59616D"/>
+                </a:solidFill>
+                <a:latin typeface="Arial"/>
+                <a:ea typeface="Arial"/>
+                <a:cs typeface="Arial"/>
+              </a:defRPr>
+            </a:pPr>
+            <a:r>
+              <a:rPr sz="1275" b="1" i="0">
+                <a:solidFill>
+                  <a:srgbClr val="59616D"/>
+                </a:solidFill>
+                <a:latin typeface="Arial"/>
+                <a:ea typeface="Arial"/>
+                <a:cs typeface="Arial"/>
+              </a:rPr>
+              <a:t>Nonadditive DGPs shown: Crippa/Tukey  |  BLM types  |  Low-rank factors  |  GKLP</a:t>
+            </a:r>
+          </a:p>
+        </p:txBody>
+      </p:sp>
+      <p:sp>
+        <p:nvSpPr>
+          <p:cNvPr id="4" name="tail-legend-returned">
+            <a:extLst xmlns:a="http://schemas.openxmlformats.org/drawingml/2006/main">
+              <a:ext uri="{FF2B5EF4-FFF2-40B4-BE49-F238E27FC236}">
+                <a16:creationId xmlns:a16="http://schemas.microsoft.com/office/drawing/2014/main" id="{D687659F-1100-418A-9FC5-602F69533DAF}"/>
+              </a:ext>
+            </a:extLst>
+          </p:cNvPr>
+          <p:cNvSpPr>
+            <a:spLocks xmlns:a="http://schemas.openxmlformats.org/drawingml/2006/main" noGrp="1"/>
+          </p:cNvSpPr>
+          <p:nvPr/>
+        </p:nvSpPr>
+        <p:spPr>
+          <a:xfrm xmlns:a="http://schemas.openxmlformats.org/drawingml/2006/main">
+            <a:off x="7477125" y="1028700"/>
+            <a:ext cx="1285875" cy="247650"/>
           </a:xfrm>
           <a:prstGeom xmlns:a="http://schemas.openxmlformats.org/drawingml/2006/main" prst="rect">
             <a:avLst/>
@@ -4227,29 +4422,29 @@
                 <a:ea typeface="Arial"/>
                 <a:cs typeface="Arial"/>
               </a:rPr>
-              <a:t>●  all returned</a:t>
-            </a:r>
-          </a:p>
-        </p:txBody>
-      </p:sp>
-      <p:sp>
-        <p:nvSpPr>
-          <p:cNvPr id="4" name="tail-legend-pass">
-            <a:extLst xmlns:a="http://schemas.openxmlformats.org/drawingml/2006/main">
-              <a:ext uri="{FF2B5EF4-FFF2-40B4-BE49-F238E27FC236}">
-                <a16:creationId xmlns:a16="http://schemas.microsoft.com/office/drawing/2014/main" id="{C765AF70-8AD9-4896-908F-A5C6F914494E}"/>
-              </a:ext>
-            </a:extLst>
-          </p:cNvPr>
-          <p:cNvSpPr>
-            <a:spLocks xmlns:a="http://schemas.openxmlformats.org/drawingml/2006/main" noGrp="1"/>
-          </p:cNvSpPr>
-          <p:nvPr/>
-        </p:nvSpPr>
-        <p:spPr>
-          <a:xfrm xmlns:a="http://schemas.openxmlformats.org/drawingml/2006/main">
-            <a:off x="5857875" y="1066800"/>
-            <a:ext cx="2238375" cy="247650"/>
+              <a:t>all returned</a:t>
+            </a:r>
+          </a:p>
+        </p:txBody>
+      </p:sp>
+      <p:sp>
+        <p:nvSpPr>
+          <p:cNvPr id="5" name="tail-legend-pass">
+            <a:extLst xmlns:a="http://schemas.openxmlformats.org/drawingml/2006/main">
+              <a:ext uri="{FF2B5EF4-FFF2-40B4-BE49-F238E27FC236}">
+                <a16:creationId xmlns:a16="http://schemas.microsoft.com/office/drawing/2014/main" id="{5F4ED93D-7C2B-4BAC-95F2-79D5D776B6F9}"/>
+              </a:ext>
+            </a:extLst>
+          </p:cNvPr>
+          <p:cNvSpPr>
+            <a:spLocks xmlns:a="http://schemas.openxmlformats.org/drawingml/2006/main" noGrp="1"/>
+          </p:cNvSpPr>
+          <p:nvPr/>
+        </p:nvSpPr>
+        <p:spPr>
+          <a:xfrm xmlns:a="http://schemas.openxmlformats.org/drawingml/2006/main">
+            <a:off x="9048750" y="1028700"/>
+            <a:ext cx="2190750" cy="247650"/>
           </a:xfrm>
           <a:prstGeom xmlns:a="http://schemas.openxmlformats.org/drawingml/2006/main" prst="rect">
             <a:avLst/>
@@ -4285,17 +4480,17 @@
                 <a:ea typeface="Arial"/>
                 <a:cs typeface="Arial"/>
               </a:rPr>
-              <a:t>■  diagnostic pass only</a:t>
-            </a:r>
-          </a:p>
-        </p:txBody>
-      </p:sp>
-      <p:sp>
-        <p:nvSpPr>
-          <p:cNvPr id="5" name="tail-q-label">
-            <a:extLst xmlns:a="http://schemas.openxmlformats.org/drawingml/2006/main">
-              <a:ext uri="{FF2B5EF4-FFF2-40B4-BE49-F238E27FC236}">
-                <a16:creationId xmlns:a16="http://schemas.microsoft.com/office/drawing/2014/main" id="{31A39780-6182-4642-A620-E12C95E9B975}"/>
+              <a:t>diagnostic pass only</a:t>
+            </a:r>
+          </a:p>
+        </p:txBody>
+      </p:sp>
+      <p:sp>
+        <p:nvSpPr>
+          <p:cNvPr id="6" name="tail-q-label">
+            <a:extLst xmlns:a="http://schemas.openxmlformats.org/drawingml/2006/main">
+              <a:ext uri="{FF2B5EF4-FFF2-40B4-BE49-F238E27FC236}">
+                <a16:creationId xmlns:a16="http://schemas.microsoft.com/office/drawing/2014/main" id="{33B4FEDD-4FBE-4EAE-BA8B-1F4295E1BE61}"/>
               </a:ext>
             </a:extLst>
           </p:cNvPr>
@@ -4350,10 +4545,10 @@
       </p:sp>
       <p:sp>
         <p:nvSpPr>
-          <p:cNvPr id="6" name="tail-c-label">
-            <a:extLst xmlns:a="http://schemas.openxmlformats.org/drawingml/2006/main">
-              <a:ext uri="{FF2B5EF4-FFF2-40B4-BE49-F238E27FC236}">
-                <a16:creationId xmlns:a16="http://schemas.microsoft.com/office/drawing/2014/main" id="{AE1CA9AE-E874-4C3C-B2AD-B15868377DD5}"/>
+          <p:cNvPr id="7" name="tail-c-label">
+            <a:extLst xmlns:a="http://schemas.openxmlformats.org/drawingml/2006/main">
+              <a:ext uri="{FF2B5EF4-FFF2-40B4-BE49-F238E27FC236}">
+                <a16:creationId xmlns:a16="http://schemas.microsoft.com/office/drawing/2014/main" id="{386A07E0-82E7-4F57-AB4F-62CE290DDF6E}"/>
               </a:ext>
             </a:extLst>
           </p:cNvPr>
@@ -4408,19 +4603,19 @@
       </p:sp>
       <p:pic>
         <p:nvPicPr>
-          <p:cNvPr id="23" name=""/>
+          <p:cNvPr id="26" name=""/>
           <p:cNvPicPr>
             <a:picLocks xmlns:a="http://schemas.openxmlformats.org/drawingml/2006/main" noChangeAspect="1"/>
           </p:cNvPicPr>
           <p:nvPr/>
         </p:nvPicPr>
         <p:blipFill>
-          <a:blip xmlns:r="http://schemas.openxmlformats.org/officeDocument/2006/relationships" xmlns:a="http://schemas.openxmlformats.org/drawingml/2006/main" r:embed="R8975bd403d1340cb"/>
+          <a:blip xmlns:r="http://schemas.openxmlformats.org/officeDocument/2006/relationships" xmlns:a="http://schemas.openxmlformats.org/drawingml/2006/main" r:embed="Ra32a233196aa4b10"/>
           <a:stretch xmlns:a="http://schemas.openxmlformats.org/drawingml/2006/main"/>
         </p:blipFill>
         <p:spPr>
           <a:xfrm xmlns:a="http://schemas.openxmlformats.org/drawingml/2006/main">
-            <a:off x="457200" y="1733770"/>
+            <a:off x="457200" y="1638520"/>
             <a:ext cx="5238750" cy="2866585"/>
           </a:xfrm>
           <a:prstGeom xmlns:a="http://schemas.openxmlformats.org/drawingml/2006/main" prst="rect">
@@ -4430,20 +4625,20 @@
       </p:pic>
       <p:pic>
         <p:nvPicPr>
-          <p:cNvPr id="24" name=""/>
+          <p:cNvPr id="27" name=""/>
           <p:cNvPicPr>
             <a:picLocks xmlns:a="http://schemas.openxmlformats.org/drawingml/2006/main" noChangeAspect="1"/>
           </p:cNvPicPr>
           <p:nvPr/>
         </p:nvPicPr>
         <p:blipFill>
-          <a:blip xmlns:r="http://schemas.openxmlformats.org/officeDocument/2006/relationships" xmlns:a="http://schemas.openxmlformats.org/drawingml/2006/main" r:embed="Rbd54dfdb12b241d8"/>
+          <a:blip xmlns:r="http://schemas.openxmlformats.org/officeDocument/2006/relationships" xmlns:a="http://schemas.openxmlformats.org/drawingml/2006/main" r:embed="Rbd435be593cc4069"/>
           <a:stretch xmlns:a="http://schemas.openxmlformats.org/drawingml/2006/main"/>
         </p:blipFill>
         <p:spPr>
           <a:xfrm xmlns:a="http://schemas.openxmlformats.org/drawingml/2006/main">
-            <a:off x="6539190" y="1666875"/>
-            <a:ext cx="4580971" cy="3000375"/>
+            <a:off x="6611903" y="1619250"/>
+            <a:ext cx="4435543" cy="2905125"/>
           </a:xfrm>
           <a:prstGeom xmlns:a="http://schemas.openxmlformats.org/drawingml/2006/main" prst="rect">
             <a:avLst/>
@@ -4452,21 +4647,21 @@
       </p:pic>
       <p:sp>
         <p:nvSpPr>
-          <p:cNvPr id="9" name="tail-separator">
-            <a:extLst xmlns:a="http://schemas.openxmlformats.org/drawingml/2006/main">
-              <a:ext uri="{FF2B5EF4-FFF2-40B4-BE49-F238E27FC236}">
-                <a16:creationId xmlns:a16="http://schemas.microsoft.com/office/drawing/2014/main" id="{E2F3E79D-6162-4897-9807-3C825F7665E4}"/>
-              </a:ext>
-            </a:extLst>
-          </p:cNvPr>
-          <p:cNvSpPr>
-            <a:spLocks xmlns:a="http://schemas.openxmlformats.org/drawingml/2006/main" noGrp="1"/>
-          </p:cNvSpPr>
-          <p:nvPr/>
-        </p:nvSpPr>
-        <p:spPr>
-          <a:xfrm xmlns:a="http://schemas.openxmlformats.org/drawingml/2006/main">
-            <a:off x="457200" y="4857750"/>
+          <p:cNvPr id="10" name="tail-separator">
+            <a:extLst xmlns:a="http://schemas.openxmlformats.org/drawingml/2006/main">
+              <a:ext uri="{FF2B5EF4-FFF2-40B4-BE49-F238E27FC236}">
+                <a16:creationId xmlns:a16="http://schemas.microsoft.com/office/drawing/2014/main" id="{0A1087AC-5CBB-453A-B477-ACC3DC75F0A0}"/>
+              </a:ext>
+            </a:extLst>
+          </p:cNvPr>
+          <p:cNvSpPr>
+            <a:spLocks xmlns:a="http://schemas.openxmlformats.org/drawingml/2006/main" noGrp="1"/>
+          </p:cNvSpPr>
+          <p:nvPr/>
+        </p:nvSpPr>
+        <p:spPr>
+          <a:xfrm xmlns:a="http://schemas.openxmlformats.org/drawingml/2006/main">
+            <a:off x="457200" y="4648200"/>
             <a:ext cx="11277600" cy="9525"/>
           </a:xfrm>
           <a:prstGeom xmlns:a="http://schemas.openxmlformats.org/drawingml/2006/main" prst="rect">
@@ -4483,22 +4678,22 @@
       </p:sp>
       <p:sp>
         <p:nvSpPr>
-          <p:cNvPr id="10" name="tail-share">
-            <a:extLst xmlns:a="http://schemas.openxmlformats.org/drawingml/2006/main">
-              <a:ext uri="{FF2B5EF4-FFF2-40B4-BE49-F238E27FC236}">
-                <a16:creationId xmlns:a16="http://schemas.microsoft.com/office/drawing/2014/main" id="{CA61AC7D-AC0B-45D4-A48C-DA2AC5834090}"/>
-              </a:ext>
-            </a:extLst>
-          </p:cNvPr>
-          <p:cNvSpPr>
-            <a:spLocks xmlns:a="http://schemas.openxmlformats.org/drawingml/2006/main" noGrp="1"/>
-          </p:cNvSpPr>
-          <p:nvPr/>
-        </p:nvSpPr>
-        <p:spPr>
-          <a:xfrm xmlns:a="http://schemas.openxmlformats.org/drawingml/2006/main">
-            <a:off x="457200" y="5067300"/>
-            <a:ext cx="2286000" cy="552450"/>
+          <p:cNvPr id="11" name="all-returned-head">
+            <a:extLst xmlns:a="http://schemas.openxmlformats.org/drawingml/2006/main">
+              <a:ext uri="{FF2B5EF4-FFF2-40B4-BE49-F238E27FC236}">
+                <a16:creationId xmlns:a16="http://schemas.microsoft.com/office/drawing/2014/main" id="{6CCE43CC-2313-4102-A3E9-72FE15AC1C71}"/>
+              </a:ext>
+            </a:extLst>
+          </p:cNvPr>
+          <p:cNvSpPr>
+            <a:spLocks xmlns:a="http://schemas.openxmlformats.org/drawingml/2006/main" noGrp="1"/>
+          </p:cNvSpPr>
+          <p:nvPr/>
+        </p:nvSpPr>
+        <p:spPr>
+          <a:xfrm xmlns:a="http://schemas.openxmlformats.org/drawingml/2006/main">
+            <a:off x="457200" y="4857750"/>
+            <a:ext cx="3143250" cy="285750"/>
           </a:xfrm>
           <a:prstGeom xmlns:a="http://schemas.openxmlformats.org/drawingml/2006/main" prst="rect">
             <a:avLst/>
@@ -4516,7 +4711,7 @@
           <a:lstStyle xmlns:a="http://schemas.openxmlformats.org/drawingml/2006/main"/>
           <a:p xmlns:a="http://schemas.openxmlformats.org/drawingml/2006/main">
             <a:pPr algn="l">
-              <a:defRPr sz="3300" b="1" i="0">
+              <a:defRPr sz="1650" b="1" i="0">
                 <a:solidFill>
                   <a:srgbClr val="D55E00"/>
                 </a:solidFill>
@@ -4526,7 +4721,7 @@
               </a:defRPr>
             </a:pPr>
             <a:r>
-              <a:rPr sz="3300" b="1" i="0">
+              <a:rPr sz="1650" b="1" i="0">
                 <a:solidFill>
                   <a:srgbClr val="D55E00"/>
                 </a:solidFill>
@@ -4534,29 +4729,29 @@
                 <a:ea typeface="Arial"/>
                 <a:cs typeface="Arial"/>
               </a:rPr>
-              <a:t>91–100%</a:t>
-            </a:r>
-          </a:p>
-        </p:txBody>
-      </p:sp>
-      <p:sp>
-        <p:nvSpPr>
-          <p:cNvPr id="11" name="tail-share-label">
-            <a:extLst xmlns:a="http://schemas.openxmlformats.org/drawingml/2006/main">
-              <a:ext uri="{FF2B5EF4-FFF2-40B4-BE49-F238E27FC236}">
-                <a16:creationId xmlns:a16="http://schemas.microsoft.com/office/drawing/2014/main" id="{BC03D36D-D3AA-4752-B66F-07831B0411C4}"/>
-              </a:ext>
-            </a:extLst>
-          </p:cNvPr>
-          <p:cNvSpPr>
-            <a:spLocks xmlns:a="http://schemas.openxmlformats.org/drawingml/2006/main" noGrp="1"/>
-          </p:cNvSpPr>
-          <p:nvPr/>
-        </p:nvSpPr>
-        <p:spPr>
-          <a:xfrm xmlns:a="http://schemas.openxmlformats.org/drawingml/2006/main">
-            <a:off x="457200" y="5638800"/>
-            <a:ext cx="3143250" cy="533400"/>
+              <a:t>All returned</a:t>
+            </a:r>
+          </a:p>
+        </p:txBody>
+      </p:sp>
+      <p:sp>
+        <p:nvSpPr>
+          <p:cNvPr id="12" name="all-returned-body">
+            <a:extLst xmlns:a="http://schemas.openxmlformats.org/drawingml/2006/main">
+              <a:ext uri="{FF2B5EF4-FFF2-40B4-BE49-F238E27FC236}">
+                <a16:creationId xmlns:a16="http://schemas.microsoft.com/office/drawing/2014/main" id="{3D18C32F-F69F-452E-B219-543E06B317A8}"/>
+              </a:ext>
+            </a:extLst>
+          </p:cNvPr>
+          <p:cNvSpPr>
+            <a:spLocks xmlns:a="http://schemas.openxmlformats.org/drawingml/2006/main" noGrp="1"/>
+          </p:cNvSpPr>
+          <p:nvPr/>
+        </p:nvSpPr>
+        <p:spPr>
+          <a:xfrm xmlns:a="http://schemas.openxmlformats.org/drawingml/2006/main">
+            <a:off x="457200" y="5219700"/>
+            <a:ext cx="3333750" cy="857250"/>
           </a:xfrm>
           <a:prstGeom xmlns:a="http://schemas.openxmlformats.org/drawingml/2006/main" prst="rect">
             <a:avLst/>
@@ -4574,7 +4769,7 @@
           <a:lstStyle xmlns:a="http://schemas.openxmlformats.org/drawingml/2006/main"/>
           <a:p xmlns:a="http://schemas.openxmlformats.org/drawingml/2006/main">
             <a:pPr algn="l">
-              <a:defRPr sz="1350" b="0" i="0">
+              <a:defRPr sz="1200" b="0" i="0">
                 <a:solidFill>
                   <a:srgbClr val="59616D"/>
                 </a:solidFill>
@@ -4584,7 +4779,7 @@
               </a:defRPr>
             </a:pPr>
             <a:r>
-              <a:rPr sz="1350" b="0" i="0">
+              <a:rPr sz="1200" b="0" i="0">
                 <a:solidFill>
                   <a:srgbClr val="59616D"/>
                 </a:solidFill>
@@ -4592,29 +4787,29 @@
                 <a:ea typeface="Arial"/>
                 <a:cs typeface="Arial"/>
               </a:rPr>
-              <a:t>of Q_F squared error comes from only five replications</a:t>
-            </a:r>
-          </a:p>
-        </p:txBody>
-      </p:sp>
-      <p:sp>
-        <p:nvSpPr>
-          <p:cNvPr id="12" name="tail-pass">
-            <a:extLst xmlns:a="http://schemas.openxmlformats.org/drawingml/2006/main">
-              <a:ext uri="{FF2B5EF4-FFF2-40B4-BE49-F238E27FC236}">
-                <a16:creationId xmlns:a16="http://schemas.microsoft.com/office/drawing/2014/main" id="{D46FF2FA-CA5A-4F60-8286-B2E82BD98722}"/>
-              </a:ext>
-            </a:extLst>
-          </p:cNvPr>
-          <p:cNvSpPr>
-            <a:spLocks xmlns:a="http://schemas.openxmlformats.org/drawingml/2006/main" noGrp="1"/>
-          </p:cNvSpPr>
-          <p:nvPr/>
-        </p:nvSpPr>
-        <p:spPr>
-          <a:xfrm xmlns:a="http://schemas.openxmlformats.org/drawingml/2006/main">
-            <a:off x="4286250" y="5067300"/>
-            <a:ext cx="2476500" cy="552450"/>
+              <a:t>Every finite project estimate, warnings included. This is the unconditional performance of the procedure actually run.</a:t>
+            </a:r>
+          </a:p>
+        </p:txBody>
+      </p:sp>
+      <p:sp>
+        <p:nvSpPr>
+          <p:cNvPr id="13" name="pass-only-head">
+            <a:extLst xmlns:a="http://schemas.openxmlformats.org/drawingml/2006/main">
+              <a:ext uri="{FF2B5EF4-FFF2-40B4-BE49-F238E27FC236}">
+                <a16:creationId xmlns:a16="http://schemas.microsoft.com/office/drawing/2014/main" id="{8C3585A5-59FE-4584-BEE4-B17B9713E63E}"/>
+              </a:ext>
+            </a:extLst>
+          </p:cNvPr>
+          <p:cNvSpPr>
+            <a:spLocks xmlns:a="http://schemas.openxmlformats.org/drawingml/2006/main" noGrp="1"/>
+          </p:cNvSpPr>
+          <p:nvPr/>
+        </p:nvSpPr>
+        <p:spPr>
+          <a:xfrm xmlns:a="http://schemas.openxmlformats.org/drawingml/2006/main">
+            <a:off x="4191000" y="4857750"/>
+            <a:ext cx="3143250" cy="285750"/>
           </a:xfrm>
           <a:prstGeom xmlns:a="http://schemas.openxmlformats.org/drawingml/2006/main" prst="rect">
             <a:avLst/>
@@ -4632,7 +4827,7 @@
           <a:lstStyle xmlns:a="http://schemas.openxmlformats.org/drawingml/2006/main"/>
           <a:p xmlns:a="http://schemas.openxmlformats.org/drawingml/2006/main">
             <a:pPr algn="l">
-              <a:defRPr sz="3300" b="1" i="0">
+              <a:defRPr sz="1650" b="1" i="0">
                 <a:solidFill>
                   <a:srgbClr val="3D8DFF"/>
                 </a:solidFill>
@@ -4642,7 +4837,7 @@
               </a:defRPr>
             </a:pPr>
             <a:r>
-              <a:rPr sz="3300" b="1" i="0">
+              <a:rPr sz="1650" b="1" i="0">
                 <a:solidFill>
                   <a:srgbClr val="3D8DFF"/>
                 </a:solidFill>
@@ -4650,29 +4845,29 @@
                 <a:ea typeface="Arial"/>
                 <a:cs typeface="Arial"/>
               </a:rPr>
-              <a:t>≈ 0.01–0.02</a:t>
-            </a:r>
-          </a:p>
-        </p:txBody>
-      </p:sp>
-      <p:sp>
-        <p:nvSpPr>
-          <p:cNvPr id="13" name="tail-pass-label">
-            <a:extLst xmlns:a="http://schemas.openxmlformats.org/drawingml/2006/main">
-              <a:ext uri="{FF2B5EF4-FFF2-40B4-BE49-F238E27FC236}">
-                <a16:creationId xmlns:a16="http://schemas.microsoft.com/office/drawing/2014/main" id="{FDFBB95A-69F1-4229-A530-BE17EA784A2F}"/>
-              </a:ext>
-            </a:extLst>
-          </p:cNvPr>
-          <p:cNvSpPr>
-            <a:spLocks xmlns:a="http://schemas.openxmlformats.org/drawingml/2006/main" noGrp="1"/>
-          </p:cNvSpPr>
-          <p:nvPr/>
-        </p:nvSpPr>
-        <p:spPr>
-          <a:xfrm xmlns:a="http://schemas.openxmlformats.org/drawingml/2006/main">
-            <a:off x="4286250" y="5638800"/>
-            <a:ext cx="3143250" cy="533400"/>
+              <a:t>Diagnostic pass only</a:t>
+            </a:r>
+          </a:p>
+        </p:txBody>
+      </p:sp>
+      <p:sp>
+        <p:nvSpPr>
+          <p:cNvPr id="14" name="pass-only-body">
+            <a:extLst xmlns:a="http://schemas.openxmlformats.org/drawingml/2006/main">
+              <a:ext uri="{FF2B5EF4-FFF2-40B4-BE49-F238E27FC236}">
+                <a16:creationId xmlns:a16="http://schemas.microsoft.com/office/drawing/2014/main" id="{DAA84C1E-8A72-489C-A9F3-0C942A1A25C6}"/>
+              </a:ext>
+            </a:extLst>
+          </p:cNvPr>
+          <p:cNvSpPr>
+            <a:spLocks xmlns:a="http://schemas.openxmlformats.org/drawingml/2006/main" noGrp="1"/>
+          </p:cNvSpPr>
+          <p:nvPr/>
+        </p:nvSpPr>
+        <p:spPr>
+          <a:xfrm xmlns:a="http://schemas.openxmlformats.org/drawingml/2006/main">
+            <a:off x="4191000" y="5219700"/>
+            <a:ext cx="3429000" cy="914400"/>
           </a:xfrm>
           <a:prstGeom xmlns:a="http://schemas.openxmlformats.org/drawingml/2006/main" prst="rect">
             <a:avLst/>
@@ -4690,7 +4885,7 @@
           <a:lstStyle xmlns:a="http://schemas.openxmlformats.org/drawingml/2006/main"/>
           <a:p xmlns:a="http://schemas.openxmlformats.org/drawingml/2006/main">
             <a:pPr algn="l">
-              <a:defRPr sz="1350" b="0" i="0">
+              <a:defRPr sz="1200" b="0" i="0">
                 <a:solidFill>
                   <a:srgbClr val="59616D"/>
                 </a:solidFill>
@@ -4700,7 +4895,7 @@
               </a:defRPr>
             </a:pPr>
             <a:r>
-              <a:rPr sz="1350" b="0" i="0">
+              <a:rPr sz="1200" b="0" i="0">
                 <a:solidFill>
                   <a:srgbClr val="59616D"/>
                 </a:solidFill>
@@ -4708,29 +4903,87 @@
                 <a:ea typeface="Arial"/>
                 <a:cs typeface="Arial"/>
               </a:rPr>
-              <a:t>pass-only RMSE(Q_F) across the nonadditive DGPs</a:t>
-            </a:r>
-          </a:p>
-        </p:txBody>
-      </p:sp>
-      <p:sp>
-        <p:nvSpPr>
-          <p:cNvPr id="14" name="tail-meaning">
-            <a:extLst xmlns:a="http://schemas.openxmlformats.org/drawingml/2006/main">
-              <a:ext uri="{FF2B5EF4-FFF2-40B4-BE49-F238E27FC236}">
-                <a16:creationId xmlns:a16="http://schemas.microsoft.com/office/drawing/2014/main" id="{F09BDC6D-8EDB-456C-95CE-20986E789E21}"/>
-              </a:ext>
-            </a:extLst>
-          </p:cNvPr>
-          <p:cNvSpPr>
-            <a:spLocks xmlns:a="http://schemas.openxmlformats.org/drawingml/2006/main" noGrp="1"/>
-          </p:cNvSpPr>
-          <p:nvPr/>
-        </p:nvSpPr>
-        <p:spPr>
-          <a:xfrm xmlns:a="http://schemas.openxmlformats.org/drawingml/2006/main">
-            <a:off x="8048625" y="5219700"/>
-            <a:ext cx="3429000" cy="723900"/>
+              <a:t>The same estimator after removing warning fits. It is a sensitivity calculation, not a competing estimator or a valid replacement for unconditional RMSE.</a:t>
+            </a:r>
+          </a:p>
+        </p:txBody>
+      </p:sp>
+      <p:sp>
+        <p:nvSpPr>
+          <p:cNvPr id="15" name="tail-meaning-head">
+            <a:extLst xmlns:a="http://schemas.openxmlformats.org/drawingml/2006/main">
+              <a:ext uri="{FF2B5EF4-FFF2-40B4-BE49-F238E27FC236}">
+                <a16:creationId xmlns:a16="http://schemas.microsoft.com/office/drawing/2014/main" id="{A3DC59C8-796C-4B77-8D13-0366F7A54E81}"/>
+              </a:ext>
+            </a:extLst>
+          </p:cNvPr>
+          <p:cNvSpPr>
+            <a:spLocks xmlns:a="http://schemas.openxmlformats.org/drawingml/2006/main" noGrp="1"/>
+          </p:cNvSpPr>
+          <p:nvPr/>
+        </p:nvSpPr>
+        <p:spPr>
+          <a:xfrm xmlns:a="http://schemas.openxmlformats.org/drawingml/2006/main">
+            <a:off x="8020050" y="4857750"/>
+            <a:ext cx="3143250" cy="285750"/>
+          </a:xfrm>
+          <a:prstGeom xmlns:a="http://schemas.openxmlformats.org/drawingml/2006/main" prst="rect">
+            <a:avLst/>
+          </a:prstGeom>
+          <a:noFill xmlns:a="http://schemas.openxmlformats.org/drawingml/2006/main"/>
+          <a:ln xmlns:a="http://schemas.openxmlformats.org/drawingml/2006/main" w="0">
+            <a:noFill/>
+            <a:prstDash val="solid"/>
+          </a:ln>
+        </p:spPr>
+        <p:txBody>
+          <a:bodyPr xmlns:a="http://schemas.openxmlformats.org/drawingml/2006/main" lIns="0" tIns="0" rIns="0" bIns="0" anchor="t">
+            <a:noAutofit/>
+          </a:bodyPr>
+          <a:lstStyle xmlns:a="http://schemas.openxmlformats.org/drawingml/2006/main"/>
+          <a:p xmlns:a="http://schemas.openxmlformats.org/drawingml/2006/main">
+            <a:pPr algn="l">
+              <a:defRPr sz="1650" b="1" i="0">
+                <a:solidFill>
+                  <a:srgbClr val="000000"/>
+                </a:solidFill>
+                <a:latin typeface="Arial"/>
+                <a:ea typeface="Arial"/>
+                <a:cs typeface="Arial"/>
+              </a:defRPr>
+            </a:pPr>
+            <a:r>
+              <a:rPr sz="1650" b="1" i="0">
+                <a:solidFill>
+                  <a:srgbClr val="000000"/>
+                </a:solidFill>
+                <a:latin typeface="Arial"/>
+                <a:ea typeface="Arial"/>
+                <a:cs typeface="Arial"/>
+              </a:rPr>
+              <a:t>How to read the gap</a:t>
+            </a:r>
+          </a:p>
+        </p:txBody>
+      </p:sp>
+      <p:sp>
+        <p:nvSpPr>
+          <p:cNvPr id="16" name="tail-meaning-body">
+            <a:extLst xmlns:a="http://schemas.openxmlformats.org/drawingml/2006/main">
+              <a:ext uri="{FF2B5EF4-FFF2-40B4-BE49-F238E27FC236}">
+                <a16:creationId xmlns:a16="http://schemas.microsoft.com/office/drawing/2014/main" id="{A0954CF1-5706-4DFA-8DB4-9AC7C1EA5DFA}"/>
+              </a:ext>
+            </a:extLst>
+          </p:cNvPr>
+          <p:cNvSpPr>
+            <a:spLocks xmlns:a="http://schemas.openxmlformats.org/drawingml/2006/main" noGrp="1"/>
+          </p:cNvSpPr>
+          <p:nvPr/>
+        </p:nvSpPr>
+        <p:spPr>
+          <a:xfrm xmlns:a="http://schemas.openxmlformats.org/drawingml/2006/main">
+            <a:off x="8020050" y="5219700"/>
+            <a:ext cx="3333750" cy="914400"/>
           </a:xfrm>
           <a:prstGeom xmlns:a="http://schemas.openxmlformats.org/drawingml/2006/main" prst="rect">
             <a:avLst/>
@@ -4748,35 +5001,35 @@
           <a:lstStyle xmlns:a="http://schemas.openxmlformats.org/drawingml/2006/main"/>
           <a:p xmlns:a="http://schemas.openxmlformats.org/drawingml/2006/main">
             <a:pPr algn="l">
-              <a:defRPr sz="1800" b="1" i="0">
-                <a:solidFill>
-                  <a:srgbClr val="000000"/>
-                </a:solidFill>
-                <a:latin typeface="Arial"/>
-                <a:ea typeface="Arial"/>
-                <a:cs typeface="Arial"/>
-              </a:defRPr>
-            </a:pPr>
-            <a:r>
-              <a:rPr sz="1800" b="1" i="0">
-                <a:solidFill>
-                  <a:srgbClr val="000000"/>
-                </a:solidFill>
-                <a:latin typeface="Arial"/>
-                <a:ea typeface="Arial"/>
-                <a:cs typeface="Arial"/>
-              </a:rPr>
-              <a:t>Warnings are economically meaningful—not cosmetic.</a:t>
-            </a:r>
-          </a:p>
-        </p:txBody>
-      </p:sp>
-      <p:sp>
-        <p:nvSpPr>
-          <p:cNvPr id="15" name="slide-5-footer-label">
-            <a:extLst xmlns:a="http://schemas.openxmlformats.org/drawingml/2006/main">
-              <a:ext uri="{FF2B5EF4-FFF2-40B4-BE49-F238E27FC236}">
-                <a16:creationId xmlns:a16="http://schemas.microsoft.com/office/drawing/2014/main" id="{E7C080FA-0BBC-49CB-BA91-32A3891CEF3C}"/>
+              <a:defRPr sz="1200" b="0" i="0">
+                <a:solidFill>
+                  <a:srgbClr val="59616D"/>
+                </a:solidFill>
+                <a:latin typeface="Arial"/>
+                <a:ea typeface="Arial"/>
+                <a:cs typeface="Arial"/>
+              </a:defRPr>
+            </a:pPr>
+            <a:r>
+              <a:rPr sz="1200" b="0" i="0">
+                <a:solidFill>
+                  <a:srgbClr val="59616D"/>
+                </a:solidFill>
+                <a:latin typeface="Arial"/>
+                <a:ea typeface="Arial"/>
+                <a:cs typeface="Arial"/>
+              </a:rPr>
+              <a:t>RMSE squares errors. Five replications generate 91-100% of Q_F squared error in Crippa, BLM, and low-rank. The warnings locate this tail concentration.</a:t>
+            </a:r>
+          </a:p>
+        </p:txBody>
+      </p:sp>
+      <p:sp>
+        <p:nvSpPr>
+          <p:cNvPr id="17" name="slide-5-footer-label">
+            <a:extLst xmlns:a="http://schemas.openxmlformats.org/drawingml/2006/main">
+              <a:ext uri="{FF2B5EF4-FFF2-40B4-BE49-F238E27FC236}">
+                <a16:creationId xmlns:a16="http://schemas.microsoft.com/office/drawing/2014/main" id="{3CD34F49-1E50-432D-AB6B-E452693D371D}"/>
               </a:ext>
             </a:extLst>
           </p:cNvPr>
@@ -4831,10 +5084,10 @@
       </p:sp>
       <p:sp>
         <p:nvSpPr>
-          <p:cNvPr id="16" name="slide-5-footer-number">
-            <a:extLst xmlns:a="http://schemas.openxmlformats.org/drawingml/2006/main">
-              <a:ext uri="{FF2B5EF4-FFF2-40B4-BE49-F238E27FC236}">
-                <a16:creationId xmlns:a16="http://schemas.microsoft.com/office/drawing/2014/main" id="{62416F7E-C0E3-4E40-A85E-BE09A33EF2EF}"/>
+          <p:cNvPr id="18" name="slide-5-footer-number">
+            <a:extLst xmlns:a="http://schemas.openxmlformats.org/drawingml/2006/main">
+              <a:ext uri="{FF2B5EF4-FFF2-40B4-BE49-F238E27FC236}">
+                <a16:creationId xmlns:a16="http://schemas.microsoft.com/office/drawing/2014/main" id="{31F485FF-653F-4A3A-A579-458BD1F57BA7}"/>
               </a:ext>
             </a:extLst>
           </p:cNvPr>
@@ -4890,7 +5143,7 @@
     </p:spTree>
     <p:extLst>
       <p:ext uri="{BB962C8B-B14F-4D97-AF65-F5344CB8AC3E}">
-        <p14:creationId xmlns:p14="http://schemas.microsoft.com/office/powerpoint/2010/main" val="1488903760"/>
+        <p14:creationId xmlns:p14="http://schemas.microsoft.com/office/powerpoint/2010/main" val="896903480"/>
       </p:ext>
     </p:extLst>
   </p:cSld>
@@ -4921,7 +5174,7 @@
           <p:cNvPr id="22" name="slide-6-title">
             <a:extLst xmlns:a="http://schemas.openxmlformats.org/drawingml/2006/main">
               <a:ext uri="{FF2B5EF4-FFF2-40B4-BE49-F238E27FC236}">
-                <a16:creationId xmlns:a16="http://schemas.microsoft.com/office/drawing/2014/main" id="{414A8FE1-BD1D-41AB-A047-BDE2D81AD1BF}"/>
+                <a16:creationId xmlns:a16="http://schemas.microsoft.com/office/drawing/2014/main" id="{366B8960-CD7B-46A9-8010-7C4FE1337A42}"/>
               </a:ext>
             </a:extLst>
           </p:cNvPr>
@@ -4951,7 +5204,7 @@
           <a:lstStyle xmlns:a="http://schemas.openxmlformats.org/drawingml/2006/main"/>
           <a:p xmlns:a="http://schemas.openxmlformats.org/drawingml/2006/main">
             <a:pPr algn="l">
-              <a:defRPr sz="3000" b="1" i="0">
+              <a:defRPr sz="2700" b="1" i="0">
                 <a:solidFill>
                   <a:srgbClr val="000000"/>
                 </a:solidFill>
@@ -4961,7 +5214,7 @@
               </a:defRPr>
             </a:pPr>
             <a:r>
-              <a:rPr sz="3000" b="1" i="0">
+              <a:rPr sz="2700" b="1" i="0">
                 <a:solidFill>
                   <a:srgbClr val="000000"/>
                 </a:solidFill>
@@ -4969,7 +5222,7 @@
                 <a:ea typeface="Arial"/>
                 <a:cs typeface="Arial"/>
               </a:rPr>
-              <a:t>The instability is conditioning—not centering</a:t>
+              <a:t>Why some completed schedules become numerically unstable</a:t>
             </a:r>
           </a:p>
         </p:txBody>
@@ -4979,7 +5232,7 @@
           <p:cNvPr id="2" name="slide-6-title-rule">
             <a:extLst xmlns:a="http://schemas.openxmlformats.org/drawingml/2006/main">
               <a:ext uri="{FF2B5EF4-FFF2-40B4-BE49-F238E27FC236}">
-                <a16:creationId xmlns:a16="http://schemas.microsoft.com/office/drawing/2014/main" id="{F751C68A-024A-4BDA-A7EE-9C51B239390F}"/>
+                <a16:creationId xmlns:a16="http://schemas.microsoft.com/office/drawing/2014/main" id="{09172F60-28DD-4B6B-A9D1-72FF40EE95F0}"/>
               </a:ext>
             </a:extLst>
           </p:cNvPr>
@@ -5007,22 +5260,22 @@
       </p:sp>
       <p:sp>
         <p:nvSpPr>
-          <p:cNvPr id="3" name="centering-band">
-            <a:extLst xmlns:a="http://schemas.openxmlformats.org/drawingml/2006/main">
-              <a:ext uri="{FF2B5EF4-FFF2-40B4-BE49-F238E27FC236}">
-                <a16:creationId xmlns:a16="http://schemas.microsoft.com/office/drawing/2014/main" id="{C92D6DBB-261E-4142-91D9-C3AA584317A8}"/>
-              </a:ext>
-            </a:extLst>
-          </p:cNvPr>
-          <p:cNvSpPr>
-            <a:spLocks xmlns:a="http://schemas.openxmlformats.org/drawingml/2006/main" noGrp="1"/>
-          </p:cNvSpPr>
-          <p:nvPr/>
-        </p:nvSpPr>
-        <p:spPr>
-          <a:xfrm xmlns:a="http://schemas.openxmlformats.org/drawingml/2006/main">
-            <a:off x="400050" y="1162050"/>
-            <a:ext cx="11391900" cy="685800"/>
+          <p:cNvPr id="3" name="instability-definition-band">
+            <a:extLst xmlns:a="http://schemas.openxmlformats.org/drawingml/2006/main">
+              <a:ext uri="{FF2B5EF4-FFF2-40B4-BE49-F238E27FC236}">
+                <a16:creationId xmlns:a16="http://schemas.microsoft.com/office/drawing/2014/main" id="{19C3C2EF-1567-49A0-B313-BC7558446DB9}"/>
+              </a:ext>
+            </a:extLst>
+          </p:cNvPr>
+          <p:cNvSpPr>
+            <a:spLocks xmlns:a="http://schemas.openxmlformats.org/drawingml/2006/main" noGrp="1"/>
+          </p:cNvSpPr>
+          <p:nvPr/>
+        </p:nvSpPr>
+        <p:spPr>
+          <a:xfrm xmlns:a="http://schemas.openxmlformats.org/drawingml/2006/main">
+            <a:off x="400050" y="1104900"/>
+            <a:ext cx="11391900" cy="762000"/>
           </a:xfrm>
           <a:prstGeom xmlns:a="http://schemas.openxmlformats.org/drawingml/2006/main" prst="rect">
             <a:avLst/>
@@ -5038,22 +5291,80 @@
       </p:sp>
       <p:sp>
         <p:nvSpPr>
-          <p:cNvPr id="4" name="centering-check">
-            <a:extLst xmlns:a="http://schemas.openxmlformats.org/drawingml/2006/main">
-              <a:ext uri="{FF2B5EF4-FFF2-40B4-BE49-F238E27FC236}">
-                <a16:creationId xmlns:a16="http://schemas.microsoft.com/office/drawing/2014/main" id="{81436418-2052-43BE-8C6C-4A79961EA996}"/>
-              </a:ext>
-            </a:extLst>
-          </p:cNvPr>
-          <p:cNvSpPr>
-            <a:spLocks xmlns:a="http://schemas.openxmlformats.org/drawingml/2006/main" noGrp="1"/>
-          </p:cNvSpPr>
-          <p:nvPr/>
-        </p:nvSpPr>
-        <p:spPr>
-          <a:xfrm xmlns:a="http://schemas.openxmlformats.org/drawingml/2006/main">
-            <a:off x="647700" y="1257300"/>
-            <a:ext cx="419100" cy="400050"/>
+          <p:cNvPr id="4" name="instability-definition">
+            <a:extLst xmlns:a="http://schemas.openxmlformats.org/drawingml/2006/main">
+              <a:ext uri="{FF2B5EF4-FFF2-40B4-BE49-F238E27FC236}">
+                <a16:creationId xmlns:a16="http://schemas.microsoft.com/office/drawing/2014/main" id="{18AE71C6-21D8-4F2D-BE25-C89B0A2B917C}"/>
+              </a:ext>
+            </a:extLst>
+          </p:cNvPr>
+          <p:cNvSpPr>
+            <a:spLocks xmlns:a="http://schemas.openxmlformats.org/drawingml/2006/main" noGrp="1"/>
+          </p:cNvSpPr>
+          <p:nvPr/>
+        </p:nvSpPr>
+        <p:spPr>
+          <a:xfrm xmlns:a="http://schemas.openxmlformats.org/drawingml/2006/main">
+            <a:off x="628650" y="1276350"/>
+            <a:ext cx="10934700" cy="457200"/>
+          </a:xfrm>
+          <a:prstGeom xmlns:a="http://schemas.openxmlformats.org/drawingml/2006/main" prst="rect">
+            <a:avLst/>
+          </a:prstGeom>
+          <a:noFill xmlns:a="http://schemas.openxmlformats.org/drawingml/2006/main"/>
+          <a:ln xmlns:a="http://schemas.openxmlformats.org/drawingml/2006/main" w="0">
+            <a:noFill/>
+            <a:prstDash val="solid"/>
+          </a:ln>
+        </p:spPr>
+        <p:txBody>
+          <a:bodyPr xmlns:a="http://schemas.openxmlformats.org/drawingml/2006/main" lIns="0" tIns="0" rIns="0" bIns="0" anchor="t">
+            <a:normAutofit fontScale="95238"/>
+          </a:bodyPr>
+          <a:lstStyle xmlns:a="http://schemas.openxmlformats.org/drawingml/2006/main"/>
+          <a:p xmlns:a="http://schemas.openxmlformats.org/drawingml/2006/main">
+            <a:pPr algn="ctr">
+              <a:defRPr sz="1575" b="1" i="0">
+                <a:solidFill>
+                  <a:srgbClr val="000000"/>
+                </a:solidFill>
+                <a:latin typeface="Arial"/>
+                <a:ea typeface="Arial"/>
+                <a:cs typeface="Arial"/>
+              </a:defRPr>
+            </a:pPr>
+            <a:r>
+              <a:rPr sz="1575" b="1" i="0">
+                <a:solidFill>
+                  <a:srgbClr val="000000"/>
+                </a:solidFill>
+                <a:latin typeface="Arial"/>
+                <a:ea typeface="Arial"/>
+                <a:cs typeface="Arial"/>
+              </a:rPr>
+              <a:t>Instability here means that starts with almost the same fit to observed match means imply materially different completed schedules - and therefore different Q_F, H_F, or C^w_assign.</a:t>
+            </a:r>
+          </a:p>
+        </p:txBody>
+      </p:sp>
+      <p:sp>
+        <p:nvSpPr>
+          <p:cNvPr id="5" name="mechanism-1-head">
+            <a:extLst xmlns:a="http://schemas.openxmlformats.org/drawingml/2006/main">
+              <a:ext uri="{FF2B5EF4-FFF2-40B4-BE49-F238E27FC236}">
+                <a16:creationId xmlns:a16="http://schemas.microsoft.com/office/drawing/2014/main" id="{4C5D3575-1C2A-486B-9CA0-4D2406D98742}"/>
+              </a:ext>
+            </a:extLst>
+          </p:cNvPr>
+          <p:cNvSpPr>
+            <a:spLocks xmlns:a="http://schemas.openxmlformats.org/drawingml/2006/main" noGrp="1"/>
+          </p:cNvSpPr>
+          <p:nvPr/>
+        </p:nvSpPr>
+        <p:spPr>
+          <a:xfrm xmlns:a="http://schemas.openxmlformats.org/drawingml/2006/main">
+            <a:off x="523875" y="2114550"/>
+            <a:ext cx="3333750" cy="304800"/>
           </a:xfrm>
           <a:prstGeom xmlns:a="http://schemas.openxmlformats.org/drawingml/2006/main" prst="rect">
             <a:avLst/>
@@ -5071,7 +5382,7 @@
           <a:lstStyle xmlns:a="http://schemas.openxmlformats.org/drawingml/2006/main"/>
           <a:p xmlns:a="http://schemas.openxmlformats.org/drawingml/2006/main">
             <a:pPr algn="l">
-              <a:defRPr sz="2550" b="1" i="0">
+              <a:defRPr sz="1725" b="1" i="0">
                 <a:solidFill>
                   <a:srgbClr val="3D8DFF"/>
                 </a:solidFill>
@@ -5081,7 +5392,7 @@
               </a:defRPr>
             </a:pPr>
             <a:r>
-              <a:rPr sz="2550" b="1" i="0">
+              <a:rPr sz="1725" b="1" i="0">
                 <a:solidFill>
                   <a:srgbClr val="3D8DFF"/>
                 </a:solidFill>
@@ -5089,221 +5400,47 @@
                 <a:ea typeface="Arial"/>
                 <a:cs typeface="Arial"/>
               </a:rPr>
-              <a:t>✓</a:t>
-            </a:r>
-          </a:p>
-        </p:txBody>
-      </p:sp>
-      <p:sp>
-        <p:nvSpPr>
-          <p:cNvPr id="5" name="centering-text">
-            <a:extLst xmlns:a="http://schemas.openxmlformats.org/drawingml/2006/main">
-              <a:ext uri="{FF2B5EF4-FFF2-40B4-BE49-F238E27FC236}">
-                <a16:creationId xmlns:a16="http://schemas.microsoft.com/office/drawing/2014/main" id="{1ABDC9E1-DCC2-4B8B-98DB-9425D54EF258}"/>
-              </a:ext>
-            </a:extLst>
-          </p:cNvPr>
-          <p:cNvSpPr>
-            <a:spLocks xmlns:a="http://schemas.openxmlformats.org/drawingml/2006/main" noGrp="1"/>
-          </p:cNvSpPr>
-          <p:nvPr/>
-        </p:nvSpPr>
-        <p:spPr>
-          <a:xfrm xmlns:a="http://schemas.openxmlformats.org/drawingml/2006/main">
-            <a:off x="1200150" y="1304925"/>
-            <a:ext cx="9620250" cy="361950"/>
-          </a:xfrm>
-          <a:prstGeom xmlns:a="http://schemas.openxmlformats.org/drawingml/2006/main" prst="rect">
-            <a:avLst/>
-          </a:prstGeom>
-          <a:noFill xmlns:a="http://schemas.openxmlformats.org/drawingml/2006/main"/>
-          <a:ln xmlns:a="http://schemas.openxmlformats.org/drawingml/2006/main" w="0">
-            <a:noFill/>
-            <a:prstDash val="solid"/>
-          </a:ln>
-        </p:spPr>
-        <p:txBody>
-          <a:bodyPr xmlns:a="http://schemas.openxmlformats.org/drawingml/2006/main" lIns="0" tIns="0" rIns="0" bIns="0" anchor="t">
-            <a:noAutofit/>
+              <a:t>1  Local factor update</a:t>
+            </a:r>
+          </a:p>
+        </p:txBody>
+      </p:sp>
+      <p:sp>
+        <p:nvSpPr>
+          <p:cNvPr id="6" name="mechanism-1-body">
+            <a:extLst xmlns:a="http://schemas.openxmlformats.org/drawingml/2006/main">
+              <a:ext uri="{FF2B5EF4-FFF2-40B4-BE49-F238E27FC236}">
+                <a16:creationId xmlns:a16="http://schemas.microsoft.com/office/drawing/2014/main" id="{7782E1F4-160B-4C55-BA24-7289362B7972}"/>
+              </a:ext>
+            </a:extLst>
+          </p:cNvPr>
+          <p:cNvSpPr>
+            <a:spLocks xmlns:a="http://schemas.openxmlformats.org/drawingml/2006/main" noGrp="1"/>
+          </p:cNvSpPr>
+          <p:nvPr/>
+        </p:nvSpPr>
+        <p:spPr>
+          <a:xfrm xmlns:a="http://schemas.openxmlformats.org/drawingml/2006/main">
+            <a:off x="523875" y="2533650"/>
+            <a:ext cx="3333750" cy="1123950"/>
+          </a:xfrm>
+          <a:prstGeom xmlns:a="http://schemas.openxmlformats.org/drawingml/2006/main" prst="rect">
+            <a:avLst/>
+          </a:prstGeom>
+          <a:noFill xmlns:a="http://schemas.openxmlformats.org/drawingml/2006/main"/>
+          <a:ln xmlns:a="http://schemas.openxmlformats.org/drawingml/2006/main" w="0">
+            <a:noFill/>
+            <a:prstDash val="solid"/>
+          </a:ln>
+        </p:spPr>
+        <p:txBody>
+          <a:bodyPr xmlns:a="http://schemas.openxmlformats.org/drawingml/2006/main" lIns="0" tIns="0" rIns="0" bIns="0" anchor="t">
+            <a:normAutofit fontScale="100000"/>
           </a:bodyPr>
           <a:lstStyle xmlns:a="http://schemas.openxmlformats.org/drawingml/2006/main"/>
           <a:p xmlns:a="http://schemas.openxmlformats.org/drawingml/2006/main">
             <a:pPr algn="l">
-              <a:defRPr sz="1875" b="1" i="0">
-                <a:solidFill>
-                  <a:srgbClr val="000000"/>
-                </a:solidFill>
-                <a:latin typeface="Arial"/>
-                <a:ea typeface="Arial"/>
-                <a:cs typeface="Arial"/>
-              </a:defRPr>
-            </a:pPr>
-            <a:r>
-              <a:rPr sz="1875" b="1" i="0">
-                <a:solidFill>
-                  <a:srgbClr val="000000"/>
-                </a:solidFill>
-                <a:latin typeface="Arial"/>
-                <a:ea typeface="Arial"/>
-                <a:cs typeface="Arial"/>
-              </a:rPr>
-              <a:t>The ALS factors are already recentered after every iteration.</a:t>
-            </a:r>
-          </a:p>
-        </p:txBody>
-      </p:sp>
-      <p:sp>
-        <p:nvSpPr>
-          <p:cNvPr id="6" name="cond-head">
-            <a:extLst xmlns:a="http://schemas.openxmlformats.org/drawingml/2006/main">
-              <a:ext uri="{FF2B5EF4-FFF2-40B4-BE49-F238E27FC236}">
-                <a16:creationId xmlns:a16="http://schemas.microsoft.com/office/drawing/2014/main" id="{A6BB4D1E-6906-43FC-8AD1-DB550851F597}"/>
-              </a:ext>
-            </a:extLst>
-          </p:cNvPr>
-          <p:cNvSpPr>
-            <a:spLocks xmlns:a="http://schemas.openxmlformats.org/drawingml/2006/main" noGrp="1"/>
-          </p:cNvSpPr>
-          <p:nvPr/>
-        </p:nvSpPr>
-        <p:spPr>
-          <a:xfrm xmlns:a="http://schemas.openxmlformats.org/drawingml/2006/main">
-            <a:off x="666750" y="2286000"/>
-            <a:ext cx="5429250" cy="419100"/>
-          </a:xfrm>
-          <a:prstGeom xmlns:a="http://schemas.openxmlformats.org/drawingml/2006/main" prst="rect">
-            <a:avLst/>
-          </a:prstGeom>
-          <a:noFill xmlns:a="http://schemas.openxmlformats.org/drawingml/2006/main"/>
-          <a:ln xmlns:a="http://schemas.openxmlformats.org/drawingml/2006/main" w="0">
-            <a:noFill/>
-            <a:prstDash val="solid"/>
-          </a:ln>
-        </p:spPr>
-        <p:txBody>
-          <a:bodyPr xmlns:a="http://schemas.openxmlformats.org/drawingml/2006/main" lIns="0" tIns="0" rIns="0" bIns="0" anchor="t">
-            <a:normAutofit fontScale="86952"/>
-          </a:bodyPr>
-          <a:lstStyle xmlns:a="http://schemas.openxmlformats.org/drawingml/2006/main"/>
-          <a:p xmlns:a="http://schemas.openxmlformats.org/drawingml/2006/main">
-            <a:pPr algn="l">
-              <a:defRPr sz="1800" b="1" i="0">
-                <a:solidFill>
-                  <a:srgbClr val="000000"/>
-                </a:solidFill>
-                <a:latin typeface="Arial"/>
-                <a:ea typeface="Arial"/>
-                <a:cs typeface="Arial"/>
-              </a:defRPr>
-            </a:pPr>
-            <a:r>
-              <a:rPr sz="1800" b="1" i="0">
-                <a:solidFill>
-                  <a:srgbClr val="000000"/>
-                </a:solidFill>
-                <a:latin typeface="Arial"/>
-                <a:ea typeface="Arial"/>
-                <a:cs typeface="Arial"/>
-              </a:rPr>
-              <a:t>Low-rank DGP: median maximum local condition number</a:t>
-            </a:r>
-          </a:p>
-        </p:txBody>
-      </p:sp>
-      <p:sp>
-        <p:nvSpPr>
-          <p:cNvPr id="7" name="cond-pass">
-            <a:extLst xmlns:a="http://schemas.openxmlformats.org/drawingml/2006/main">
-              <a:ext uri="{FF2B5EF4-FFF2-40B4-BE49-F238E27FC236}">
-                <a16:creationId xmlns:a16="http://schemas.microsoft.com/office/drawing/2014/main" id="{FAEF4D9A-17F5-448B-A594-2A8F997D72A1}"/>
-              </a:ext>
-            </a:extLst>
-          </p:cNvPr>
-          <p:cNvSpPr>
-            <a:spLocks xmlns:a="http://schemas.openxmlformats.org/drawingml/2006/main" noGrp="1"/>
-          </p:cNvSpPr>
-          <p:nvPr/>
-        </p:nvSpPr>
-        <p:spPr>
-          <a:xfrm xmlns:a="http://schemas.openxmlformats.org/drawingml/2006/main">
-            <a:off x="666750" y="2905125"/>
-            <a:ext cx="2000250" cy="857250"/>
-          </a:xfrm>
-          <a:prstGeom xmlns:a="http://schemas.openxmlformats.org/drawingml/2006/main" prst="rect">
-            <a:avLst/>
-          </a:prstGeom>
-          <a:noFill xmlns:a="http://schemas.openxmlformats.org/drawingml/2006/main"/>
-          <a:ln xmlns:a="http://schemas.openxmlformats.org/drawingml/2006/main" w="0">
-            <a:noFill/>
-            <a:prstDash val="solid"/>
-          </a:ln>
-        </p:spPr>
-        <p:txBody>
-          <a:bodyPr xmlns:a="http://schemas.openxmlformats.org/drawingml/2006/main" lIns="0" tIns="0" rIns="0" bIns="0" anchor="t">
-            <a:noAutofit/>
-          </a:bodyPr>
-          <a:lstStyle xmlns:a="http://schemas.openxmlformats.org/drawingml/2006/main"/>
-          <a:p xmlns:a="http://schemas.openxmlformats.org/drawingml/2006/main">
-            <a:pPr algn="l">
-              <a:defRPr sz="5550" b="1" i="0">
-                <a:solidFill>
-                  <a:srgbClr val="3D8DFF"/>
-                </a:solidFill>
-                <a:latin typeface="Arial"/>
-                <a:ea typeface="Arial"/>
-                <a:cs typeface="Arial"/>
-              </a:defRPr>
-            </a:pPr>
-            <a:r>
-              <a:rPr sz="5550" b="1" i="0">
-                <a:solidFill>
-                  <a:srgbClr val="3D8DFF"/>
-                </a:solidFill>
-                <a:latin typeface="Arial"/>
-                <a:ea typeface="Arial"/>
-                <a:cs typeface="Arial"/>
-              </a:rPr>
-              <a:t>42</a:t>
-            </a:r>
-          </a:p>
-        </p:txBody>
-      </p:sp>
-      <p:sp>
-        <p:nvSpPr>
-          <p:cNvPr id="8" name="cond-arrow">
-            <a:extLst xmlns:a="http://schemas.openxmlformats.org/drawingml/2006/main">
-              <a:ext uri="{FF2B5EF4-FFF2-40B4-BE49-F238E27FC236}">
-                <a16:creationId xmlns:a16="http://schemas.microsoft.com/office/drawing/2014/main" id="{86A01D9E-E6D8-44D0-8C2E-2DA8B9FA75E8}"/>
-              </a:ext>
-            </a:extLst>
-          </p:cNvPr>
-          <p:cNvSpPr>
-            <a:spLocks xmlns:a="http://schemas.openxmlformats.org/drawingml/2006/main" noGrp="1"/>
-          </p:cNvSpPr>
-          <p:nvPr/>
-        </p:nvSpPr>
-        <p:spPr>
-          <a:xfrm xmlns:a="http://schemas.openxmlformats.org/drawingml/2006/main">
-            <a:off x="2667000" y="2952750"/>
-            <a:ext cx="952500" cy="666750"/>
-          </a:xfrm>
-          <a:prstGeom xmlns:a="http://schemas.openxmlformats.org/drawingml/2006/main" prst="rect">
-            <a:avLst/>
-          </a:prstGeom>
-          <a:noFill xmlns:a="http://schemas.openxmlformats.org/drawingml/2006/main"/>
-          <a:ln xmlns:a="http://schemas.openxmlformats.org/drawingml/2006/main" w="0">
-            <a:noFill/>
-            <a:prstDash val="solid"/>
-          </a:ln>
-        </p:spPr>
-        <p:txBody>
-          <a:bodyPr xmlns:a="http://schemas.openxmlformats.org/drawingml/2006/main" lIns="0" tIns="0" rIns="0" bIns="0" anchor="t">
-            <a:noAutofit/>
-          </a:bodyPr>
-          <a:lstStyle xmlns:a="http://schemas.openxmlformats.org/drawingml/2006/main"/>
-          <a:p xmlns:a="http://schemas.openxmlformats.org/drawingml/2006/main">
-            <a:pPr algn="ctr">
-              <a:defRPr sz="4350" b="0" i="0">
+              <a:defRPr sz="1275" b="0" i="0">
                 <a:solidFill>
                   <a:srgbClr val="59616D"/>
                 </a:solidFill>
@@ -5313,7 +5450,7 @@
               </a:defRPr>
             </a:pPr>
             <a:r>
-              <a:rPr sz="4350" b="0" i="0">
+              <a:rPr sz="1275" b="0" i="0">
                 <a:solidFill>
                   <a:srgbClr val="59616D"/>
                 </a:solidFill>
@@ -5321,145 +5458,29 @@
                 <a:ea typeface="Arial"/>
                 <a:cs typeface="Arial"/>
               </a:rPr>
-              <a:t>→</a:t>
-            </a:r>
-          </a:p>
-        </p:txBody>
-      </p:sp>
-      <p:sp>
-        <p:nvSpPr>
-          <p:cNvPr id="9" name="cond-warning">
-            <a:extLst xmlns:a="http://schemas.openxmlformats.org/drawingml/2006/main">
-              <a:ext uri="{FF2B5EF4-FFF2-40B4-BE49-F238E27FC236}">
-                <a16:creationId xmlns:a16="http://schemas.microsoft.com/office/drawing/2014/main" id="{8591C9BB-F248-4E84-BB2C-A2CA05200344}"/>
-              </a:ext>
-            </a:extLst>
-          </p:cNvPr>
-          <p:cNvSpPr>
-            <a:spLocks xmlns:a="http://schemas.openxmlformats.org/drawingml/2006/main" noGrp="1"/>
-          </p:cNvSpPr>
-          <p:nvPr/>
-        </p:nvSpPr>
-        <p:spPr>
-          <a:xfrm xmlns:a="http://schemas.openxmlformats.org/drawingml/2006/main">
-            <a:off x="3714750" y="2905125"/>
-            <a:ext cx="2952750" cy="857250"/>
-          </a:xfrm>
-          <a:prstGeom xmlns:a="http://schemas.openxmlformats.org/drawingml/2006/main" prst="rect">
-            <a:avLst/>
-          </a:prstGeom>
-          <a:noFill xmlns:a="http://schemas.openxmlformats.org/drawingml/2006/main"/>
-          <a:ln xmlns:a="http://schemas.openxmlformats.org/drawingml/2006/main" w="0">
-            <a:noFill/>
-            <a:prstDash val="solid"/>
-          </a:ln>
-        </p:spPr>
-        <p:txBody>
-          <a:bodyPr xmlns:a="http://schemas.openxmlformats.org/drawingml/2006/main" lIns="0" tIns="0" rIns="0" bIns="0" anchor="t">
-            <a:noAutofit/>
-          </a:bodyPr>
-          <a:lstStyle xmlns:a="http://schemas.openxmlformats.org/drawingml/2006/main"/>
-          <a:p xmlns:a="http://schemas.openxmlformats.org/drawingml/2006/main">
-            <a:pPr algn="l">
-              <a:defRPr sz="4950" b="1" i="0">
-                <a:solidFill>
-                  <a:srgbClr val="D55E00"/>
-                </a:solidFill>
-                <a:latin typeface="Arial"/>
-                <a:ea typeface="Arial"/>
-                <a:cs typeface="Arial"/>
-              </a:defRPr>
-            </a:pPr>
-            <a:r>
-              <a:rPr sz="4950" b="1" i="0">
-                <a:solidFill>
-                  <a:srgbClr val="D55E00"/>
-                </a:solidFill>
-                <a:latin typeface="Arial"/>
-                <a:ea typeface="Arial"/>
-                <a:cs typeface="Arial"/>
-              </a:rPr>
-              <a:t>84,006</a:t>
-            </a:r>
-          </a:p>
-        </p:txBody>
-      </p:sp>
-      <p:sp>
-        <p:nvSpPr>
-          <p:cNvPr id="10" name="cond-labels">
-            <a:extLst xmlns:a="http://schemas.openxmlformats.org/drawingml/2006/main">
-              <a:ext uri="{FF2B5EF4-FFF2-40B4-BE49-F238E27FC236}">
-                <a16:creationId xmlns:a16="http://schemas.microsoft.com/office/drawing/2014/main" id="{3CB6003D-291E-4F96-B022-411297B41FFC}"/>
-              </a:ext>
-            </a:extLst>
-          </p:cNvPr>
-          <p:cNvSpPr>
-            <a:spLocks xmlns:a="http://schemas.openxmlformats.org/drawingml/2006/main" noGrp="1"/>
-          </p:cNvSpPr>
-          <p:nvPr/>
-        </p:nvSpPr>
-        <p:spPr>
-          <a:xfrm xmlns:a="http://schemas.openxmlformats.org/drawingml/2006/main">
-            <a:off x="666750" y="3790950"/>
-            <a:ext cx="6000750" cy="285750"/>
-          </a:xfrm>
-          <a:prstGeom xmlns:a="http://schemas.openxmlformats.org/drawingml/2006/main" prst="rect">
-            <a:avLst/>
-          </a:prstGeom>
-          <a:noFill xmlns:a="http://schemas.openxmlformats.org/drawingml/2006/main"/>
-          <a:ln xmlns:a="http://schemas.openxmlformats.org/drawingml/2006/main" w="0">
-            <a:noFill/>
-            <a:prstDash val="solid"/>
-          </a:ln>
-        </p:spPr>
-        <p:txBody>
-          <a:bodyPr xmlns:a="http://schemas.openxmlformats.org/drawingml/2006/main" lIns="0" tIns="0" rIns="0" bIns="0" anchor="t">
-            <a:noAutofit/>
-          </a:bodyPr>
-          <a:lstStyle xmlns:a="http://schemas.openxmlformats.org/drawingml/2006/main"/>
-          <a:p xmlns:a="http://schemas.openxmlformats.org/drawingml/2006/main">
-            <a:pPr algn="l">
-              <a:defRPr sz="1350" b="0" i="0">
-                <a:solidFill>
-                  <a:srgbClr val="59616D"/>
-                </a:solidFill>
-                <a:latin typeface="Arial"/>
-                <a:ea typeface="Arial"/>
-                <a:cs typeface="Arial"/>
-              </a:defRPr>
-            </a:pPr>
-            <a:r>
-              <a:rPr sz="1350" b="0" i="0">
-                <a:solidFill>
-                  <a:srgbClr val="59616D"/>
-                </a:solidFill>
-                <a:latin typeface="Arial"/>
-                <a:ea typeface="Arial"/>
-                <a:cs typeface="Arial"/>
-              </a:rPr>
-              <a:t>diagnostic pass                                      warning</a:t>
-            </a:r>
-          </a:p>
-        </p:txBody>
-      </p:sp>
-      <p:sp>
-        <p:nvSpPr>
-          <p:cNvPr id="11" name="diag-vertical">
-            <a:extLst xmlns:a="http://schemas.openxmlformats.org/drawingml/2006/main">
-              <a:ext uri="{FF2B5EF4-FFF2-40B4-BE49-F238E27FC236}">
-                <a16:creationId xmlns:a16="http://schemas.microsoft.com/office/drawing/2014/main" id="{3D88D9A2-49EA-4CB8-BFBC-CD2AB8AC5117}"/>
-              </a:ext>
-            </a:extLst>
-          </p:cNvPr>
-          <p:cNvSpPr>
-            <a:spLocks xmlns:a="http://schemas.openxmlformats.org/drawingml/2006/main" noGrp="1"/>
-          </p:cNvSpPr>
-          <p:nvPr/>
-        </p:nvSpPr>
-        <p:spPr>
-          <a:xfrm xmlns:a="http://schemas.openxmlformats.org/drawingml/2006/main">
-            <a:off x="7029450" y="2152650"/>
-            <a:ext cx="9525" cy="2381250"/>
+              <a:t>ALS estimates a worker's intercept and factor coordinates from the factor vectors of firms that worker visited; firm updates are analogous.</a:t>
+            </a:r>
+          </a:p>
+        </p:txBody>
+      </p:sp>
+      <p:sp>
+        <p:nvSpPr>
+          <p:cNvPr id="7" name="mechanism-rule-1">
+            <a:extLst xmlns:a="http://schemas.openxmlformats.org/drawingml/2006/main">
+              <a:ext uri="{FF2B5EF4-FFF2-40B4-BE49-F238E27FC236}">
+                <a16:creationId xmlns:a16="http://schemas.microsoft.com/office/drawing/2014/main" id="{CF27B1F0-5B5C-4D34-8829-D1895C07EFB4}"/>
+              </a:ext>
+            </a:extLst>
+          </p:cNvPr>
+          <p:cNvSpPr>
+            <a:spLocks xmlns:a="http://schemas.openxmlformats.org/drawingml/2006/main" noGrp="1"/>
+          </p:cNvSpPr>
+          <p:nvPr/>
+        </p:nvSpPr>
+        <p:spPr>
+          <a:xfrm xmlns:a="http://schemas.openxmlformats.org/drawingml/2006/main">
+            <a:off x="4048125" y="2057400"/>
+            <a:ext cx="9525" cy="1695450"/>
           </a:xfrm>
           <a:prstGeom xmlns:a="http://schemas.openxmlformats.org/drawingml/2006/main" prst="rect">
             <a:avLst/>
@@ -5475,80 +5496,169 @@
       </p:sp>
       <p:sp>
         <p:nvSpPr>
-          <p:cNvPr id="12" name="norm-head">
-            <a:extLst xmlns:a="http://schemas.openxmlformats.org/drawingml/2006/main">
-              <a:ext uri="{FF2B5EF4-FFF2-40B4-BE49-F238E27FC236}">
-                <a16:creationId xmlns:a16="http://schemas.microsoft.com/office/drawing/2014/main" id="{AEE46F98-9F3E-458B-9A70-D2D650058919}"/>
-              </a:ext>
-            </a:extLst>
-          </p:cNvPr>
-          <p:cNvSpPr>
-            <a:spLocks xmlns:a="http://schemas.openxmlformats.org/drawingml/2006/main" noGrp="1"/>
-          </p:cNvSpPr>
-          <p:nvPr/>
-        </p:nvSpPr>
-        <p:spPr>
-          <a:xfrm xmlns:a="http://schemas.openxmlformats.org/drawingml/2006/main">
-            <a:off x="7524750" y="2286000"/>
-            <a:ext cx="3810000" cy="419100"/>
-          </a:xfrm>
-          <a:prstGeom xmlns:a="http://schemas.openxmlformats.org/drawingml/2006/main" prst="rect">
-            <a:avLst/>
-          </a:prstGeom>
-          <a:noFill xmlns:a="http://schemas.openxmlformats.org/drawingml/2006/main"/>
-          <a:ln xmlns:a="http://schemas.openxmlformats.org/drawingml/2006/main" w="0">
-            <a:noFill/>
-            <a:prstDash val="solid"/>
-          </a:ln>
-        </p:spPr>
-        <p:txBody>
-          <a:bodyPr xmlns:a="http://schemas.openxmlformats.org/drawingml/2006/main" lIns="0" tIns="0" rIns="0" bIns="0" anchor="t">
-            <a:normAutofit fontScale="99035"/>
+          <p:cNvPr id="8" name="mechanism-2-head">
+            <a:extLst xmlns:a="http://schemas.openxmlformats.org/drawingml/2006/main">
+              <a:ext uri="{FF2B5EF4-FFF2-40B4-BE49-F238E27FC236}">
+                <a16:creationId xmlns:a16="http://schemas.microsoft.com/office/drawing/2014/main" id="{CDD841C4-AF20-480D-B028-D31CFA578D77}"/>
+              </a:ext>
+            </a:extLst>
+          </p:cNvPr>
+          <p:cNvSpPr>
+            <a:spLocks xmlns:a="http://schemas.openxmlformats.org/drawingml/2006/main" noGrp="1"/>
+          </p:cNvSpPr>
+          <p:nvPr/>
+        </p:nvSpPr>
+        <p:spPr>
+          <a:xfrm xmlns:a="http://schemas.openxmlformats.org/drawingml/2006/main">
+            <a:off x="4333875" y="2114550"/>
+            <a:ext cx="3333750" cy="304800"/>
+          </a:xfrm>
+          <a:prstGeom xmlns:a="http://schemas.openxmlformats.org/drawingml/2006/main" prst="rect">
+            <a:avLst/>
+          </a:prstGeom>
+          <a:noFill xmlns:a="http://schemas.openxmlformats.org/drawingml/2006/main"/>
+          <a:ln xmlns:a="http://schemas.openxmlformats.org/drawingml/2006/main" w="0">
+            <a:noFill/>
+            <a:prstDash val="solid"/>
+          </a:ln>
+        </p:spPr>
+        <p:txBody>
+          <a:bodyPr xmlns:a="http://schemas.openxmlformats.org/drawingml/2006/main" lIns="0" tIns="0" rIns="0" bIns="0" anchor="t">
+            <a:noAutofit/>
           </a:bodyPr>
           <a:lstStyle xmlns:a="http://schemas.openxmlformats.org/drawingml/2006/main"/>
           <a:p xmlns:a="http://schemas.openxmlformats.org/drawingml/2006/main">
             <a:pPr algn="l">
-              <a:defRPr sz="1800" b="1" i="0">
-                <a:solidFill>
-                  <a:srgbClr val="000000"/>
-                </a:solidFill>
-                <a:latin typeface="Arial"/>
-                <a:ea typeface="Arial"/>
-                <a:cs typeface="Arial"/>
-              </a:defRPr>
-            </a:pPr>
-            <a:r>
-              <a:rPr sz="1800" b="1" i="0">
-                <a:solidFill>
-                  <a:srgbClr val="000000"/>
-                </a:solidFill>
-                <a:latin typeface="Arial"/>
-                <a:ea typeface="Arial"/>
-                <a:cs typeface="Arial"/>
-              </a:rPr>
-              <a:t>Low-rank DGP: median factor norm</a:t>
-            </a:r>
-          </a:p>
-        </p:txBody>
-      </p:sp>
-      <p:sp>
-        <p:nvSpPr>
-          <p:cNvPr id="13" name="norm-pass">
-            <a:extLst xmlns:a="http://schemas.openxmlformats.org/drawingml/2006/main">
-              <a:ext uri="{FF2B5EF4-FFF2-40B4-BE49-F238E27FC236}">
-                <a16:creationId xmlns:a16="http://schemas.microsoft.com/office/drawing/2014/main" id="{BF4276AC-EA96-4D1D-A6E2-BAE8692FBEE2}"/>
-              </a:ext>
-            </a:extLst>
-          </p:cNvPr>
-          <p:cNvSpPr>
-            <a:spLocks xmlns:a="http://schemas.openxmlformats.org/drawingml/2006/main" noGrp="1"/>
-          </p:cNvSpPr>
-          <p:nvPr/>
-        </p:nvSpPr>
-        <p:spPr>
-          <a:xfrm xmlns:a="http://schemas.openxmlformats.org/drawingml/2006/main">
-            <a:off x="7524750" y="2905125"/>
-            <a:ext cx="1714500" cy="857250"/>
+              <a:defRPr sz="1725" b="1" i="0">
+                <a:solidFill>
+                  <a:srgbClr val="D55E00"/>
+                </a:solidFill>
+                <a:latin typeface="Arial"/>
+                <a:ea typeface="Arial"/>
+                <a:cs typeface="Arial"/>
+              </a:defRPr>
+            </a:pPr>
+            <a:r>
+              <a:rPr sz="1725" b="1" i="0">
+                <a:solidFill>
+                  <a:srgbClr val="D55E00"/>
+                </a:solidFill>
+                <a:latin typeface="Arial"/>
+                <a:ea typeface="Arial"/>
+                <a:cs typeface="Arial"/>
+              </a:rPr>
+              <a:t>2  Poor conditioning</a:t>
+            </a:r>
+          </a:p>
+        </p:txBody>
+      </p:sp>
+      <p:sp>
+        <p:nvSpPr>
+          <p:cNvPr id="9" name="mechanism-2-body">
+            <a:extLst xmlns:a="http://schemas.openxmlformats.org/drawingml/2006/main">
+              <a:ext uri="{FF2B5EF4-FFF2-40B4-BE49-F238E27FC236}">
+                <a16:creationId xmlns:a16="http://schemas.microsoft.com/office/drawing/2014/main" id="{6224EEA1-F405-4622-A79D-8EF7D3EE276F}"/>
+              </a:ext>
+            </a:extLst>
+          </p:cNvPr>
+          <p:cNvSpPr>
+            <a:spLocks xmlns:a="http://schemas.openxmlformats.org/drawingml/2006/main" noGrp="1"/>
+          </p:cNvSpPr>
+          <p:nvPr/>
+        </p:nvSpPr>
+        <p:spPr>
+          <a:xfrm xmlns:a="http://schemas.openxmlformats.org/drawingml/2006/main">
+            <a:off x="4333875" y="2533650"/>
+            <a:ext cx="3333750" cy="1200150"/>
+          </a:xfrm>
+          <a:prstGeom xmlns:a="http://schemas.openxmlformats.org/drawingml/2006/main" prst="rect">
+            <a:avLst/>
+          </a:prstGeom>
+          <a:noFill xmlns:a="http://schemas.openxmlformats.org/drawingml/2006/main"/>
+          <a:ln xmlns:a="http://schemas.openxmlformats.org/drawingml/2006/main" w="0">
+            <a:noFill/>
+            <a:prstDash val="solid"/>
+          </a:ln>
+        </p:spPr>
+        <p:txBody>
+          <a:bodyPr xmlns:a="http://schemas.openxmlformats.org/drawingml/2006/main" lIns="0" tIns="0" rIns="0" bIns="0" anchor="t">
+            <a:normAutofit fontScale="100000"/>
+          </a:bodyPr>
+          <a:lstStyle xmlns:a="http://schemas.openxmlformats.org/drawingml/2006/main"/>
+          <a:p xmlns:a="http://schemas.openxmlformats.org/drawingml/2006/main">
+            <a:pPr algn="l">
+              <a:defRPr sz="1275" b="0" i="0">
+                <a:solidFill>
+                  <a:srgbClr val="59616D"/>
+                </a:solidFill>
+                <a:latin typeface="Arial"/>
+                <a:ea typeface="Arial"/>
+                <a:cs typeface="Arial"/>
+              </a:defRPr>
+            </a:pPr>
+            <a:r>
+              <a:rPr sz="1275" b="0" i="0">
+                <a:solidFill>
+                  <a:srgbClr val="59616D"/>
+                </a:solidFill>
+                <a:latin typeface="Arial"/>
+                <a:ea typeface="Arial"/>
+                <a:cs typeface="Arial"/>
+              </a:rPr>
+              <a:t>If those visited-firm vectors are nearly redundant, the local Gram matrix is almost singular. Its condition number measures noise amplification: larger means less independent information.</a:t>
+            </a:r>
+          </a:p>
+        </p:txBody>
+      </p:sp>
+      <p:sp>
+        <p:nvSpPr>
+          <p:cNvPr id="10" name="mechanism-rule-2">
+            <a:extLst xmlns:a="http://schemas.openxmlformats.org/drawingml/2006/main">
+              <a:ext uri="{FF2B5EF4-FFF2-40B4-BE49-F238E27FC236}">
+                <a16:creationId xmlns:a16="http://schemas.microsoft.com/office/drawing/2014/main" id="{0E68A56F-4C32-4A09-A7F5-0B891179BEF2}"/>
+              </a:ext>
+            </a:extLst>
+          </p:cNvPr>
+          <p:cNvSpPr>
+            <a:spLocks xmlns:a="http://schemas.openxmlformats.org/drawingml/2006/main" noGrp="1"/>
+          </p:cNvSpPr>
+          <p:nvPr/>
+        </p:nvSpPr>
+        <p:spPr>
+          <a:xfrm xmlns:a="http://schemas.openxmlformats.org/drawingml/2006/main">
+            <a:off x="7858125" y="2057400"/>
+            <a:ext cx="9525" cy="1695450"/>
+          </a:xfrm>
+          <a:prstGeom xmlns:a="http://schemas.openxmlformats.org/drawingml/2006/main" prst="rect">
+            <a:avLst/>
+          </a:prstGeom>
+          <a:solidFill xmlns:a="http://schemas.openxmlformats.org/drawingml/2006/main">
+            <a:srgbClr val="B8BCC4"/>
+          </a:solidFill>
+          <a:ln xmlns:a="http://schemas.openxmlformats.org/drawingml/2006/main" w="0">
+            <a:noFill/>
+            <a:prstDash val="solid"/>
+          </a:ln>
+        </p:spPr>
+      </p:sp>
+      <p:sp>
+        <p:nvSpPr>
+          <p:cNvPr id="11" name="mechanism-3-head">
+            <a:extLst xmlns:a="http://schemas.openxmlformats.org/drawingml/2006/main">
+              <a:ext uri="{FF2B5EF4-FFF2-40B4-BE49-F238E27FC236}">
+                <a16:creationId xmlns:a16="http://schemas.microsoft.com/office/drawing/2014/main" id="{9BFA0E99-3357-4562-8EE0-59861CD2639D}"/>
+              </a:ext>
+            </a:extLst>
+          </p:cNvPr>
+          <p:cNvSpPr>
+            <a:spLocks xmlns:a="http://schemas.openxmlformats.org/drawingml/2006/main" noGrp="1"/>
+          </p:cNvSpPr>
+          <p:nvPr/>
+        </p:nvSpPr>
+        <p:spPr>
+          <a:xfrm xmlns:a="http://schemas.openxmlformats.org/drawingml/2006/main">
+            <a:off x="8143875" y="2114550"/>
+            <a:ext cx="3333750" cy="304800"/>
           </a:xfrm>
           <a:prstGeom xmlns:a="http://schemas.openxmlformats.org/drawingml/2006/main" prst="rect">
             <a:avLst/>
@@ -5566,65 +5676,65 @@
           <a:lstStyle xmlns:a="http://schemas.openxmlformats.org/drawingml/2006/main"/>
           <a:p xmlns:a="http://schemas.openxmlformats.org/drawingml/2006/main">
             <a:pPr algn="l">
-              <a:defRPr sz="5100" b="1" i="0">
-                <a:solidFill>
-                  <a:srgbClr val="3D8DFF"/>
-                </a:solidFill>
-                <a:latin typeface="Arial"/>
-                <a:ea typeface="Arial"/>
-                <a:cs typeface="Arial"/>
-              </a:defRPr>
-            </a:pPr>
-            <a:r>
-              <a:rPr sz="5100" b="1" i="0">
-                <a:solidFill>
-                  <a:srgbClr val="3D8DFF"/>
-                </a:solidFill>
-                <a:latin typeface="Arial"/>
-                <a:ea typeface="Arial"/>
-                <a:cs typeface="Arial"/>
-              </a:rPr>
-              <a:t>4.32</a:t>
-            </a:r>
-          </a:p>
-        </p:txBody>
-      </p:sp>
-      <p:sp>
-        <p:nvSpPr>
-          <p:cNvPr id="14" name="norm-arrow">
-            <a:extLst xmlns:a="http://schemas.openxmlformats.org/drawingml/2006/main">
-              <a:ext uri="{FF2B5EF4-FFF2-40B4-BE49-F238E27FC236}">
-                <a16:creationId xmlns:a16="http://schemas.microsoft.com/office/drawing/2014/main" id="{0D598C63-118D-4FF5-8913-BD6A964A67CB}"/>
-              </a:ext>
-            </a:extLst>
-          </p:cNvPr>
-          <p:cNvSpPr>
-            <a:spLocks xmlns:a="http://schemas.openxmlformats.org/drawingml/2006/main" noGrp="1"/>
-          </p:cNvSpPr>
-          <p:nvPr/>
-        </p:nvSpPr>
-        <p:spPr>
-          <a:xfrm xmlns:a="http://schemas.openxmlformats.org/drawingml/2006/main">
-            <a:off x="9191625" y="2952750"/>
-            <a:ext cx="762000" cy="666750"/>
-          </a:xfrm>
-          <a:prstGeom xmlns:a="http://schemas.openxmlformats.org/drawingml/2006/main" prst="rect">
-            <a:avLst/>
-          </a:prstGeom>
-          <a:noFill xmlns:a="http://schemas.openxmlformats.org/drawingml/2006/main"/>
-          <a:ln xmlns:a="http://schemas.openxmlformats.org/drawingml/2006/main" w="0">
-            <a:noFill/>
-            <a:prstDash val="solid"/>
-          </a:ln>
-        </p:spPr>
-        <p:txBody>
-          <a:bodyPr xmlns:a="http://schemas.openxmlformats.org/drawingml/2006/main" lIns="0" tIns="0" rIns="0" bIns="0" anchor="t">
-            <a:noAutofit/>
-          </a:bodyPr>
-          <a:lstStyle xmlns:a="http://schemas.openxmlformats.org/drawingml/2006/main"/>
-          <a:p xmlns:a="http://schemas.openxmlformats.org/drawingml/2006/main">
-            <a:pPr algn="ctr">
-              <a:defRPr sz="4350" b="0" i="0">
+              <a:defRPr sz="1725" b="1" i="0">
+                <a:solidFill>
+                  <a:srgbClr val="D55E00"/>
+                </a:solidFill>
+                <a:latin typeface="Arial"/>
+                <a:ea typeface="Arial"/>
+                <a:cs typeface="Arial"/>
+              </a:defRPr>
+            </a:pPr>
+            <a:r>
+              <a:rPr sz="1725" b="1" i="0">
+                <a:solidFill>
+                  <a:srgbClr val="D55E00"/>
+                </a:solidFill>
+                <a:latin typeface="Arial"/>
+                <a:ea typeface="Arial"/>
+                <a:cs typeface="Arial"/>
+              </a:rPr>
+              <a:t>3  Extreme completion</a:t>
+            </a:r>
+          </a:p>
+        </p:txBody>
+      </p:sp>
+      <p:sp>
+        <p:nvSpPr>
+          <p:cNvPr id="12" name="mechanism-3-body">
+            <a:extLst xmlns:a="http://schemas.openxmlformats.org/drawingml/2006/main">
+              <a:ext uri="{FF2B5EF4-FFF2-40B4-BE49-F238E27FC236}">
+                <a16:creationId xmlns:a16="http://schemas.microsoft.com/office/drawing/2014/main" id="{3391244E-3386-4267-AD9E-33813B2B4862}"/>
+              </a:ext>
+            </a:extLst>
+          </p:cNvPr>
+          <p:cNvSpPr>
+            <a:spLocks xmlns:a="http://schemas.openxmlformats.org/drawingml/2006/main" noGrp="1"/>
+          </p:cNvSpPr>
+          <p:nvPr/>
+        </p:nvSpPr>
+        <p:spPr>
+          <a:xfrm xmlns:a="http://schemas.openxmlformats.org/drawingml/2006/main">
+            <a:off x="8143875" y="2533650"/>
+            <a:ext cx="3333750" cy="1200150"/>
+          </a:xfrm>
+          <a:prstGeom xmlns:a="http://schemas.openxmlformats.org/drawingml/2006/main" prst="rect">
+            <a:avLst/>
+          </a:prstGeom>
+          <a:noFill xmlns:a="http://schemas.openxmlformats.org/drawingml/2006/main"/>
+          <a:ln xmlns:a="http://schemas.openxmlformats.org/drawingml/2006/main" w="0">
+            <a:noFill/>
+            <a:prstDash val="solid"/>
+          </a:ln>
+        </p:spPr>
+        <p:txBody>
+          <a:bodyPr xmlns:a="http://schemas.openxmlformats.org/drawingml/2006/main" lIns="0" tIns="0" rIns="0" bIns="0" anchor="t">
+            <a:normAutofit fontScale="100000"/>
+          </a:bodyPr>
+          <a:lstStyle xmlns:a="http://schemas.openxmlformats.org/drawingml/2006/main"/>
+          <a:p xmlns:a="http://schemas.openxmlformats.org/drawingml/2006/main">
+            <a:pPr algn="l">
+              <a:defRPr sz="1275" b="0" i="0">
                 <a:solidFill>
                   <a:srgbClr val="59616D"/>
                 </a:solidFill>
@@ -5634,7 +5744,7 @@
               </a:defRPr>
             </a:pPr>
             <a:r>
-              <a:rPr sz="4350" b="0" i="0">
+              <a:rPr sz="1275" b="0" i="0">
                 <a:solidFill>
                   <a:srgbClr val="59616D"/>
                 </a:solidFill>
@@ -5642,145 +5752,29 @@
                 <a:ea typeface="Arial"/>
                 <a:cs typeface="Arial"/>
               </a:rPr>
-              <a:t>→</a:t>
-            </a:r>
-          </a:p>
-        </p:txBody>
-      </p:sp>
-      <p:sp>
-        <p:nvSpPr>
-          <p:cNvPr id="15" name="norm-warning">
-            <a:extLst xmlns:a="http://schemas.openxmlformats.org/drawingml/2006/main">
-              <a:ext uri="{FF2B5EF4-FFF2-40B4-BE49-F238E27FC236}">
-                <a16:creationId xmlns:a16="http://schemas.microsoft.com/office/drawing/2014/main" id="{27C9F563-8389-4C2E-AEB9-09E26B7307F3}"/>
-              </a:ext>
-            </a:extLst>
-          </p:cNvPr>
-          <p:cNvSpPr>
-            <a:spLocks xmlns:a="http://schemas.openxmlformats.org/drawingml/2006/main" noGrp="1"/>
-          </p:cNvSpPr>
-          <p:nvPr/>
-        </p:nvSpPr>
-        <p:spPr>
-          <a:xfrm xmlns:a="http://schemas.openxmlformats.org/drawingml/2006/main">
-            <a:off x="10001250" y="2905125"/>
-            <a:ext cx="1714500" cy="857250"/>
-          </a:xfrm>
-          <a:prstGeom xmlns:a="http://schemas.openxmlformats.org/drawingml/2006/main" prst="rect">
-            <a:avLst/>
-          </a:prstGeom>
-          <a:noFill xmlns:a="http://schemas.openxmlformats.org/drawingml/2006/main"/>
-          <a:ln xmlns:a="http://schemas.openxmlformats.org/drawingml/2006/main" w="0">
-            <a:noFill/>
-            <a:prstDash val="solid"/>
-          </a:ln>
-        </p:spPr>
-        <p:txBody>
-          <a:bodyPr xmlns:a="http://schemas.openxmlformats.org/drawingml/2006/main" lIns="0" tIns="0" rIns="0" bIns="0" anchor="t">
-            <a:noAutofit/>
-          </a:bodyPr>
-          <a:lstStyle xmlns:a="http://schemas.openxmlformats.org/drawingml/2006/main"/>
-          <a:p xmlns:a="http://schemas.openxmlformats.org/drawingml/2006/main">
-            <a:pPr algn="l">
-              <a:defRPr sz="4500" b="1" i="0">
-                <a:solidFill>
-                  <a:srgbClr val="D55E00"/>
-                </a:solidFill>
-                <a:latin typeface="Arial"/>
-                <a:ea typeface="Arial"/>
-                <a:cs typeface="Arial"/>
-              </a:defRPr>
-            </a:pPr>
-            <a:r>
-              <a:rPr sz="4500" b="1" i="0">
-                <a:solidFill>
-                  <a:srgbClr val="D55E00"/>
-                </a:solidFill>
-                <a:latin typeface="Arial"/>
-                <a:ea typeface="Arial"/>
-                <a:cs typeface="Arial"/>
-              </a:rPr>
-              <a:t>184.9</a:t>
-            </a:r>
-          </a:p>
-        </p:txBody>
-      </p:sp>
-      <p:sp>
-        <p:nvSpPr>
-          <p:cNvPr id="16" name="norm-labels">
-            <a:extLst xmlns:a="http://schemas.openxmlformats.org/drawingml/2006/main">
-              <a:ext uri="{FF2B5EF4-FFF2-40B4-BE49-F238E27FC236}">
-                <a16:creationId xmlns:a16="http://schemas.microsoft.com/office/drawing/2014/main" id="{C95D25C7-4335-4708-A503-2384E6A6A089}"/>
-              </a:ext>
-            </a:extLst>
-          </p:cNvPr>
-          <p:cNvSpPr>
-            <a:spLocks xmlns:a="http://schemas.openxmlformats.org/drawingml/2006/main" noGrp="1"/>
-          </p:cNvSpPr>
-          <p:nvPr/>
-        </p:nvSpPr>
-        <p:spPr>
-          <a:xfrm xmlns:a="http://schemas.openxmlformats.org/drawingml/2006/main">
-            <a:off x="7524750" y="3790950"/>
-            <a:ext cx="4048125" cy="285750"/>
-          </a:xfrm>
-          <a:prstGeom xmlns:a="http://schemas.openxmlformats.org/drawingml/2006/main" prst="rect">
-            <a:avLst/>
-          </a:prstGeom>
-          <a:noFill xmlns:a="http://schemas.openxmlformats.org/drawingml/2006/main"/>
-          <a:ln xmlns:a="http://schemas.openxmlformats.org/drawingml/2006/main" w="0">
-            <a:noFill/>
-            <a:prstDash val="solid"/>
-          </a:ln>
-        </p:spPr>
-        <p:txBody>
-          <a:bodyPr xmlns:a="http://schemas.openxmlformats.org/drawingml/2006/main" lIns="0" tIns="0" rIns="0" bIns="0" anchor="t">
-            <a:noAutofit/>
-          </a:bodyPr>
-          <a:lstStyle xmlns:a="http://schemas.openxmlformats.org/drawingml/2006/main"/>
-          <a:p xmlns:a="http://schemas.openxmlformats.org/drawingml/2006/main">
-            <a:pPr algn="l">
-              <a:defRPr sz="1350" b="0" i="0">
-                <a:solidFill>
-                  <a:srgbClr val="59616D"/>
-                </a:solidFill>
-                <a:latin typeface="Arial"/>
-                <a:ea typeface="Arial"/>
-                <a:cs typeface="Arial"/>
-              </a:defRPr>
-            </a:pPr>
-            <a:r>
-              <a:rPr sz="1350" b="0" i="0">
-                <a:solidFill>
-                  <a:srgbClr val="59616D"/>
-                </a:solidFill>
-                <a:latin typeface="Arial"/>
-                <a:ea typeface="Arial"/>
-                <a:cs typeface="Arial"/>
-              </a:rPr>
-              <a:t>pass                                  warning</a:t>
-            </a:r>
-          </a:p>
-        </p:txBody>
-      </p:sp>
-      <p:sp>
-        <p:nvSpPr>
-          <p:cNvPr id="17" name="diag-bottom-rule">
-            <a:extLst xmlns:a="http://schemas.openxmlformats.org/drawingml/2006/main">
-              <a:ext uri="{FF2B5EF4-FFF2-40B4-BE49-F238E27FC236}">
-                <a16:creationId xmlns:a16="http://schemas.microsoft.com/office/drawing/2014/main" id="{ADB574D5-1AF3-45D5-BD0C-468AB901C2AC}"/>
-              </a:ext>
-            </a:extLst>
-          </p:cNvPr>
-          <p:cNvSpPr>
-            <a:spLocks xmlns:a="http://schemas.openxmlformats.org/drawingml/2006/main" noGrp="1"/>
-          </p:cNvSpPr>
-          <p:nvPr/>
-        </p:nvSpPr>
-        <p:spPr>
-          <a:xfrm xmlns:a="http://schemas.openxmlformats.org/drawingml/2006/main">
-            <a:off x="666750" y="4629150"/>
-            <a:ext cx="10858500" cy="19050"/>
+              <a:t>Small match-mean noise can then create huge u_i or v_j estimates. Those factors extrapolate to unobserved worker-firm pairs and can explode the plug-in functionals.</a:t>
+            </a:r>
+          </a:p>
+        </p:txBody>
+      </p:sp>
+      <p:sp>
+        <p:nvSpPr>
+          <p:cNvPr id="13" name="evidence-rule">
+            <a:extLst xmlns:a="http://schemas.openxmlformats.org/drawingml/2006/main">
+              <a:ext uri="{FF2B5EF4-FFF2-40B4-BE49-F238E27FC236}">
+                <a16:creationId xmlns:a16="http://schemas.microsoft.com/office/drawing/2014/main" id="{5E4A9DEE-2022-4A75-916D-F254C7571007}"/>
+              </a:ext>
+            </a:extLst>
+          </p:cNvPr>
+          <p:cNvSpPr>
+            <a:spLocks xmlns:a="http://schemas.openxmlformats.org/drawingml/2006/main" noGrp="1"/>
+          </p:cNvSpPr>
+          <p:nvPr/>
+        </p:nvSpPr>
+        <p:spPr>
+          <a:xfrm xmlns:a="http://schemas.openxmlformats.org/drawingml/2006/main">
+            <a:off x="523875" y="3943350"/>
+            <a:ext cx="10953750" cy="19050"/>
           </a:xfrm>
           <a:prstGeom xmlns:a="http://schemas.openxmlformats.org/drawingml/2006/main" prst="rect">
             <a:avLst/>
@@ -5796,22 +5790,80 @@
       </p:sp>
       <p:sp>
         <p:nvSpPr>
-          <p:cNvPr id="18" name="diag-mechanism">
-            <a:extLst xmlns:a="http://schemas.openxmlformats.org/drawingml/2006/main">
-              <a:ext uri="{FF2B5EF4-FFF2-40B4-BE49-F238E27FC236}">
-                <a16:creationId xmlns:a16="http://schemas.microsoft.com/office/drawing/2014/main" id="{35FAA1C1-A135-4A2D-94F7-C022DBC22B24}"/>
-              </a:ext>
-            </a:extLst>
-          </p:cNvPr>
-          <p:cNvSpPr>
-            <a:spLocks xmlns:a="http://schemas.openxmlformats.org/drawingml/2006/main" noGrp="1"/>
-          </p:cNvSpPr>
-          <p:nvPr/>
-        </p:nvSpPr>
-        <p:spPr>
-          <a:xfrm xmlns:a="http://schemas.openxmlformats.org/drawingml/2006/main">
-            <a:off x="952500" y="5010150"/>
-            <a:ext cx="10287000" cy="685800"/>
+          <p:cNvPr id="14" name="evidence-head">
+            <a:extLst xmlns:a="http://schemas.openxmlformats.org/drawingml/2006/main">
+              <a:ext uri="{FF2B5EF4-FFF2-40B4-BE49-F238E27FC236}">
+                <a16:creationId xmlns:a16="http://schemas.microsoft.com/office/drawing/2014/main" id="{2E2FCE46-0A44-4506-8332-CB7A4BA27347}"/>
+              </a:ext>
+            </a:extLst>
+          </p:cNvPr>
+          <p:cNvSpPr>
+            <a:spLocks xmlns:a="http://schemas.openxmlformats.org/drawingml/2006/main" noGrp="1"/>
+          </p:cNvSpPr>
+          <p:nvPr/>
+        </p:nvSpPr>
+        <p:spPr>
+          <a:xfrm xmlns:a="http://schemas.openxmlformats.org/drawingml/2006/main">
+            <a:off x="523875" y="4171950"/>
+            <a:ext cx="5334000" cy="285750"/>
+          </a:xfrm>
+          <a:prstGeom xmlns:a="http://schemas.openxmlformats.org/drawingml/2006/main" prst="rect">
+            <a:avLst/>
+          </a:prstGeom>
+          <a:noFill xmlns:a="http://schemas.openxmlformats.org/drawingml/2006/main"/>
+          <a:ln xmlns:a="http://schemas.openxmlformats.org/drawingml/2006/main" w="0">
+            <a:noFill/>
+            <a:prstDash val="solid"/>
+          </a:ln>
+        </p:spPr>
+        <p:txBody>
+          <a:bodyPr xmlns:a="http://schemas.openxmlformats.org/drawingml/2006/main" lIns="0" tIns="0" rIns="0" bIns="0" anchor="t">
+            <a:noAutofit/>
+          </a:bodyPr>
+          <a:lstStyle xmlns:a="http://schemas.openxmlformats.org/drawingml/2006/main"/>
+          <a:p xmlns:a="http://schemas.openxmlformats.org/drawingml/2006/main">
+            <a:pPr algn="l">
+              <a:defRPr sz="1650" b="1" i="0">
+                <a:solidFill>
+                  <a:srgbClr val="000000"/>
+                </a:solidFill>
+                <a:latin typeface="Arial"/>
+                <a:ea typeface="Arial"/>
+                <a:cs typeface="Arial"/>
+              </a:defRPr>
+            </a:pPr>
+            <a:r>
+              <a:rPr sz="1650" b="1" i="0">
+                <a:solidFill>
+                  <a:srgbClr val="000000"/>
+                </a:solidFill>
+                <a:latin typeface="Arial"/>
+                <a:ea typeface="Arial"/>
+                <a:cs typeface="Arial"/>
+              </a:rPr>
+              <a:t>Low-rank DGP evidence: medians across replications</a:t>
+            </a:r>
+          </a:p>
+        </p:txBody>
+      </p:sp>
+      <p:sp>
+        <p:nvSpPr>
+          <p:cNvPr id="15" name="evidence-pass">
+            <a:extLst xmlns:a="http://schemas.openxmlformats.org/drawingml/2006/main">
+              <a:ext uri="{FF2B5EF4-FFF2-40B4-BE49-F238E27FC236}">
+                <a16:creationId xmlns:a16="http://schemas.microsoft.com/office/drawing/2014/main" id="{BEB51990-BC2B-46DB-BC14-AE7FFB29F292}"/>
+              </a:ext>
+            </a:extLst>
+          </p:cNvPr>
+          <p:cNvSpPr>
+            <a:spLocks xmlns:a="http://schemas.openxmlformats.org/drawingml/2006/main" noGrp="1"/>
+          </p:cNvSpPr>
+          <p:nvPr/>
+        </p:nvSpPr>
+        <p:spPr>
+          <a:xfrm xmlns:a="http://schemas.openxmlformats.org/drawingml/2006/main">
+            <a:off x="523875" y="4591050"/>
+            <a:ext cx="5143500" cy="514350"/>
           </a:xfrm>
           <a:prstGeom xmlns:a="http://schemas.openxmlformats.org/drawingml/2006/main" prst="rect">
             <a:avLst/>
@@ -5828,8 +5880,213 @@
           </a:bodyPr>
           <a:lstStyle xmlns:a="http://schemas.openxmlformats.org/drawingml/2006/main"/>
           <a:p xmlns:a="http://schemas.openxmlformats.org/drawingml/2006/main">
+            <a:pPr algn="l">
+              <a:defRPr sz="1350" b="1" i="0">
+                <a:solidFill>
+                  <a:srgbClr val="3D8DFF"/>
+                </a:solidFill>
+                <a:latin typeface="Arial"/>
+                <a:ea typeface="Arial"/>
+                <a:cs typeface="Arial"/>
+              </a:defRPr>
+            </a:pPr>
+            <a:r>
+              <a:rPr sz="1350" b="1" i="0">
+                <a:solidFill>
+                  <a:srgbClr val="3D8DFF"/>
+                </a:solidFill>
+                <a:latin typeface="Arial"/>
+                <a:ea typeface="Arial"/>
+                <a:cs typeface="Arial"/>
+              </a:rPr>
+              <a:t>Diagnostic pass (93): worst local condition number 42; maximum factor norm 4.32.</a:t>
+            </a:r>
+          </a:p>
+        </p:txBody>
+      </p:sp>
+      <p:sp>
+        <p:nvSpPr>
+          <p:cNvPr id="16" name="evidence-warning">
+            <a:extLst xmlns:a="http://schemas.openxmlformats.org/drawingml/2006/main">
+              <a:ext uri="{FF2B5EF4-FFF2-40B4-BE49-F238E27FC236}">
+                <a16:creationId xmlns:a16="http://schemas.microsoft.com/office/drawing/2014/main" id="{D7E69179-3E07-4D43-9FAB-32EF40636FC9}"/>
+              </a:ext>
+            </a:extLst>
+          </p:cNvPr>
+          <p:cNvSpPr>
+            <a:spLocks xmlns:a="http://schemas.openxmlformats.org/drawingml/2006/main" noGrp="1"/>
+          </p:cNvSpPr>
+          <p:nvPr/>
+        </p:nvSpPr>
+        <p:spPr>
+          <a:xfrm xmlns:a="http://schemas.openxmlformats.org/drawingml/2006/main">
+            <a:off x="6191250" y="4591050"/>
+            <a:ext cx="5286375" cy="514350"/>
+          </a:xfrm>
+          <a:prstGeom xmlns:a="http://schemas.openxmlformats.org/drawingml/2006/main" prst="rect">
+            <a:avLst/>
+          </a:prstGeom>
+          <a:noFill xmlns:a="http://schemas.openxmlformats.org/drawingml/2006/main"/>
+          <a:ln xmlns:a="http://schemas.openxmlformats.org/drawingml/2006/main" w="0">
+            <a:noFill/>
+            <a:prstDash val="solid"/>
+          </a:ln>
+        </p:spPr>
+        <p:txBody>
+          <a:bodyPr xmlns:a="http://schemas.openxmlformats.org/drawingml/2006/main" lIns="0" tIns="0" rIns="0" bIns="0" anchor="t">
+            <a:normAutofit fontScale="100000"/>
+          </a:bodyPr>
+          <a:lstStyle xmlns:a="http://schemas.openxmlformats.org/drawingml/2006/main"/>
+          <a:p xmlns:a="http://schemas.openxmlformats.org/drawingml/2006/main">
+            <a:pPr algn="l">
+              <a:defRPr sz="1350" b="1" i="0">
+                <a:solidFill>
+                  <a:srgbClr val="D55E00"/>
+                </a:solidFill>
+                <a:latin typeface="Arial"/>
+                <a:ea typeface="Arial"/>
+                <a:cs typeface="Arial"/>
+              </a:defRPr>
+            </a:pPr>
+            <a:r>
+              <a:rPr sz="1350" b="1" i="0">
+                <a:solidFill>
+                  <a:srgbClr val="D55E00"/>
+                </a:solidFill>
+                <a:latin typeface="Arial"/>
+                <a:ea typeface="Arial"/>
+                <a:cs typeface="Arial"/>
+              </a:rPr>
+              <a:t>Warning (7): worst local condition number 84,006; maximum factor norm 184.9.</a:t>
+            </a:r>
+          </a:p>
+        </p:txBody>
+      </p:sp>
+      <p:sp>
+        <p:nvSpPr>
+          <p:cNvPr id="17" name="evidence-interpretation">
+            <a:extLst xmlns:a="http://schemas.openxmlformats.org/drawingml/2006/main">
+              <a:ext uri="{FF2B5EF4-FFF2-40B4-BE49-F238E27FC236}">
+                <a16:creationId xmlns:a16="http://schemas.microsoft.com/office/drawing/2014/main" id="{C79540EF-83B8-4827-95F6-C72F2DF29B86}"/>
+              </a:ext>
+            </a:extLst>
+          </p:cNvPr>
+          <p:cNvSpPr>
+            <a:spLocks xmlns:a="http://schemas.openxmlformats.org/drawingml/2006/main" noGrp="1"/>
+          </p:cNvSpPr>
+          <p:nvPr/>
+        </p:nvSpPr>
+        <p:spPr>
+          <a:xfrm xmlns:a="http://schemas.openxmlformats.org/drawingml/2006/main">
+            <a:off x="1143000" y="5162550"/>
+            <a:ext cx="9906000" cy="400050"/>
+          </a:xfrm>
+          <a:prstGeom xmlns:a="http://schemas.openxmlformats.org/drawingml/2006/main" prst="rect">
+            <a:avLst/>
+          </a:prstGeom>
+          <a:noFill xmlns:a="http://schemas.openxmlformats.org/drawingml/2006/main"/>
+          <a:ln xmlns:a="http://schemas.openxmlformats.org/drawingml/2006/main" w="0">
+            <a:noFill/>
+            <a:prstDash val="solid"/>
+          </a:ln>
+        </p:spPr>
+        <p:txBody>
+          <a:bodyPr xmlns:a="http://schemas.openxmlformats.org/drawingml/2006/main" lIns="0" tIns="0" rIns="0" bIns="0" anchor="t">
+            <a:normAutofit fontScale="100000"/>
+          </a:bodyPr>
+          <a:lstStyle xmlns:a="http://schemas.openxmlformats.org/drawingml/2006/main"/>
+          <a:p xmlns:a="http://schemas.openxmlformats.org/drawingml/2006/main">
             <a:pPr algn="ctr">
-              <a:defRPr sz="2100" b="1" i="0">
+              <a:defRPr sz="1275" b="0" i="0">
+                <a:solidFill>
+                  <a:srgbClr val="59616D"/>
+                </a:solidFill>
+                <a:latin typeface="Arial"/>
+                <a:ea typeface="Arial"/>
+                <a:cs typeface="Arial"/>
+              </a:defRPr>
+            </a:pPr>
+            <a:r>
+              <a:rPr sz="1275" b="0" i="0">
+                <a:solidFill>
+                  <a:srgbClr val="59616D"/>
+                </a:solidFill>
+                <a:latin typeface="Arial"/>
+                <a:ea typeface="Arial"/>
+                <a:cs typeface="Arial"/>
+              </a:rPr>
+              <a:t>42 versus 84,006 compares two groups of replications. It is not a before/after path, and the condition number itself is not the warning rule.</a:t>
+            </a:r>
+          </a:p>
+        </p:txBody>
+      </p:sp>
+      <p:sp>
+        <p:nvSpPr>
+          <p:cNvPr id="18" name="mechanism-takeaway-band">
+            <a:extLst xmlns:a="http://schemas.openxmlformats.org/drawingml/2006/main">
+              <a:ext uri="{FF2B5EF4-FFF2-40B4-BE49-F238E27FC236}">
+                <a16:creationId xmlns:a16="http://schemas.microsoft.com/office/drawing/2014/main" id="{E166A4FB-2389-43C3-8AA8-D314A3C5CCEA}"/>
+              </a:ext>
+            </a:extLst>
+          </p:cNvPr>
+          <p:cNvSpPr>
+            <a:spLocks xmlns:a="http://schemas.openxmlformats.org/drawingml/2006/main" noGrp="1"/>
+          </p:cNvSpPr>
+          <p:nvPr/>
+        </p:nvSpPr>
+        <p:spPr>
+          <a:xfrm xmlns:a="http://schemas.openxmlformats.org/drawingml/2006/main">
+            <a:off x="523875" y="5676900"/>
+            <a:ext cx="10953750" cy="590550"/>
+          </a:xfrm>
+          <a:prstGeom xmlns:a="http://schemas.openxmlformats.org/drawingml/2006/main" prst="rect">
+            <a:avLst/>
+          </a:prstGeom>
+          <a:solidFill xmlns:a="http://schemas.openxmlformats.org/drawingml/2006/main">
+            <a:srgbClr val="F2F2F2"/>
+          </a:solidFill>
+          <a:ln xmlns:a="http://schemas.openxmlformats.org/drawingml/2006/main" w="0">
+            <a:noFill/>
+            <a:prstDash val="solid"/>
+          </a:ln>
+        </p:spPr>
+      </p:sp>
+      <p:sp>
+        <p:nvSpPr>
+          <p:cNvPr id="19" name="mechanism-takeaway">
+            <a:extLst xmlns:a="http://schemas.openxmlformats.org/drawingml/2006/main">
+              <a:ext uri="{FF2B5EF4-FFF2-40B4-BE49-F238E27FC236}">
+                <a16:creationId xmlns:a16="http://schemas.microsoft.com/office/drawing/2014/main" id="{B0976AC9-983A-4DE6-9089-CB1F4A2ECFFE}"/>
+              </a:ext>
+            </a:extLst>
+          </p:cNvPr>
+          <p:cNvSpPr>
+            <a:spLocks xmlns:a="http://schemas.openxmlformats.org/drawingml/2006/main" noGrp="1"/>
+          </p:cNvSpPr>
+          <p:nvPr/>
+        </p:nvSpPr>
+        <p:spPr>
+          <a:xfrm xmlns:a="http://schemas.openxmlformats.org/drawingml/2006/main">
+            <a:off x="762000" y="5829300"/>
+            <a:ext cx="10477500" cy="342900"/>
+          </a:xfrm>
+          <a:prstGeom xmlns:a="http://schemas.openxmlformats.org/drawingml/2006/main" prst="rect">
+            <a:avLst/>
+          </a:prstGeom>
+          <a:noFill xmlns:a="http://schemas.openxmlformats.org/drawingml/2006/main"/>
+          <a:ln xmlns:a="http://schemas.openxmlformats.org/drawingml/2006/main" w="0">
+            <a:noFill/>
+            <a:prstDash val="solid"/>
+          </a:ln>
+        </p:spPr>
+        <p:txBody>
+          <a:bodyPr xmlns:a="http://schemas.openxmlformats.org/drawingml/2006/main" lIns="0" tIns="0" rIns="0" bIns="0" anchor="t">
+            <a:normAutofit fontScale="75977"/>
+          </a:bodyPr>
+          <a:lstStyle xmlns:a="http://schemas.openxmlformats.org/drawingml/2006/main"/>
+          <a:p xmlns:a="http://schemas.openxmlformats.org/drawingml/2006/main">
+            <a:pPr algn="ctr">
+              <a:defRPr sz="1500" b="1" i="0">
                 <a:solidFill>
                   <a:srgbClr val="000000"/>
                 </a:solidFill>
@@ -5839,7 +6096,7 @@
               </a:defRPr>
             </a:pPr>
             <a:r>
-              <a:rPr sz="2100" b="1" i="0">
+              <a:rPr sz="1500" b="1" i="0">
                 <a:solidFill>
                   <a:srgbClr val="000000"/>
                 </a:solidFill>
@@ -5847,65 +6104,7 @@
                 <a:ea typeface="Arial"/>
                 <a:cs typeface="Arial"/>
               </a:rPr>
-              <a:t>Weak or nearly collinear local factor regressions let the unregularized completion explode in a few samples.</a:t>
-            </a:r>
-          </a:p>
-        </p:txBody>
-      </p:sp>
-      <p:sp>
-        <p:nvSpPr>
-          <p:cNvPr id="19" name="diag-note">
-            <a:extLst xmlns:a="http://schemas.openxmlformats.org/drawingml/2006/main">
-              <a:ext uri="{FF2B5EF4-FFF2-40B4-BE49-F238E27FC236}">
-                <a16:creationId xmlns:a16="http://schemas.microsoft.com/office/drawing/2014/main" id="{05D02C1F-2628-4B4A-8958-71FE35119EAE}"/>
-              </a:ext>
-            </a:extLst>
-          </p:cNvPr>
-          <p:cNvSpPr>
-            <a:spLocks xmlns:a="http://schemas.openxmlformats.org/drawingml/2006/main" noGrp="1"/>
-          </p:cNvSpPr>
-          <p:nvPr/>
-        </p:nvSpPr>
-        <p:spPr>
-          <a:xfrm xmlns:a="http://schemas.openxmlformats.org/drawingml/2006/main">
-            <a:off x="1381125" y="5905500"/>
-            <a:ext cx="9429750" cy="266700"/>
-          </a:xfrm>
-          <a:prstGeom xmlns:a="http://schemas.openxmlformats.org/drawingml/2006/main" prst="rect">
-            <a:avLst/>
-          </a:prstGeom>
-          <a:noFill xmlns:a="http://schemas.openxmlformats.org/drawingml/2006/main"/>
-          <a:ln xmlns:a="http://schemas.openxmlformats.org/drawingml/2006/main" w="0">
-            <a:noFill/>
-            <a:prstDash val="solid"/>
-          </a:ln>
-        </p:spPr>
-        <p:txBody>
-          <a:bodyPr xmlns:a="http://schemas.openxmlformats.org/drawingml/2006/main" lIns="0" tIns="0" rIns="0" bIns="0" anchor="t">
-            <a:noAutofit/>
-          </a:bodyPr>
-          <a:lstStyle xmlns:a="http://schemas.openxmlformats.org/drawingml/2006/main"/>
-          <a:p xmlns:a="http://schemas.openxmlformats.org/drawingml/2006/main">
-            <a:pPr algn="ctr">
-              <a:defRPr sz="1350" b="0" i="0">
-                <a:solidFill>
-                  <a:srgbClr val="59616D"/>
-                </a:solidFill>
-                <a:latin typeface="Arial"/>
-                <a:ea typeface="Arial"/>
-                <a:cs typeface="Arial"/>
-              </a:defRPr>
-            </a:pPr>
-            <a:r>
-              <a:rPr sz="1350" b="0" i="0">
-                <a:solidFill>
-                  <a:srgbClr val="59616D"/>
-                </a:solidFill>
-                <a:latin typeface="Arial"/>
-                <a:ea typeface="Arial"/>
-                <a:cs typeface="Arial"/>
-              </a:rPr>
-              <a:t>BLM types show the same direction: median condition number 157 (pass) versus 6,340 (warning).</a:t>
+              <a:t>Takeaway: cross-start disagreement is the warning; poor conditioning is the mechanism that can produce that disagreement and the extreme RMSE tail.</a:t>
             </a:r>
           </a:p>
         </p:txBody>
@@ -5915,7 +6114,7 @@
           <p:cNvPr id="20" name="slide-6-footer-label">
             <a:extLst xmlns:a="http://schemas.openxmlformats.org/drawingml/2006/main">
               <a:ext uri="{FF2B5EF4-FFF2-40B4-BE49-F238E27FC236}">
-                <a16:creationId xmlns:a16="http://schemas.microsoft.com/office/drawing/2014/main" id="{393E1A65-1E92-4767-90DB-714BFC5B4848}"/>
+                <a16:creationId xmlns:a16="http://schemas.microsoft.com/office/drawing/2014/main" id="{1029683D-180B-4889-BC71-CB11D923EA05}"/>
               </a:ext>
             </a:extLst>
           </p:cNvPr>
@@ -5973,7 +6172,7 @@
           <p:cNvPr id="21" name="slide-6-footer-number">
             <a:extLst xmlns:a="http://schemas.openxmlformats.org/drawingml/2006/main">
               <a:ext uri="{FF2B5EF4-FFF2-40B4-BE49-F238E27FC236}">
-                <a16:creationId xmlns:a16="http://schemas.microsoft.com/office/drawing/2014/main" id="{1508DB5F-3728-42AE-ABD1-F9393499A69D}"/>
+                <a16:creationId xmlns:a16="http://schemas.microsoft.com/office/drawing/2014/main" id="{0EA3258A-89AE-4C20-A800-FE31A8DD18BE}"/>
               </a:ext>
             </a:extLst>
           </p:cNvPr>
@@ -6029,7 +6228,7 @@
     </p:spTree>
     <p:extLst>
       <p:ext uri="{BB962C8B-B14F-4D97-AF65-F5344CB8AC3E}">
-        <p14:creationId xmlns:p14="http://schemas.microsoft.com/office/powerpoint/2010/main" val="659909658"/>
+        <p14:creationId xmlns:p14="http://schemas.microsoft.com/office/powerpoint/2010/main" val="1193873155"/>
       </p:ext>
     </p:extLst>
   </p:cSld>
@@ -6060,7 +6259,7 @@
           <p:cNvPr id="15" name="slide-7-title">
             <a:extLst xmlns:a="http://schemas.openxmlformats.org/drawingml/2006/main">
               <a:ext uri="{FF2B5EF4-FFF2-40B4-BE49-F238E27FC236}">
-                <a16:creationId xmlns:a16="http://schemas.microsoft.com/office/drawing/2014/main" id="{B12F309F-D46B-4072-A01B-EF60D051EB5C}"/>
+                <a16:creationId xmlns:a16="http://schemas.microsoft.com/office/drawing/2014/main" id="{8F597DE6-E081-4056-B80C-235AB9379BD0}"/>
               </a:ext>
             </a:extLst>
           </p:cNvPr>
@@ -6090,7 +6289,7 @@
           <a:lstStyle xmlns:a="http://schemas.openxmlformats.org/drawingml/2006/main"/>
           <a:p xmlns:a="http://schemas.openxmlformats.org/drawingml/2006/main">
             <a:pPr algn="l">
-              <a:defRPr sz="3000" b="1" i="0">
+              <a:defRPr sz="2700" b="1" i="0">
                 <a:solidFill>
                   <a:srgbClr val="000000"/>
                 </a:solidFill>
@@ -6100,7 +6299,7 @@
               </a:defRPr>
             </a:pPr>
             <a:r>
-              <a:rPr sz="3000" b="1" i="0">
+              <a:rPr sz="2700" b="1" i="0">
                 <a:solidFill>
                   <a:srgbClr val="000000"/>
                 </a:solidFill>
@@ -6108,7 +6307,7 @@
                 <a:ea typeface="Arial"/>
                 <a:cs typeface="Arial"/>
               </a:rPr>
-              <a:t>Native procedures answer different questions</a:t>
+              <a:t>Why this target-gap figure uses KSS and BS20</a:t>
             </a:r>
           </a:p>
         </p:txBody>
@@ -6118,7 +6317,7 @@
           <p:cNvPr id="2" name="slide-7-title-rule">
             <a:extLst xmlns:a="http://schemas.openxmlformats.org/drawingml/2006/main">
               <a:ext uri="{FF2B5EF4-FFF2-40B4-BE49-F238E27FC236}">
-                <a16:creationId xmlns:a16="http://schemas.microsoft.com/office/drawing/2014/main" id="{2335DFB3-7478-4B7F-BC05-3501547C3323}"/>
+                <a16:creationId xmlns:a16="http://schemas.microsoft.com/office/drawing/2014/main" id="{D04EEC92-85C3-4C29-99B5-5C03D59316B3}"/>
               </a:ext>
             </a:extLst>
           </p:cNvPr>
@@ -6153,13 +6352,13 @@
           <p:nvPr/>
         </p:nvPicPr>
         <p:blipFill>
-          <a:blip xmlns:r="http://schemas.openxmlformats.org/officeDocument/2006/relationships" xmlns:a="http://schemas.openxmlformats.org/drawingml/2006/main" r:embed="Ra9e47b199e5c4908"/>
+          <a:blip xmlns:r="http://schemas.openxmlformats.org/officeDocument/2006/relationships" xmlns:a="http://schemas.openxmlformats.org/drawingml/2006/main" r:embed="R8ac8bd3527ec40fc"/>
           <a:stretch xmlns:a="http://schemas.openxmlformats.org/drawingml/2006/main"/>
         </p:blipFill>
         <p:spPr>
           <a:xfrm xmlns:a="http://schemas.openxmlformats.org/drawingml/2006/main">
-            <a:off x="285750" y="1663526"/>
-            <a:ext cx="8191500" cy="3978622"/>
+            <a:off x="171450" y="1638352"/>
+            <a:ext cx="8001000" cy="3886096"/>
           </a:xfrm>
           <a:prstGeom xmlns:a="http://schemas.openxmlformats.org/drawingml/2006/main" prst="rect">
             <a:avLst/>
@@ -6168,22 +6367,22 @@
       </p:pic>
       <p:sp>
         <p:nvSpPr>
-          <p:cNvPr id="4" name="native-kss">
-            <a:extLst xmlns:a="http://schemas.openxmlformats.org/drawingml/2006/main">
-              <a:ext uri="{FF2B5EF4-FFF2-40B4-BE49-F238E27FC236}">
-                <a16:creationId xmlns:a16="http://schemas.microsoft.com/office/drawing/2014/main" id="{FF624E9F-7C0A-4FF6-8BF7-0F1ECB08E087}"/>
-              </a:ext>
-            </a:extLst>
-          </p:cNvPr>
-          <p:cNvSpPr>
-            <a:spLocks xmlns:a="http://schemas.openxmlformats.org/drawingml/2006/main" noGrp="1"/>
-          </p:cNvSpPr>
-          <p:nvPr/>
-        </p:nvSpPr>
-        <p:spPr>
-          <a:xfrm xmlns:a="http://schemas.openxmlformats.org/drawingml/2006/main">
-            <a:off x="8810625" y="1352550"/>
-            <a:ext cx="2714625" cy="285750"/>
+          <p:cNvPr id="4" name="gap-why-head">
+            <a:extLst xmlns:a="http://schemas.openxmlformats.org/drawingml/2006/main">
+              <a:ext uri="{FF2B5EF4-FFF2-40B4-BE49-F238E27FC236}">
+                <a16:creationId xmlns:a16="http://schemas.microsoft.com/office/drawing/2014/main" id="{EF8A7DD1-BA38-4C74-B381-E65B163314D1}"/>
+              </a:ext>
+            </a:extLst>
+          </p:cNvPr>
+          <p:cNvSpPr>
+            <a:spLocks xmlns:a="http://schemas.openxmlformats.org/drawingml/2006/main" noGrp="1"/>
+          </p:cNvSpPr>
+          <p:nvPr/>
+        </p:nvSpPr>
+        <p:spPr>
+          <a:xfrm xmlns:a="http://schemas.openxmlformats.org/drawingml/2006/main">
+            <a:off x="8477250" y="1200150"/>
+            <a:ext cx="3143250" cy="285750"/>
           </a:xfrm>
           <a:prstGeom xmlns:a="http://schemas.openxmlformats.org/drawingml/2006/main" prst="rect">
             <a:avLst/>
@@ -6201,7 +6400,7 @@
           <a:lstStyle xmlns:a="http://schemas.openxmlformats.org/drawingml/2006/main"/>
           <a:p xmlns:a="http://schemas.openxmlformats.org/drawingml/2006/main">
             <a:pPr algn="l">
-              <a:defRPr sz="1800" b="1" i="0">
+              <a:defRPr sz="1650" b="1" i="0">
                 <a:solidFill>
                   <a:srgbClr val="000000"/>
                 </a:solidFill>
@@ -6211,7 +6410,7 @@
               </a:defRPr>
             </a:pPr>
             <a:r>
-              <a:rPr sz="1800" b="1" i="0">
+              <a:rPr sz="1650" b="1" i="0">
                 <a:solidFill>
                   <a:srgbClr val="000000"/>
                 </a:solidFill>
@@ -6219,29 +6418,29 @@
                 <a:ea typeface="Arial"/>
                 <a:cs typeface="Arial"/>
               </a:rPr>
-              <a:t>KSS native</a:t>
-            </a:r>
-          </a:p>
-        </p:txBody>
-      </p:sp>
-      <p:sp>
-        <p:nvSpPr>
-          <p:cNvPr id="5" name="native-kss-objects">
-            <a:extLst xmlns:a="http://schemas.openxmlformats.org/drawingml/2006/main">
-              <a:ext uri="{FF2B5EF4-FFF2-40B4-BE49-F238E27FC236}">
-                <a16:creationId xmlns:a16="http://schemas.microsoft.com/office/drawing/2014/main" id="{D67DAD34-1C68-48AA-B6F1-2901EE5D7BB0}"/>
-              </a:ext>
-            </a:extLst>
-          </p:cNvPr>
-          <p:cNvSpPr>
-            <a:spLocks xmlns:a="http://schemas.openxmlformats.org/drawingml/2006/main" noGrp="1"/>
-          </p:cNvSpPr>
-          <p:nvPr/>
-        </p:nvSpPr>
-        <p:spPr>
-          <a:xfrm xmlns:a="http://schemas.openxmlformats.org/drawingml/2006/main">
-            <a:off x="8810625" y="1752600"/>
-            <a:ext cx="2714625" cy="381000"/>
+              <a:t>Why these procedures?</a:t>
+            </a:r>
+          </a:p>
+        </p:txBody>
+      </p:sp>
+      <p:sp>
+        <p:nvSpPr>
+          <p:cNvPr id="5" name="gap-why-body">
+            <a:extLst xmlns:a="http://schemas.openxmlformats.org/drawingml/2006/main">
+              <a:ext uri="{FF2B5EF4-FFF2-40B4-BE49-F238E27FC236}">
+                <a16:creationId xmlns:a16="http://schemas.microsoft.com/office/drawing/2014/main" id="{DD6ECE59-DF35-4ED4-A9C1-8F6F20B4C13E}"/>
+              </a:ext>
+            </a:extLst>
+          </p:cNvPr>
+          <p:cNvSpPr>
+            <a:spLocks xmlns:a="http://schemas.openxmlformats.org/drawingml/2006/main" noGrp="1"/>
+          </p:cNvSpPr>
+          <p:nvPr/>
+        </p:nvSpPr>
+        <p:spPr>
+          <a:xfrm xmlns:a="http://schemas.openxmlformats.org/drawingml/2006/main">
+            <a:off x="8477250" y="1571625"/>
+            <a:ext cx="3143250" cy="800100"/>
           </a:xfrm>
           <a:prstGeom xmlns:a="http://schemas.openxmlformats.org/drawingml/2006/main" prst="rect">
             <a:avLst/>
@@ -6259,47 +6458,47 @@
           <a:lstStyle xmlns:a="http://schemas.openxmlformats.org/drawingml/2006/main"/>
           <a:p xmlns:a="http://schemas.openxmlformats.org/drawingml/2006/main">
             <a:pPr algn="l">
-              <a:defRPr sz="1800" b="0" i="0">
-                <a:solidFill>
-                  <a:srgbClr val="3D8DFF"/>
-                </a:solidFill>
-                <a:latin typeface="Arial"/>
-                <a:ea typeface="Arial"/>
-                <a:cs typeface="Arial"/>
-              </a:defRPr>
-            </a:pPr>
-            <a:r>
-              <a:rPr sz="1800" b="0" i="0">
-                <a:solidFill>
-                  <a:srgbClr val="3D8DFF"/>
-                </a:solidFill>
-                <a:latin typeface="Arial"/>
-                <a:ea typeface="Arial"/>
-                <a:cs typeface="Arial"/>
-              </a:rPr>
-              <a:t>V_ψ^AKM   ·   C_ψα^AKM</a:t>
-            </a:r>
-          </a:p>
-        </p:txBody>
-      </p:sp>
-      <p:sp>
-        <p:nvSpPr>
-          <p:cNvPr id="6" name="native-rule-1">
-            <a:extLst xmlns:a="http://schemas.openxmlformats.org/drawingml/2006/main">
-              <a:ext uri="{FF2B5EF4-FFF2-40B4-BE49-F238E27FC236}">
-                <a16:creationId xmlns:a16="http://schemas.microsoft.com/office/drawing/2014/main" id="{FC232B1A-6B32-4252-8D9C-23A20003EFE8}"/>
-              </a:ext>
-            </a:extLst>
-          </p:cNvPr>
-          <p:cNvSpPr>
-            <a:spLocks xmlns:a="http://schemas.openxmlformats.org/drawingml/2006/main" noGrp="1"/>
-          </p:cNvSpPr>
-          <p:nvPr/>
-        </p:nvSpPr>
-        <p:spPr>
-          <a:xfrm xmlns:a="http://schemas.openxmlformats.org/drawingml/2006/main">
-            <a:off x="8810625" y="2324100"/>
-            <a:ext cx="2714625" cy="9525"/>
+              <a:defRPr sz="1275" b="0" i="0">
+                <a:solidFill>
+                  <a:srgbClr val="59616D"/>
+                </a:solidFill>
+                <a:latin typeface="Arial"/>
+                <a:ea typeface="Arial"/>
+                <a:cs typeface="Arial"/>
+              </a:defRPr>
+            </a:pPr>
+            <a:r>
+              <a:rPr sz="1275" b="0" i="0">
+                <a:solidFill>
+                  <a:srgbClr val="59616D"/>
+                </a:solidFill>
+                <a:latin typeface="Arial"/>
+                <a:ea typeface="Arial"/>
+                <a:cs typeface="Arial"/>
+              </a:rPr>
+              <a:t>KSS and BS20 return native objects whose names resemble project objects, creating a real risk of silently treating unlike estimands as the same.</a:t>
+            </a:r>
+          </a:p>
+        </p:txBody>
+      </p:sp>
+      <p:sp>
+        <p:nvSpPr>
+          <p:cNvPr id="6" name="gap-rule-1">
+            <a:extLst xmlns:a="http://schemas.openxmlformats.org/drawingml/2006/main">
+              <a:ext uri="{FF2B5EF4-FFF2-40B4-BE49-F238E27FC236}">
+                <a16:creationId xmlns:a16="http://schemas.microsoft.com/office/drawing/2014/main" id="{93A27F04-4AD3-4209-9CDA-989AE5DE9C0D}"/>
+              </a:ext>
+            </a:extLst>
+          </p:cNvPr>
+          <p:cNvSpPr>
+            <a:spLocks xmlns:a="http://schemas.openxmlformats.org/drawingml/2006/main" noGrp="1"/>
+          </p:cNvSpPr>
+          <p:nvPr/>
+        </p:nvSpPr>
+        <p:spPr>
+          <a:xfrm xmlns:a="http://schemas.openxmlformats.org/drawingml/2006/main">
+            <a:off x="8477250" y="2476500"/>
+            <a:ext cx="3143250" cy="9525"/>
           </a:xfrm>
           <a:prstGeom xmlns:a="http://schemas.openxmlformats.org/drawingml/2006/main" prst="rect">
             <a:avLst/>
@@ -6315,22 +6514,22 @@
       </p:sp>
       <p:sp>
         <p:nvSpPr>
-          <p:cNvPr id="7" name="native-bs">
-            <a:extLst xmlns:a="http://schemas.openxmlformats.org/drawingml/2006/main">
-              <a:ext uri="{FF2B5EF4-FFF2-40B4-BE49-F238E27FC236}">
-                <a16:creationId xmlns:a16="http://schemas.microsoft.com/office/drawing/2014/main" id="{EE9D8BE4-DF3D-45E3-877A-B2A162AE4F84}"/>
-              </a:ext>
-            </a:extLst>
-          </p:cNvPr>
-          <p:cNvSpPr>
-            <a:spLocks xmlns:a="http://schemas.openxmlformats.org/drawingml/2006/main" noGrp="1"/>
-          </p:cNvSpPr>
-          <p:nvPr/>
-        </p:nvSpPr>
-        <p:spPr>
-          <a:xfrm xmlns:a="http://schemas.openxmlformats.org/drawingml/2006/main">
-            <a:off x="8810625" y="2533650"/>
-            <a:ext cx="2714625" cy="285750"/>
+          <p:cNvPr id="7" name="gap-three-head">
+            <a:extLst xmlns:a="http://schemas.openxmlformats.org/drawingml/2006/main">
+              <a:ext uri="{FF2B5EF4-FFF2-40B4-BE49-F238E27FC236}">
+                <a16:creationId xmlns:a16="http://schemas.microsoft.com/office/drawing/2014/main" id="{14802E61-E478-4868-9A4C-A4ADB1BDDEA5}"/>
+              </a:ext>
+            </a:extLst>
+          </p:cNvPr>
+          <p:cNvSpPr>
+            <a:spLocks xmlns:a="http://schemas.openxmlformats.org/drawingml/2006/main" noGrp="1"/>
+          </p:cNvSpPr>
+          <p:nvPr/>
+        </p:nvSpPr>
+        <p:spPr>
+          <a:xfrm xmlns:a="http://schemas.openxmlformats.org/drawingml/2006/main">
+            <a:off x="8477250" y="2647950"/>
+            <a:ext cx="3143250" cy="285750"/>
           </a:xfrm>
           <a:prstGeom xmlns:a="http://schemas.openxmlformats.org/drawingml/2006/main" prst="rect">
             <a:avLst/>
@@ -6348,7 +6547,7 @@
           <a:lstStyle xmlns:a="http://schemas.openxmlformats.org/drawingml/2006/main"/>
           <a:p xmlns:a="http://schemas.openxmlformats.org/drawingml/2006/main">
             <a:pPr algn="l">
-              <a:defRPr sz="1800" b="1" i="0">
+              <a:defRPr sz="1650" b="1" i="0">
                 <a:solidFill>
                   <a:srgbClr val="000000"/>
                 </a:solidFill>
@@ -6358,7 +6557,7 @@
               </a:defRPr>
             </a:pPr>
             <a:r>
-              <a:rPr sz="1800" b="1" i="0">
+              <a:rPr sz="1650" b="1" i="0">
                 <a:solidFill>
                   <a:srgbClr val="000000"/>
                 </a:solidFill>
@@ -6366,87 +6565,87 @@
                 <a:ea typeface="Arial"/>
                 <a:cs typeface="Arial"/>
               </a:rPr>
-              <a:t>BS20 native</a:t>
-            </a:r>
-          </a:p>
-        </p:txBody>
-      </p:sp>
-      <p:sp>
-        <p:nvSpPr>
-          <p:cNvPr id="8" name="native-bs-objects">
-            <a:extLst xmlns:a="http://schemas.openxmlformats.org/drawingml/2006/main">
-              <a:ext uri="{FF2B5EF4-FFF2-40B4-BE49-F238E27FC236}">
-                <a16:creationId xmlns:a16="http://schemas.microsoft.com/office/drawing/2014/main" id="{27927AD0-7AC7-4BBB-B6E2-AB2B3165ABDF}"/>
-              </a:ext>
-            </a:extLst>
-          </p:cNvPr>
-          <p:cNvSpPr>
-            <a:spLocks xmlns:a="http://schemas.openxmlformats.org/drawingml/2006/main" noGrp="1"/>
-          </p:cNvSpPr>
-          <p:nvPr/>
-        </p:nvSpPr>
-        <p:spPr>
-          <a:xfrm xmlns:a="http://schemas.openxmlformats.org/drawingml/2006/main">
-            <a:off x="8810625" y="2933700"/>
-            <a:ext cx="2714625" cy="381000"/>
-          </a:xfrm>
-          <a:prstGeom xmlns:a="http://schemas.openxmlformats.org/drawingml/2006/main" prst="rect">
-            <a:avLst/>
-          </a:prstGeom>
-          <a:noFill xmlns:a="http://schemas.openxmlformats.org/drawingml/2006/main"/>
-          <a:ln xmlns:a="http://schemas.openxmlformats.org/drawingml/2006/main" w="0">
-            <a:noFill/>
-            <a:prstDash val="solid"/>
-          </a:ln>
-        </p:spPr>
-        <p:txBody>
-          <a:bodyPr xmlns:a="http://schemas.openxmlformats.org/drawingml/2006/main" lIns="0" tIns="0" rIns="0" bIns="0" anchor="t">
-            <a:noAutofit/>
+              <a:t>Why only three gaps?</a:t>
+            </a:r>
+          </a:p>
+        </p:txBody>
+      </p:sp>
+      <p:sp>
+        <p:nvSpPr>
+          <p:cNvPr id="8" name="gap-three-body">
+            <a:extLst xmlns:a="http://schemas.openxmlformats.org/drawingml/2006/main">
+              <a:ext uri="{FF2B5EF4-FFF2-40B4-BE49-F238E27FC236}">
+                <a16:creationId xmlns:a16="http://schemas.microsoft.com/office/drawing/2014/main" id="{AE6FBFBA-7444-40DB-807F-468506AFC55A}"/>
+              </a:ext>
+            </a:extLst>
+          </p:cNvPr>
+          <p:cNvSpPr>
+            <a:spLocks xmlns:a="http://schemas.openxmlformats.org/drawingml/2006/main" noGrp="1"/>
+          </p:cNvSpPr>
+          <p:nvPr/>
+        </p:nvSpPr>
+        <p:spPr>
+          <a:xfrm xmlns:a="http://schemas.openxmlformats.org/drawingml/2006/main">
+            <a:off x="8477250" y="3028950"/>
+            <a:ext cx="3143250" cy="990600"/>
+          </a:xfrm>
+          <a:prstGeom xmlns:a="http://schemas.openxmlformats.org/drawingml/2006/main" prst="rect">
+            <a:avLst/>
+          </a:prstGeom>
+          <a:noFill xmlns:a="http://schemas.openxmlformats.org/drawingml/2006/main"/>
+          <a:ln xmlns:a="http://schemas.openxmlformats.org/drawingml/2006/main" w="0">
+            <a:noFill/>
+            <a:prstDash val="solid"/>
+          </a:ln>
+        </p:spPr>
+        <p:txBody>
+          <a:bodyPr xmlns:a="http://schemas.openxmlformats.org/drawingml/2006/main" lIns="0" tIns="0" rIns="0" bIns="0" anchor="t">
+            <a:normAutofit fontScale="100000"/>
           </a:bodyPr>
           <a:lstStyle xmlns:a="http://schemas.openxmlformats.org/drawingml/2006/main"/>
           <a:p xmlns:a="http://schemas.openxmlformats.org/drawingml/2006/main">
             <a:pPr algn="l">
-              <a:defRPr sz="1800" b="0" i="0">
-                <a:solidFill>
-                  <a:srgbClr val="CC79A7"/>
-                </a:solidFill>
-                <a:latin typeface="Arial"/>
-                <a:ea typeface="Arial"/>
-                <a:cs typeface="Arial"/>
-              </a:defRPr>
-            </a:pPr>
-            <a:r>
-              <a:rPr sz="1800" b="0" i="0">
-                <a:solidFill>
-                  <a:srgbClr val="CC79A7"/>
-                </a:solidFill>
-                <a:latin typeface="Arial"/>
-                <a:ea typeface="Arial"/>
-                <a:cs typeface="Arial"/>
-              </a:rPr>
-              <a:t>ρ_BS   ·   C_BS</a:t>
-            </a:r>
-          </a:p>
-        </p:txBody>
-      </p:sp>
-      <p:sp>
-        <p:nvSpPr>
-          <p:cNvPr id="9" name="native-rule-2">
-            <a:extLst xmlns:a="http://schemas.openxmlformats.org/drawingml/2006/main">
-              <a:ext uri="{FF2B5EF4-FFF2-40B4-BE49-F238E27FC236}">
-                <a16:creationId xmlns:a16="http://schemas.microsoft.com/office/drawing/2014/main" id="{D37E591C-6595-4930-B1E4-F7E959683465}"/>
-              </a:ext>
-            </a:extLst>
-          </p:cNvPr>
-          <p:cNvSpPr>
-            <a:spLocks xmlns:a="http://schemas.openxmlformats.org/drawingml/2006/main" noGrp="1"/>
-          </p:cNvSpPr>
-          <p:nvPr/>
-        </p:nvSpPr>
-        <p:spPr>
-          <a:xfrm xmlns:a="http://schemas.openxmlformats.org/drawingml/2006/main">
-            <a:off x="8810625" y="3505200"/>
-            <a:ext cx="2714625" cy="9525"/>
+              <a:defRPr sz="1275" b="0" i="0">
+                <a:solidFill>
+                  <a:srgbClr val="59616D"/>
+                </a:solidFill>
+                <a:latin typeface="Arial"/>
+                <a:ea typeface="Arial"/>
+                <a:cs typeface="Arial"/>
+              </a:defRPr>
+            </a:pPr>
+            <a:r>
+              <a:rPr sz="1275" b="0" i="0">
+                <a:solidFill>
+                  <a:srgbClr val="59616D"/>
+                </a:solidFill>
+                <a:latin typeface="Arial"/>
+                <a:ea typeface="Arial"/>
+                <a:cs typeface="Arial"/>
+              </a:rPr>
+              <a:t>They are the defensible like-units comparisons: firm variance V_psi^AKM - Q_F, additive covariance C_psialpha^AKM - C^w_assign, and BS20 covariance C_BS - C^w_assign.</a:t>
+            </a:r>
+          </a:p>
+        </p:txBody>
+      </p:sp>
+      <p:sp>
+        <p:nvSpPr>
+          <p:cNvPr id="9" name="gap-rule-2">
+            <a:extLst xmlns:a="http://schemas.openxmlformats.org/drawingml/2006/main">
+              <a:ext uri="{FF2B5EF4-FFF2-40B4-BE49-F238E27FC236}">
+                <a16:creationId xmlns:a16="http://schemas.microsoft.com/office/drawing/2014/main" id="{6D3A4B6D-754D-425D-A292-5D2FB9B6DED5}"/>
+              </a:ext>
+            </a:extLst>
+          </p:cNvPr>
+          <p:cNvSpPr>
+            <a:spLocks xmlns:a="http://schemas.openxmlformats.org/drawingml/2006/main" noGrp="1"/>
+          </p:cNvSpPr>
+          <p:nvPr/>
+        </p:nvSpPr>
+        <p:spPr>
+          <a:xfrm xmlns:a="http://schemas.openxmlformats.org/drawingml/2006/main">
+            <a:off x="8477250" y="4114800"/>
+            <a:ext cx="3143250" cy="9525"/>
           </a:xfrm>
           <a:prstGeom xmlns:a="http://schemas.openxmlformats.org/drawingml/2006/main" prst="rect">
             <a:avLst/>
@@ -6462,22 +6661,22 @@
       </p:sp>
       <p:sp>
         <p:nvSpPr>
-          <p:cNvPr id="10" name="native-project">
-            <a:extLst xmlns:a="http://schemas.openxmlformats.org/drawingml/2006/main">
-              <a:ext uri="{FF2B5EF4-FFF2-40B4-BE49-F238E27FC236}">
-                <a16:creationId xmlns:a16="http://schemas.microsoft.com/office/drawing/2014/main" id="{B068FF73-E846-4473-BD69-BF0F5FBF7A7C}"/>
-              </a:ext>
-            </a:extLst>
-          </p:cNvPr>
-          <p:cNvSpPr>
-            <a:spLocks xmlns:a="http://schemas.openxmlformats.org/drawingml/2006/main" noGrp="1"/>
-          </p:cNvSpPr>
-          <p:nvPr/>
-        </p:nvSpPr>
-        <p:spPr>
-          <a:xfrm xmlns:a="http://schemas.openxmlformats.org/drawingml/2006/main">
-            <a:off x="8810625" y="3714750"/>
-            <a:ext cx="2714625" cy="285750"/>
+          <p:cNvPr id="10" name="gap-omit-head">
+            <a:extLst xmlns:a="http://schemas.openxmlformats.org/drawingml/2006/main">
+              <a:ext uri="{FF2B5EF4-FFF2-40B4-BE49-F238E27FC236}">
+                <a16:creationId xmlns:a16="http://schemas.microsoft.com/office/drawing/2014/main" id="{42D938DB-7283-48F7-99EE-ABB8A8426BD2}"/>
+              </a:ext>
+            </a:extLst>
+          </p:cNvPr>
+          <p:cNvSpPr>
+            <a:spLocks xmlns:a="http://schemas.openxmlformats.org/drawingml/2006/main" noGrp="1"/>
+          </p:cNvSpPr>
+          <p:nvPr/>
+        </p:nvSpPr>
+        <p:spPr>
+          <a:xfrm xmlns:a="http://schemas.openxmlformats.org/drawingml/2006/main">
+            <a:off x="8477250" y="4286250"/>
+            <a:ext cx="3143250" cy="285750"/>
           </a:xfrm>
           <a:prstGeom xmlns:a="http://schemas.openxmlformats.org/drawingml/2006/main" prst="rect">
             <a:avLst/>
@@ -6491,145 +6690,6 @@
         <p:txBody>
           <a:bodyPr xmlns:a="http://schemas.openxmlformats.org/drawingml/2006/main" lIns="0" tIns="0" rIns="0" bIns="0" anchor="t">
             <a:noAutofit/>
-          </a:bodyPr>
-          <a:lstStyle xmlns:a="http://schemas.openxmlformats.org/drawingml/2006/main"/>
-          <a:p xmlns:a="http://schemas.openxmlformats.org/drawingml/2006/main">
-            <a:pPr algn="l">
-              <a:defRPr sz="1800" b="1" i="0">
-                <a:solidFill>
-                  <a:srgbClr val="000000"/>
-                </a:solidFill>
-                <a:latin typeface="Arial"/>
-                <a:ea typeface="Arial"/>
-                <a:cs typeface="Arial"/>
-              </a:defRPr>
-            </a:pPr>
-            <a:r>
-              <a:rPr sz="1800" b="1" i="0">
-                <a:solidFill>
-                  <a:srgbClr val="000000"/>
-                </a:solidFill>
-                <a:latin typeface="Arial"/>
-                <a:ea typeface="Arial"/>
-                <a:cs typeface="Arial"/>
-              </a:rPr>
-              <a:t>Project estimands</a:t>
-            </a:r>
-          </a:p>
-        </p:txBody>
-      </p:sp>
-      <p:sp>
-        <p:nvSpPr>
-          <p:cNvPr id="11" name="native-project-objects">
-            <a:extLst xmlns:a="http://schemas.openxmlformats.org/drawingml/2006/main">
-              <a:ext uri="{FF2B5EF4-FFF2-40B4-BE49-F238E27FC236}">
-                <a16:creationId xmlns:a16="http://schemas.microsoft.com/office/drawing/2014/main" id="{D67A199A-B42C-4782-97AC-0A6E6ACDAA49}"/>
-              </a:ext>
-            </a:extLst>
-          </p:cNvPr>
-          <p:cNvSpPr>
-            <a:spLocks xmlns:a="http://schemas.openxmlformats.org/drawingml/2006/main" noGrp="1"/>
-          </p:cNvSpPr>
-          <p:nvPr/>
-        </p:nvSpPr>
-        <p:spPr>
-          <a:xfrm xmlns:a="http://schemas.openxmlformats.org/drawingml/2006/main">
-            <a:off x="8810625" y="4114800"/>
-            <a:ext cx="2714625" cy="685800"/>
-          </a:xfrm>
-          <a:prstGeom xmlns:a="http://schemas.openxmlformats.org/drawingml/2006/main" prst="rect">
-            <a:avLst/>
-          </a:prstGeom>
-          <a:noFill xmlns:a="http://schemas.openxmlformats.org/drawingml/2006/main"/>
-          <a:ln xmlns:a="http://schemas.openxmlformats.org/drawingml/2006/main" w="0">
-            <a:noFill/>
-            <a:prstDash val="solid"/>
-          </a:ln>
-        </p:spPr>
-        <p:txBody>
-          <a:bodyPr xmlns:a="http://schemas.openxmlformats.org/drawingml/2006/main" lIns="0" tIns="0" rIns="0" bIns="0" anchor="t">
-            <a:noAutofit/>
-          </a:bodyPr>
-          <a:lstStyle xmlns:a="http://schemas.openxmlformats.org/drawingml/2006/main"/>
-          <a:p xmlns:a="http://schemas.openxmlformats.org/drawingml/2006/main">
-            <a:pPr algn="l">
-              <a:defRPr sz="1800" b="0" i="0">
-                <a:solidFill>
-                  <a:srgbClr val="000000"/>
-                </a:solidFill>
-                <a:latin typeface="Arial"/>
-                <a:ea typeface="Arial"/>
-                <a:cs typeface="Arial"/>
-              </a:defRPr>
-            </a:pPr>
-            <a:r>
-              <a:rPr sz="1800" b="0" i="0">
-                <a:solidFill>
-                  <a:srgbClr val="000000"/>
-                </a:solidFill>
-                <a:latin typeface="Arial"/>
-                <a:ea typeface="Arial"/>
-                <a:cs typeface="Arial"/>
-              </a:rPr>
-              <a:t>Q_F   ·   H_F</a:t>
-            </a:r>
-          </a:p>
-          <a:p xmlns:a="http://schemas.openxmlformats.org/drawingml/2006/main">
-            <a:pPr algn="l">
-              <a:defRPr sz="1800" b="0" i="0">
-                <a:solidFill>
-                  <a:srgbClr val="000000"/>
-                </a:solidFill>
-                <a:latin typeface="Arial"/>
-                <a:ea typeface="Arial"/>
-                <a:cs typeface="Arial"/>
-              </a:defRPr>
-            </a:pPr>
-            <a:r>
-              <a:rPr sz="1800" b="0" i="0">
-                <a:solidFill>
-                  <a:srgbClr val="000000"/>
-                </a:solidFill>
-                <a:latin typeface="Arial"/>
-                <a:ea typeface="Arial"/>
-                <a:cs typeface="Arial"/>
-              </a:rPr>
-              <a:t>ρ_H   ·   C^w_assign</a:t>
-            </a:r>
-          </a:p>
-        </p:txBody>
-      </p:sp>
-      <p:sp>
-        <p:nvSpPr>
-          <p:cNvPr id="12" name="native-takeaway">
-            <a:extLst xmlns:a="http://schemas.openxmlformats.org/drawingml/2006/main">
-              <a:ext uri="{FF2B5EF4-FFF2-40B4-BE49-F238E27FC236}">
-                <a16:creationId xmlns:a16="http://schemas.microsoft.com/office/drawing/2014/main" id="{804A38D9-A930-49FD-9D5C-F363C97FE0D4}"/>
-              </a:ext>
-            </a:extLst>
-          </p:cNvPr>
-          <p:cNvSpPr>
-            <a:spLocks xmlns:a="http://schemas.openxmlformats.org/drawingml/2006/main" noGrp="1"/>
-          </p:cNvSpPr>
-          <p:nvPr/>
-        </p:nvSpPr>
-        <p:spPr>
-          <a:xfrm xmlns:a="http://schemas.openxmlformats.org/drawingml/2006/main">
-            <a:off x="8810625" y="5219700"/>
-            <a:ext cx="2714625" cy="895350"/>
-          </a:xfrm>
-          <a:prstGeom xmlns:a="http://schemas.openxmlformats.org/drawingml/2006/main" prst="rect">
-            <a:avLst/>
-          </a:prstGeom>
-          <a:noFill xmlns:a="http://schemas.openxmlformats.org/drawingml/2006/main"/>
-          <a:ln xmlns:a="http://schemas.openxmlformats.org/drawingml/2006/main" w="0">
-            <a:noFill/>
-            <a:prstDash val="solid"/>
-          </a:ln>
-        </p:spPr>
-        <p:txBody>
-          <a:bodyPr xmlns:a="http://schemas.openxmlformats.org/drawingml/2006/main" lIns="0" tIns="0" rIns="0" bIns="0" anchor="t">
-            <a:normAutofit fontScale="93254"/>
           </a:bodyPr>
           <a:lstStyle xmlns:a="http://schemas.openxmlformats.org/drawingml/2006/main"/>
           <a:p xmlns:a="http://schemas.openxmlformats.org/drawingml/2006/main">
@@ -6652,7 +6712,123 @@
                 <a:ea typeface="Arial"/>
                 <a:cs typeface="Arial"/>
               </a:rPr>
-              <a:t>A procedure can estimate its own object accurately and still differ from the project estimand.</a:t>
+              <a:t>What is omitted on purpose?</a:t>
+            </a:r>
+          </a:p>
+        </p:txBody>
+      </p:sp>
+      <p:sp>
+        <p:nvSpPr>
+          <p:cNvPr id="11" name="gap-omit-body">
+            <a:extLst xmlns:a="http://schemas.openxmlformats.org/drawingml/2006/main">
+              <a:ext uri="{FF2B5EF4-FFF2-40B4-BE49-F238E27FC236}">
+                <a16:creationId xmlns:a16="http://schemas.microsoft.com/office/drawing/2014/main" id="{4FE69A69-52A4-453B-8F57-EB26DBE90A74}"/>
+              </a:ext>
+            </a:extLst>
+          </p:cNvPr>
+          <p:cNvSpPr>
+            <a:spLocks xmlns:a="http://schemas.openxmlformats.org/drawingml/2006/main" noGrp="1"/>
+          </p:cNvSpPr>
+          <p:nvPr/>
+        </p:nvSpPr>
+        <p:spPr>
+          <a:xfrm xmlns:a="http://schemas.openxmlformats.org/drawingml/2006/main">
+            <a:off x="8477250" y="4648200"/>
+            <a:ext cx="3143250" cy="1066800"/>
+          </a:xfrm>
+          <a:prstGeom xmlns:a="http://schemas.openxmlformats.org/drawingml/2006/main" prst="rect">
+            <a:avLst/>
+          </a:prstGeom>
+          <a:noFill xmlns:a="http://schemas.openxmlformats.org/drawingml/2006/main"/>
+          <a:ln xmlns:a="http://schemas.openxmlformats.org/drawingml/2006/main" w="0">
+            <a:noFill/>
+            <a:prstDash val="solid"/>
+          </a:ln>
+        </p:spPr>
+        <p:txBody>
+          <a:bodyPr xmlns:a="http://schemas.openxmlformats.org/drawingml/2006/main" lIns="0" tIns="0" rIns="0" bIns="0" anchor="t">
+            <a:normAutofit fontScale="100000"/>
+          </a:bodyPr>
+          <a:lstStyle xmlns:a="http://schemas.openxmlformats.org/drawingml/2006/main"/>
+          <a:p xmlns:a="http://schemas.openxmlformats.org/drawingml/2006/main">
+            <a:pPr algn="l">
+              <a:defRPr sz="1200" b="0" i="0">
+                <a:solidFill>
+                  <a:srgbClr val="59616D"/>
+                </a:solidFill>
+                <a:latin typeface="Arial"/>
+                <a:ea typeface="Arial"/>
+                <a:cs typeface="Arial"/>
+              </a:defRPr>
+            </a:pPr>
+            <a:r>
+              <a:rPr sz="1200" b="0" i="0">
+                <a:solidFill>
+                  <a:srgbClr val="59616D"/>
+                </a:solidFill>
+                <a:latin typeface="Arial"/>
+                <a:ea typeface="Arial"/>
+                <a:cs typeface="Arial"/>
+              </a:rPr>
+              <a:t>KSS versus H_F or rho_H is model misspecification, already shown in RMSE. rho_BS and rho_H have different constructions. BLM grouped-minus-full is approximation error, not a change of estimand.</a:t>
+            </a:r>
+          </a:p>
+        </p:txBody>
+      </p:sp>
+      <p:sp>
+        <p:nvSpPr>
+          <p:cNvPr id="12" name="gap-takeaway">
+            <a:extLst xmlns:a="http://schemas.openxmlformats.org/drawingml/2006/main">
+              <a:ext uri="{FF2B5EF4-FFF2-40B4-BE49-F238E27FC236}">
+                <a16:creationId xmlns:a16="http://schemas.microsoft.com/office/drawing/2014/main" id="{9B7C717F-DE5B-4D89-BEC1-B18A871B2D06}"/>
+              </a:ext>
+            </a:extLst>
+          </p:cNvPr>
+          <p:cNvSpPr>
+            <a:spLocks xmlns:a="http://schemas.openxmlformats.org/drawingml/2006/main" noGrp="1"/>
+          </p:cNvSpPr>
+          <p:nvPr/>
+        </p:nvSpPr>
+        <p:spPr>
+          <a:xfrm xmlns:a="http://schemas.openxmlformats.org/drawingml/2006/main">
+            <a:off x="8477250" y="5829300"/>
+            <a:ext cx="3143250" cy="476250"/>
+          </a:xfrm>
+          <a:prstGeom xmlns:a="http://schemas.openxmlformats.org/drawingml/2006/main" prst="rect">
+            <a:avLst/>
+          </a:prstGeom>
+          <a:noFill xmlns:a="http://schemas.openxmlformats.org/drawingml/2006/main"/>
+          <a:ln xmlns:a="http://schemas.openxmlformats.org/drawingml/2006/main" w="0">
+            <a:noFill/>
+            <a:prstDash val="solid"/>
+          </a:ln>
+        </p:spPr>
+        <p:txBody>
+          <a:bodyPr xmlns:a="http://schemas.openxmlformats.org/drawingml/2006/main" lIns="0" tIns="0" rIns="0" bIns="0" anchor="t">
+            <a:normAutofit fontScale="81699"/>
+          </a:bodyPr>
+          <a:lstStyle xmlns:a="http://schemas.openxmlformats.org/drawingml/2006/main"/>
+          <a:p xmlns:a="http://schemas.openxmlformats.org/drawingml/2006/main">
+            <a:pPr algn="l">
+              <a:defRPr sz="1275" b="1" i="0">
+                <a:solidFill>
+                  <a:srgbClr val="000000"/>
+                </a:solidFill>
+                <a:latin typeface="Arial"/>
+                <a:ea typeface="Arial"/>
+                <a:cs typeface="Arial"/>
+              </a:defRPr>
+            </a:pPr>
+            <a:r>
+              <a:rPr sz="1275" b="1" i="0">
+                <a:solidFill>
+                  <a:srgbClr val="000000"/>
+                </a:solidFill>
+                <a:latin typeface="Arial"/>
+                <a:ea typeface="Arial"/>
+                <a:cs typeface="Arial"/>
+              </a:rPr>
+              <a:t>Takeaway: a benchmark can estimate its native object accurately and still answer a different economic question from the project estimand.</a:t>
             </a:r>
           </a:p>
         </p:txBody>
@@ -6662,7 +6838,7 @@
           <p:cNvPr id="13" name="slide-7-footer-label">
             <a:extLst xmlns:a="http://schemas.openxmlformats.org/drawingml/2006/main">
               <a:ext uri="{FF2B5EF4-FFF2-40B4-BE49-F238E27FC236}">
-                <a16:creationId xmlns:a16="http://schemas.microsoft.com/office/drawing/2014/main" id="{7448DE6B-0A8B-4309-A86E-48FEBC4A279C}"/>
+                <a16:creationId xmlns:a16="http://schemas.microsoft.com/office/drawing/2014/main" id="{F7F3F5B6-B96A-46FA-BC8D-D0AE07D37930}"/>
               </a:ext>
             </a:extLst>
           </p:cNvPr>
@@ -6720,7 +6896,7 @@
           <p:cNvPr id="14" name="slide-7-footer-number">
             <a:extLst xmlns:a="http://schemas.openxmlformats.org/drawingml/2006/main">
               <a:ext uri="{FF2B5EF4-FFF2-40B4-BE49-F238E27FC236}">
-                <a16:creationId xmlns:a16="http://schemas.microsoft.com/office/drawing/2014/main" id="{D71F13A7-F6DF-4650-AE16-C17D5ED5821D}"/>
+                <a16:creationId xmlns:a16="http://schemas.microsoft.com/office/drawing/2014/main" id="{DD690677-C7B0-4665-8E8E-616C1DF304AD}"/>
               </a:ext>
             </a:extLst>
           </p:cNvPr>
@@ -6776,7 +6952,7 @@
     </p:spTree>
     <p:extLst>
       <p:ext uri="{BB962C8B-B14F-4D97-AF65-F5344CB8AC3E}">
-        <p14:creationId xmlns:p14="http://schemas.microsoft.com/office/powerpoint/2010/main" val="1185258610"/>
+        <p14:creationId xmlns:p14="http://schemas.microsoft.com/office/powerpoint/2010/main" val="1325918330"/>
       </p:ext>
     </p:extLst>
   </p:cSld>
@@ -6807,7 +6983,7 @@
           <p:cNvPr id="15" name="slide-8-title">
             <a:extLst xmlns:a="http://schemas.openxmlformats.org/drawingml/2006/main">
               <a:ext uri="{FF2B5EF4-FFF2-40B4-BE49-F238E27FC236}">
-                <a16:creationId xmlns:a16="http://schemas.microsoft.com/office/drawing/2014/main" id="{FA0A817D-D0E9-4DE7-9FDD-31919909E0C1}"/>
+                <a16:creationId xmlns:a16="http://schemas.microsoft.com/office/drawing/2014/main" id="{050B066D-A063-4BA7-B1E8-618E92239B63}"/>
               </a:ext>
             </a:extLst>
           </p:cNvPr>
@@ -6837,7 +7013,7 @@
           <a:lstStyle xmlns:a="http://schemas.openxmlformats.org/drawingml/2006/main"/>
           <a:p xmlns:a="http://schemas.openxmlformats.org/drawingml/2006/main">
             <a:pPr algn="l">
-              <a:defRPr sz="3000" b="1" i="0">
+              <a:defRPr sz="2700" b="1" i="0">
                 <a:solidFill>
                   <a:srgbClr val="000000"/>
                 </a:solidFill>
@@ -6847,7 +7023,7 @@
               </a:defRPr>
             </a:pPr>
             <a:r>
-              <a:rPr sz="3000" b="1" i="0">
+              <a:rPr sz="2700" b="1" i="0">
                 <a:solidFill>
                   <a:srgbClr val="000000"/>
                 </a:solidFill>
@@ -6855,7 +7031,7 @@
                 <a:ea typeface="Arial"/>
                 <a:cs typeface="Arial"/>
               </a:rPr>
-              <a:t>What the simulation establishes</a:t>
+              <a:t>What we tried - and what remains an actual experiment</a:t>
             </a:r>
           </a:p>
         </p:txBody>
@@ -6865,7 +7041,7 @@
           <p:cNvPr id="2" name="slide-8-title-rule">
             <a:extLst xmlns:a="http://schemas.openxmlformats.org/drawingml/2006/main">
               <a:ext uri="{FF2B5EF4-FFF2-40B4-BE49-F238E27FC236}">
-                <a16:creationId xmlns:a16="http://schemas.microsoft.com/office/drawing/2014/main" id="{A50A2409-F6B7-4796-B8F5-095F05355816}"/>
+                <a16:creationId xmlns:a16="http://schemas.microsoft.com/office/drawing/2014/main" id="{503FD8D1-AE8D-4069-A929-92663C78F50C}"/>
               </a:ext>
             </a:extLst>
           </p:cNvPr>
@@ -6893,22 +7069,22 @@
       </p:sp>
       <p:sp>
         <p:nvSpPr>
-          <p:cNvPr id="3" name="close-validated-label">
-            <a:extLst xmlns:a="http://schemas.openxmlformats.org/drawingml/2006/main">
-              <a:ext uri="{FF2B5EF4-FFF2-40B4-BE49-F238E27FC236}">
-                <a16:creationId xmlns:a16="http://schemas.microsoft.com/office/drawing/2014/main" id="{8C062E34-ED29-4415-A72D-A74621C543F2}"/>
-              </a:ext>
-            </a:extLst>
-          </p:cNvPr>
-          <p:cNvSpPr>
-            <a:spLocks xmlns:a="http://schemas.openxmlformats.org/drawingml/2006/main" noGrp="1"/>
-          </p:cNvSpPr>
-          <p:nvPr/>
-        </p:nvSpPr>
-        <p:spPr>
-          <a:xfrm xmlns:a="http://schemas.openxmlformats.org/drawingml/2006/main">
-            <a:off x="590550" y="1447800"/>
-            <a:ext cx="2381250" cy="285750"/>
+          <p:cNvPr id="3" name="tried-head">
+            <a:extLst xmlns:a="http://schemas.openxmlformats.org/drawingml/2006/main">
+              <a:ext uri="{FF2B5EF4-FFF2-40B4-BE49-F238E27FC236}">
+                <a16:creationId xmlns:a16="http://schemas.microsoft.com/office/drawing/2014/main" id="{751483AE-722D-4DBC-8B2D-0D7F3A3197A0}"/>
+              </a:ext>
+            </a:extLst>
+          </p:cNvPr>
+          <p:cNvSpPr>
+            <a:spLocks xmlns:a="http://schemas.openxmlformats.org/drawingml/2006/main" noGrp="1"/>
+          </p:cNvSpPr>
+          <p:nvPr/>
+        </p:nvSpPr>
+        <p:spPr>
+          <a:xfrm xmlns:a="http://schemas.openxmlformats.org/drawingml/2006/main">
+            <a:off x="523875" y="1181100"/>
+            <a:ext cx="5286375" cy="323850"/>
           </a:xfrm>
           <a:prstGeom xmlns:a="http://schemas.openxmlformats.org/drawingml/2006/main" prst="rect">
             <a:avLst/>
@@ -6926,47 +7102,47 @@
           <a:lstStyle xmlns:a="http://schemas.openxmlformats.org/drawingml/2006/main"/>
           <a:p xmlns:a="http://schemas.openxmlformats.org/drawingml/2006/main">
             <a:pPr algn="l">
-              <a:defRPr sz="1425" b="1" i="0">
-                <a:solidFill>
-                  <a:srgbClr val="009E73"/>
-                </a:solidFill>
-                <a:latin typeface="Arial"/>
-                <a:ea typeface="Arial"/>
-                <a:cs typeface="Arial"/>
-              </a:defRPr>
-            </a:pPr>
-            <a:r>
-              <a:rPr sz="1425" b="1" i="0">
-                <a:solidFill>
-                  <a:srgbClr val="009E73"/>
-                </a:solidFill>
-                <a:latin typeface="Arial"/>
-                <a:ea typeface="Arial"/>
-                <a:cs typeface="Arial"/>
-              </a:rPr>
-              <a:t>VALIDATED</a:t>
-            </a:r>
-          </a:p>
-        </p:txBody>
-      </p:sp>
-      <p:sp>
-        <p:nvSpPr>
-          <p:cNvPr id="4" name="close-validated">
-            <a:extLst xmlns:a="http://schemas.openxmlformats.org/drawingml/2006/main">
-              <a:ext uri="{FF2B5EF4-FFF2-40B4-BE49-F238E27FC236}">
-                <a16:creationId xmlns:a16="http://schemas.microsoft.com/office/drawing/2014/main" id="{2444922A-8274-4569-98E2-0F7FBC79A916}"/>
-              </a:ext>
-            </a:extLst>
-          </p:cNvPr>
-          <p:cNvSpPr>
-            <a:spLocks xmlns:a="http://schemas.openxmlformats.org/drawingml/2006/main" noGrp="1"/>
-          </p:cNvSpPr>
-          <p:nvPr/>
-        </p:nvSpPr>
-        <p:spPr>
-          <a:xfrm xmlns:a="http://schemas.openxmlformats.org/drawingml/2006/main">
-            <a:off x="590550" y="1857375"/>
-            <a:ext cx="10382250" cy="647700"/>
+              <a:defRPr sz="1800" b="1" i="0">
+                <a:solidFill>
+                  <a:srgbClr val="3D8DFF"/>
+                </a:solidFill>
+                <a:latin typeface="Arial"/>
+                <a:ea typeface="Arial"/>
+                <a:cs typeface="Arial"/>
+              </a:defRPr>
+            </a:pPr>
+            <a:r>
+              <a:rPr sz="1800" b="1" i="0">
+                <a:solidFill>
+                  <a:srgbClr val="3D8DFF"/>
+                </a:solidFill>
+                <a:latin typeface="Arial"/>
+                <a:ea typeface="Arial"/>
+                <a:cs typeface="Arial"/>
+              </a:rPr>
+              <a:t>Already embedded in the production baseline</a:t>
+            </a:r>
+          </a:p>
+        </p:txBody>
+      </p:sp>
+      <p:sp>
+        <p:nvSpPr>
+          <p:cNvPr id="4" name="tried-items">
+            <a:extLst xmlns:a="http://schemas.openxmlformats.org/drawingml/2006/main">
+              <a:ext uri="{FF2B5EF4-FFF2-40B4-BE49-F238E27FC236}">
+                <a16:creationId xmlns:a16="http://schemas.microsoft.com/office/drawing/2014/main" id="{D5E63BF2-7E7D-4179-803A-CBB7B0F4BDA4}"/>
+              </a:ext>
+            </a:extLst>
+          </p:cNvPr>
+          <p:cNvSpPr>
+            <a:spLocks xmlns:a="http://schemas.openxmlformats.org/drawingml/2006/main" noGrp="1"/>
+          </p:cNvSpPr>
+          <p:nvPr/>
+        </p:nvSpPr>
+        <p:spPr>
+          <a:xfrm xmlns:a="http://schemas.openxmlformats.org/drawingml/2006/main">
+            <a:off x="523875" y="1657350"/>
+            <a:ext cx="5286375" cy="1619250"/>
           </a:xfrm>
           <a:prstGeom xmlns:a="http://schemas.openxmlformats.org/drawingml/2006/main" prst="rect">
             <a:avLst/>
@@ -6984,7 +7160,7 @@
           <a:lstStyle xmlns:a="http://schemas.openxmlformats.org/drawingml/2006/main"/>
           <a:p xmlns:a="http://schemas.openxmlformats.org/drawingml/2006/main">
             <a:pPr algn="l">
-              <a:defRPr sz="2550" b="1" i="0">
+              <a:defRPr sz="1350" b="1" i="0">
                 <a:solidFill>
                   <a:srgbClr val="000000"/>
                 </a:solidFill>
@@ -6994,7 +7170,7 @@
               </a:defRPr>
             </a:pPr>
             <a:r>
-              <a:rPr sz="2550" b="1" i="0">
+              <a:rPr sz="1350" b="1" i="0">
                 <a:solidFill>
                   <a:srgbClr val="000000"/>
                 </a:solidFill>
@@ -7002,29 +7178,156 @@
                 <a:ea typeface="Arial"/>
                 <a:cs typeface="Arial"/>
               </a:rPr>
-              <a:t>Benchmarks perform well in the DGPs they are built for.</a:t>
-            </a:r>
-          </a:p>
-        </p:txBody>
-      </p:sp>
-      <p:sp>
-        <p:nvSpPr>
-          <p:cNvPr id="5" name="close-rule-1">
-            <a:extLst xmlns:a="http://schemas.openxmlformats.org/drawingml/2006/main">
-              <a:ext uri="{FF2B5EF4-FFF2-40B4-BE49-F238E27FC236}">
-                <a16:creationId xmlns:a16="http://schemas.microsoft.com/office/drawing/2014/main" id="{D3D37A53-191F-4023-9BB1-3C77E1857E03}"/>
-              </a:ext>
-            </a:extLst>
-          </p:cNvPr>
-          <p:cNvSpPr>
-            <a:spLocks xmlns:a="http://schemas.openxmlformats.org/drawingml/2006/main" noGrp="1"/>
-          </p:cNvSpPr>
-          <p:nvPr/>
-        </p:nvSpPr>
-        <p:spPr>
-          <a:xfrm xmlns:a="http://schemas.openxmlformats.org/drawingml/2006/main">
-            <a:off x="590550" y="2686050"/>
-            <a:ext cx="11001375" cy="9525"/>
+              <a:t>1. Recenter and SVD-normalize after every ALS iteration.</a:t>
+            </a:r>
+          </a:p>
+          <a:p xmlns:a="http://schemas.openxmlformats.org/drawingml/2006/main">
+            <a:pPr algn="l">
+              <a:defRPr sz="1350" b="1" i="0">
+                <a:solidFill>
+                  <a:srgbClr val="000000"/>
+                </a:solidFill>
+                <a:latin typeface="Arial"/>
+                <a:ea typeface="Arial"/>
+                <a:cs typeface="Arial"/>
+              </a:defRPr>
+            </a:pPr>
+            <a:r>
+              <a:rPr sz="1350" b="1" i="0">
+                <a:solidFill>
+                  <a:srgbClr val="000000"/>
+                </a:solidFill>
+                <a:latin typeface="Arial"/>
+                <a:ea typeface="Arial"/>
+                <a:cs typeface="Arial"/>
+              </a:rPr>
+              <a:t>2. Require r+2 distinct partners on a common support core.</a:t>
+            </a:r>
+          </a:p>
+          <a:p xmlns:a="http://schemas.openxmlformats.org/drawingml/2006/main">
+            <a:pPr algn="l">
+              <a:defRPr sz="1350" b="1" i="0">
+                <a:solidFill>
+                  <a:srgbClr val="000000"/>
+                </a:solidFill>
+                <a:latin typeface="Arial"/>
+                <a:ea typeface="Arial"/>
+                <a:cs typeface="Arial"/>
+              </a:defRPr>
+            </a:pPr>
+            <a:r>
+              <a:rPr sz="1350" b="1" i="0">
+                <a:solidFill>
+                  <a:srgbClr val="000000"/>
+                </a:solidFill>
+                <a:latin typeface="Arial"/>
+                <a:ea typeface="Arial"/>
+                <a:cs typeface="Arial"/>
+              </a:rPr>
+              <a:t>3. Use six exploratory and three confirmation starts.</a:t>
+            </a:r>
+          </a:p>
+          <a:p xmlns:a="http://schemas.openxmlformats.org/drawingml/2006/main">
+            <a:pPr algn="l">
+              <a:defRPr sz="1350" b="1" i="0">
+                <a:solidFill>
+                  <a:srgbClr val="000000"/>
+                </a:solidFill>
+                <a:latin typeface="Arial"/>
+                <a:ea typeface="Arial"/>
+                <a:cs typeface="Arial"/>
+              </a:defRPr>
+            </a:pPr>
+            <a:r>
+              <a:rPr sz="1350" b="1" i="0">
+                <a:solidFill>
+                  <a:srgbClr val="000000"/>
+                </a:solidFill>
+                <a:latin typeface="Arial"/>
+                <a:ea typeface="Arial"/>
+                <a:cs typeface="Arial"/>
+              </a:rPr>
+              <a:t>4. Use 60 periods with redraw probability 0.40.</a:t>
+            </a:r>
+          </a:p>
+        </p:txBody>
+      </p:sp>
+      <p:sp>
+        <p:nvSpPr>
+          <p:cNvPr id="5" name="tried-interpretation">
+            <a:extLst xmlns:a="http://schemas.openxmlformats.org/drawingml/2006/main">
+              <a:ext uri="{FF2B5EF4-FFF2-40B4-BE49-F238E27FC236}">
+                <a16:creationId xmlns:a16="http://schemas.microsoft.com/office/drawing/2014/main" id="{7E6BC900-25A9-416E-9CFC-11F174C76651}"/>
+              </a:ext>
+            </a:extLst>
+          </p:cNvPr>
+          <p:cNvSpPr>
+            <a:spLocks xmlns:a="http://schemas.openxmlformats.org/drawingml/2006/main" noGrp="1"/>
+          </p:cNvSpPr>
+          <p:nvPr/>
+        </p:nvSpPr>
+        <p:spPr>
+          <a:xfrm xmlns:a="http://schemas.openxmlformats.org/drawingml/2006/main">
+            <a:off x="523875" y="3448050"/>
+            <a:ext cx="5286375" cy="876300"/>
+          </a:xfrm>
+          <a:prstGeom xmlns:a="http://schemas.openxmlformats.org/drawingml/2006/main" prst="rect">
+            <a:avLst/>
+          </a:prstGeom>
+          <a:noFill xmlns:a="http://schemas.openxmlformats.org/drawingml/2006/main"/>
+          <a:ln xmlns:a="http://schemas.openxmlformats.org/drawingml/2006/main" w="0">
+            <a:noFill/>
+            <a:prstDash val="solid"/>
+          </a:ln>
+        </p:spPr>
+        <p:txBody>
+          <a:bodyPr xmlns:a="http://schemas.openxmlformats.org/drawingml/2006/main" lIns="0" tIns="0" rIns="0" bIns="0" anchor="t">
+            <a:normAutofit fontScale="100000"/>
+          </a:bodyPr>
+          <a:lstStyle xmlns:a="http://schemas.openxmlformats.org/drawingml/2006/main"/>
+          <a:p xmlns:a="http://schemas.openxmlformats.org/drawingml/2006/main">
+            <a:pPr algn="l">
+              <a:defRPr sz="1275" b="0" i="0">
+                <a:solidFill>
+                  <a:srgbClr val="59616D"/>
+                </a:solidFill>
+                <a:latin typeface="Arial"/>
+                <a:ea typeface="Arial"/>
+                <a:cs typeface="Arial"/>
+              </a:defRPr>
+            </a:pPr>
+            <a:r>
+              <a:rPr sz="1275" b="0" i="0">
+                <a:solidFill>
+                  <a:srgbClr val="59616D"/>
+                </a:solidFill>
+                <a:latin typeface="Arial"/>
+                <a:ea typeface="Arial"/>
+                <a:cs typeface="Arial"/>
+              </a:rPr>
+              <a:t>These choices turned failed preflights into a viable baseline and made nonreproducible basins visible. They were not separate estimator arms, and production still produced 61/15/7 warnings.</a:t>
+            </a:r>
+          </a:p>
+        </p:txBody>
+      </p:sp>
+      <p:sp>
+        <p:nvSpPr>
+          <p:cNvPr id="6" name="variant-divider">
+            <a:extLst xmlns:a="http://schemas.openxmlformats.org/drawingml/2006/main">
+              <a:ext uri="{FF2B5EF4-FFF2-40B4-BE49-F238E27FC236}">
+                <a16:creationId xmlns:a16="http://schemas.microsoft.com/office/drawing/2014/main" id="{112F17BD-BF8A-4E92-A853-B9A0FD51888B}"/>
+              </a:ext>
+            </a:extLst>
+          </p:cNvPr>
+          <p:cNvSpPr>
+            <a:spLocks xmlns:a="http://schemas.openxmlformats.org/drawingml/2006/main" noGrp="1"/>
+          </p:cNvSpPr>
+          <p:nvPr/>
+        </p:nvSpPr>
+        <p:spPr>
+          <a:xfrm xmlns:a="http://schemas.openxmlformats.org/drawingml/2006/main">
+            <a:off x="6076950" y="1181100"/>
+            <a:ext cx="9525" cy="3638550"/>
           </a:xfrm>
           <a:prstGeom xmlns:a="http://schemas.openxmlformats.org/drawingml/2006/main" prst="rect">
             <a:avLst/>
@@ -7040,22 +7343,22 @@
       </p:sp>
       <p:sp>
         <p:nvSpPr>
-          <p:cNvPr id="6" name="close-solved-label">
-            <a:extLst xmlns:a="http://schemas.openxmlformats.org/drawingml/2006/main">
-              <a:ext uri="{FF2B5EF4-FFF2-40B4-BE49-F238E27FC236}">
-                <a16:creationId xmlns:a16="http://schemas.microsoft.com/office/drawing/2014/main" id="{42C2B1C9-7F2E-43EC-AE14-BBB17182A054}"/>
-              </a:ext>
-            </a:extLst>
-          </p:cNvPr>
-          <p:cNvSpPr>
-            <a:spLocks xmlns:a="http://schemas.openxmlformats.org/drawingml/2006/main" noGrp="1"/>
-          </p:cNvSpPr>
-          <p:nvPr/>
-        </p:nvSpPr>
-        <p:spPr>
-          <a:xfrm xmlns:a="http://schemas.openxmlformats.org/drawingml/2006/main">
-            <a:off x="590550" y="2952750"/>
-            <a:ext cx="2857500" cy="285750"/>
+          <p:cNvPr id="7" name="untested-head">
+            <a:extLst xmlns:a="http://schemas.openxmlformats.org/drawingml/2006/main">
+              <a:ext uri="{FF2B5EF4-FFF2-40B4-BE49-F238E27FC236}">
+                <a16:creationId xmlns:a16="http://schemas.microsoft.com/office/drawing/2014/main" id="{08BC5EF5-DBBC-41EC-8414-D34BB7A7B276}"/>
+              </a:ext>
+            </a:extLst>
+          </p:cNvPr>
+          <p:cNvSpPr>
+            <a:spLocks xmlns:a="http://schemas.openxmlformats.org/drawingml/2006/main" noGrp="1"/>
+          </p:cNvSpPr>
+          <p:nvPr/>
+        </p:nvSpPr>
+        <p:spPr>
+          <a:xfrm xmlns:a="http://schemas.openxmlformats.org/drawingml/2006/main">
+            <a:off x="6429375" y="1181100"/>
+            <a:ext cx="5191125" cy="323850"/>
           </a:xfrm>
           <a:prstGeom xmlns:a="http://schemas.openxmlformats.org/drawingml/2006/main" prst="rect">
             <a:avLst/>
@@ -7073,47 +7376,47 @@
           <a:lstStyle xmlns:a="http://schemas.openxmlformats.org/drawingml/2006/main"/>
           <a:p xmlns:a="http://schemas.openxmlformats.org/drawingml/2006/main">
             <a:pPr algn="l">
-              <a:defRPr sz="1425" b="1" i="0">
-                <a:solidFill>
-                  <a:srgbClr val="3D8DFF"/>
-                </a:solidFill>
-                <a:latin typeface="Arial"/>
-                <a:ea typeface="Arial"/>
-                <a:cs typeface="Arial"/>
-              </a:defRPr>
-            </a:pPr>
-            <a:r>
-              <a:rPr sz="1425" b="1" i="0">
-                <a:solidFill>
-                  <a:srgbClr val="3D8DFF"/>
-                </a:solidFill>
-                <a:latin typeface="Arial"/>
-                <a:ea typeface="Arial"/>
-                <a:cs typeface="Arial"/>
-              </a:rPr>
-              <a:t>SOLVED IN THIS DESIGN</a:t>
-            </a:r>
-          </a:p>
-        </p:txBody>
-      </p:sp>
-      <p:sp>
-        <p:nvSpPr>
-          <p:cNvPr id="7" name="close-solved">
-            <a:extLst xmlns:a="http://schemas.openxmlformats.org/drawingml/2006/main">
-              <a:ext uri="{FF2B5EF4-FFF2-40B4-BE49-F238E27FC236}">
-                <a16:creationId xmlns:a16="http://schemas.microsoft.com/office/drawing/2014/main" id="{B3DE5B58-C4B8-4912-85EA-10023DDC8099}"/>
-              </a:ext>
-            </a:extLst>
-          </p:cNvPr>
-          <p:cNvSpPr>
-            <a:spLocks xmlns:a="http://schemas.openxmlformats.org/drawingml/2006/main" noGrp="1"/>
-          </p:cNvSpPr>
-          <p:nvPr/>
-        </p:nvSpPr>
-        <p:spPr>
-          <a:xfrm xmlns:a="http://schemas.openxmlformats.org/drawingml/2006/main">
-            <a:off x="590550" y="3362325"/>
-            <a:ext cx="10382250" cy="647700"/>
+              <a:defRPr sz="1800" b="1" i="0">
+                <a:solidFill>
+                  <a:srgbClr val="D55E00"/>
+                </a:solidFill>
+                <a:latin typeface="Arial"/>
+                <a:ea typeface="Arial"/>
+                <a:cs typeface="Arial"/>
+              </a:defRPr>
+            </a:pPr>
+            <a:r>
+              <a:rPr sz="1800" b="1" i="0">
+                <a:solidFill>
+                  <a:srgbClr val="D55E00"/>
+                </a:solidFill>
+                <a:latin typeface="Arial"/>
+                <a:ea typeface="Arial"/>
+                <a:cs typeface="Arial"/>
+              </a:rPr>
+              <a:t>Proposed, but not yet tested</a:t>
+            </a:r>
+          </a:p>
+        </p:txBody>
+      </p:sp>
+      <p:sp>
+        <p:nvSpPr>
+          <p:cNvPr id="8" name="untested-items">
+            <a:extLst xmlns:a="http://schemas.openxmlformats.org/drawingml/2006/main">
+              <a:ext uri="{FF2B5EF4-FFF2-40B4-BE49-F238E27FC236}">
+                <a16:creationId xmlns:a16="http://schemas.microsoft.com/office/drawing/2014/main" id="{38CD0696-FA8D-43F3-A2DF-52FD8C14F6C8}"/>
+              </a:ext>
+            </a:extLst>
+          </p:cNvPr>
+          <p:cNvSpPr>
+            <a:spLocks xmlns:a="http://schemas.openxmlformats.org/drawingml/2006/main" noGrp="1"/>
+          </p:cNvSpPr>
+          <p:nvPr/>
+        </p:nvSpPr>
+        <p:spPr>
+          <a:xfrm xmlns:a="http://schemas.openxmlformats.org/drawingml/2006/main">
+            <a:off x="6429375" y="1657350"/>
+            <a:ext cx="5191125" cy="1752600"/>
           </a:xfrm>
           <a:prstGeom xmlns:a="http://schemas.openxmlformats.org/drawingml/2006/main" prst="rect">
             <a:avLst/>
@@ -7131,7 +7434,7 @@
           <a:lstStyle xmlns:a="http://schemas.openxmlformats.org/drawingml/2006/main"/>
           <a:p xmlns:a="http://schemas.openxmlformats.org/drawingml/2006/main">
             <a:pPr algn="l">
-              <a:defRPr sz="2550" b="1" i="0">
+              <a:defRPr sz="1350" b="1" i="0">
                 <a:solidFill>
                   <a:srgbClr val="000000"/>
                 </a:solidFill>
@@ -7141,7 +7444,7 @@
               </a:defRPr>
             </a:pPr>
             <a:r>
-              <a:rPr sz="2550" b="1" i="0">
+              <a:rPr sz="1350" b="1" i="0">
                 <a:solidFill>
                   <a:srgbClr val="000000"/>
                 </a:solidFill>
@@ -7149,118 +7452,98 @@
                 <a:ea typeface="Arial"/>
                 <a:cs typeface="Arial"/>
               </a:rPr>
-              <a:t>BIC chooses the correct rank in every simulated population.</a:t>
-            </a:r>
-          </a:p>
-        </p:txBody>
-      </p:sp>
-      <p:sp>
-        <p:nvSpPr>
-          <p:cNvPr id="8" name="close-rule-2">
-            <a:extLst xmlns:a="http://schemas.openxmlformats.org/drawingml/2006/main">
-              <a:ext uri="{FF2B5EF4-FFF2-40B4-BE49-F238E27FC236}">
-                <a16:creationId xmlns:a16="http://schemas.microsoft.com/office/drawing/2014/main" id="{A36E8EC6-CCA6-4FBE-849C-ED9FE4B6E0EA}"/>
-              </a:ext>
-            </a:extLst>
-          </p:cNvPr>
-          <p:cNvSpPr>
-            <a:spLocks xmlns:a="http://schemas.openxmlformats.org/drawingml/2006/main" noGrp="1"/>
-          </p:cNvSpPr>
-          <p:nvPr/>
-        </p:nvSpPr>
-        <p:spPr>
-          <a:xfrm xmlns:a="http://schemas.openxmlformats.org/drawingml/2006/main">
-            <a:off x="590550" y="4191000"/>
-            <a:ext cx="11001375" cy="9525"/>
-          </a:xfrm>
-          <a:prstGeom xmlns:a="http://schemas.openxmlformats.org/drawingml/2006/main" prst="rect">
-            <a:avLst/>
-          </a:prstGeom>
-          <a:solidFill xmlns:a="http://schemas.openxmlformats.org/drawingml/2006/main">
-            <a:srgbClr val="B8BCC4"/>
-          </a:solidFill>
-          <a:ln xmlns:a="http://schemas.openxmlformats.org/drawingml/2006/main" w="0">
-            <a:noFill/>
-            <a:prstDash val="solid"/>
-          </a:ln>
-        </p:spPr>
-      </p:sp>
-      <p:sp>
-        <p:nvSpPr>
-          <p:cNvPr id="9" name="close-unresolved-label">
-            <a:extLst xmlns:a="http://schemas.openxmlformats.org/drawingml/2006/main">
-              <a:ext uri="{FF2B5EF4-FFF2-40B4-BE49-F238E27FC236}">
-                <a16:creationId xmlns:a16="http://schemas.microsoft.com/office/drawing/2014/main" id="{18CEB064-B9B9-4669-A597-CC2CFD1AA4DC}"/>
-              </a:ext>
-            </a:extLst>
-          </p:cNvPr>
-          <p:cNvSpPr>
-            <a:spLocks xmlns:a="http://schemas.openxmlformats.org/drawingml/2006/main" noGrp="1"/>
-          </p:cNvSpPr>
-          <p:nvPr/>
-        </p:nvSpPr>
-        <p:spPr>
-          <a:xfrm xmlns:a="http://schemas.openxmlformats.org/drawingml/2006/main">
-            <a:off x="590550" y="4457700"/>
-            <a:ext cx="2381250" cy="285750"/>
-          </a:xfrm>
-          <a:prstGeom xmlns:a="http://schemas.openxmlformats.org/drawingml/2006/main" prst="rect">
-            <a:avLst/>
-          </a:prstGeom>
-          <a:noFill xmlns:a="http://schemas.openxmlformats.org/drawingml/2006/main"/>
-          <a:ln xmlns:a="http://schemas.openxmlformats.org/drawingml/2006/main" w="0">
-            <a:noFill/>
-            <a:prstDash val="solid"/>
-          </a:ln>
-        </p:spPr>
-        <p:txBody>
-          <a:bodyPr xmlns:a="http://schemas.openxmlformats.org/drawingml/2006/main" lIns="0" tIns="0" rIns="0" bIns="0" anchor="t">
-            <a:noAutofit/>
-          </a:bodyPr>
-          <a:lstStyle xmlns:a="http://schemas.openxmlformats.org/drawingml/2006/main"/>
+              <a:t>1. Ridge/Tikhonov local factor regressions.</a:t>
+            </a:r>
+          </a:p>
           <a:p xmlns:a="http://schemas.openxmlformats.org/drawingml/2006/main">
             <a:pPr algn="l">
-              <a:defRPr sz="1425" b="1" i="0">
-                <a:solidFill>
-                  <a:srgbClr val="D55E00"/>
-                </a:solidFill>
-                <a:latin typeface="Arial"/>
-                <a:ea typeface="Arial"/>
-                <a:cs typeface="Arial"/>
-              </a:defRPr>
-            </a:pPr>
-            <a:r>
-              <a:rPr sz="1425" b="1" i="0">
-                <a:solidFill>
-                  <a:srgbClr val="D55E00"/>
-                </a:solidFill>
-                <a:latin typeface="Arial"/>
-                <a:ea typeface="Arial"/>
-                <a:cs typeface="Arial"/>
-              </a:rPr>
-              <a:t>UNRESOLVED</a:t>
-            </a:r>
-          </a:p>
-        </p:txBody>
-      </p:sp>
-      <p:sp>
-        <p:nvSpPr>
-          <p:cNvPr id="10" name="close-unresolved">
-            <a:extLst xmlns:a="http://schemas.openxmlformats.org/drawingml/2006/main">
-              <a:ext uri="{FF2B5EF4-FFF2-40B4-BE49-F238E27FC236}">
-                <a16:creationId xmlns:a16="http://schemas.microsoft.com/office/drawing/2014/main" id="{65D2CC06-05AD-4E48-8A40-7018AE8959E5}"/>
-              </a:ext>
-            </a:extLst>
-          </p:cNvPr>
-          <p:cNvSpPr>
-            <a:spLocks xmlns:a="http://schemas.openxmlformats.org/drawingml/2006/main" noGrp="1"/>
-          </p:cNvSpPr>
-          <p:nvPr/>
-        </p:nvSpPr>
-        <p:spPr>
-          <a:xfrm xmlns:a="http://schemas.openxmlformats.org/drawingml/2006/main">
-            <a:off x="590550" y="4867275"/>
-            <a:ext cx="10382250" cy="647700"/>
+              <a:defRPr sz="1350" b="1" i="0">
+                <a:solidFill>
+                  <a:srgbClr val="000000"/>
+                </a:solidFill>
+                <a:latin typeface="Arial"/>
+                <a:ea typeface="Arial"/>
+                <a:cs typeface="Arial"/>
+              </a:defRPr>
+            </a:pPr>
+            <a:r>
+              <a:rPr sz="1350" b="1" i="0">
+                <a:solidFill>
+                  <a:srgbClr val="000000"/>
+                </a:solidFill>
+                <a:latin typeface="Arial"/>
+                <a:ea typeface="Arial"/>
+                <a:cs typeface="Arial"/>
+              </a:rPr>
+              <a:t>2. A pre-declared penalty or pooling rule triggered by weak local information.</a:t>
+            </a:r>
+          </a:p>
+          <a:p xmlns:a="http://schemas.openxmlformats.org/drawingml/2006/main">
+            <a:pPr algn="l">
+              <a:defRPr sz="1350" b="1" i="0">
+                <a:solidFill>
+                  <a:srgbClr val="000000"/>
+                </a:solidFill>
+                <a:latin typeface="Arial"/>
+                <a:ea typeface="Arial"/>
+                <a:cs typeface="Arial"/>
+              </a:defRPr>
+            </a:pPr>
+            <a:r>
+              <a:rPr sz="1350" b="1" i="0">
+                <a:solidFill>
+                  <a:srgbClr val="000000"/>
+                </a:solidFill>
+                <a:latin typeface="Arial"/>
+                <a:ea typeface="Arial"/>
+                <a:cs typeface="Arial"/>
+              </a:rPr>
+              <a:t>3. Direct estimation of Q_F, H_F, and C^w_assign without completing every pair.</a:t>
+            </a:r>
+          </a:p>
+          <a:p xmlns:a="http://schemas.openxmlformats.org/drawingml/2006/main">
+            <a:pPr algn="l">
+              <a:defRPr sz="1350" b="1" i="0">
+                <a:solidFill>
+                  <a:srgbClr val="000000"/>
+                </a:solidFill>
+                <a:latin typeface="Arial"/>
+                <a:ea typeface="Arial"/>
+                <a:cs typeface="Arial"/>
+              </a:defRPr>
+            </a:pPr>
+            <a:r>
+              <a:rPr sz="1350" b="1" i="0">
+                <a:solidFill>
+                  <a:srgbClr val="000000"/>
+                </a:solidFill>
+                <a:latin typeface="Arial"/>
+                <a:ea typeface="Arial"/>
+                <a:cs typeface="Arial"/>
+              </a:rPr>
+              <a:t>4. The proposal's full leave-worker-out correction.</a:t>
+            </a:r>
+          </a:p>
+        </p:txBody>
+      </p:sp>
+      <p:sp>
+        <p:nvSpPr>
+          <p:cNvPr id="9" name="conditioning-definition">
+            <a:extLst xmlns:a="http://schemas.openxmlformats.org/drawingml/2006/main">
+              <a:ext uri="{FF2B5EF4-FFF2-40B4-BE49-F238E27FC236}">
+                <a16:creationId xmlns:a16="http://schemas.microsoft.com/office/drawing/2014/main" id="{495190A5-7D55-4C11-A9EE-598AF7D043C1}"/>
+              </a:ext>
+            </a:extLst>
+          </p:cNvPr>
+          <p:cNvSpPr>
+            <a:spLocks xmlns:a="http://schemas.openxmlformats.org/drawingml/2006/main" noGrp="1"/>
+          </p:cNvSpPr>
+          <p:nvPr/>
+        </p:nvSpPr>
+        <p:spPr>
+          <a:xfrm xmlns:a="http://schemas.openxmlformats.org/drawingml/2006/main">
+            <a:off x="6429375" y="3562350"/>
+            <a:ext cx="5191125" cy="1028700"/>
           </a:xfrm>
           <a:prstGeom xmlns:a="http://schemas.openxmlformats.org/drawingml/2006/main" prst="rect">
             <a:avLst/>
@@ -7278,47 +7561,47 @@
           <a:lstStyle xmlns:a="http://schemas.openxmlformats.org/drawingml/2006/main"/>
           <a:p xmlns:a="http://schemas.openxmlformats.org/drawingml/2006/main">
             <a:pPr algn="l">
-              <a:defRPr sz="2550" b="1" i="0">
-                <a:solidFill>
-                  <a:srgbClr val="000000"/>
-                </a:solidFill>
-                <a:latin typeface="Arial"/>
-                <a:ea typeface="Arial"/>
-                <a:cs typeface="Arial"/>
-              </a:defRPr>
-            </a:pPr>
-            <a:r>
-              <a:rPr sz="2550" b="1" i="0">
-                <a:solidFill>
-                  <a:srgbClr val="000000"/>
-                </a:solidFill>
-                <a:latin typeface="Arial"/>
-                <a:ea typeface="Arial"/>
-                <a:cs typeface="Arial"/>
-              </a:rPr>
-              <a:t>Unregularized completion has rare but catastrophic tails.</a:t>
-            </a:r>
-          </a:p>
-        </p:txBody>
-      </p:sp>
-      <p:sp>
-        <p:nvSpPr>
-          <p:cNvPr id="11" name="close-action-band">
-            <a:extLst xmlns:a="http://schemas.openxmlformats.org/drawingml/2006/main">
-              <a:ext uri="{FF2B5EF4-FFF2-40B4-BE49-F238E27FC236}">
-                <a16:creationId xmlns:a16="http://schemas.microsoft.com/office/drawing/2014/main" id="{0D35F69A-BABE-4C9C-82ED-C6A11DA1AEA1}"/>
-              </a:ext>
-            </a:extLst>
-          </p:cNvPr>
-          <p:cNvSpPr>
-            <a:spLocks xmlns:a="http://schemas.openxmlformats.org/drawingml/2006/main" noGrp="1"/>
-          </p:cNvSpPr>
-          <p:nvPr/>
-        </p:nvSpPr>
-        <p:spPr>
-          <a:xfrm xmlns:a="http://schemas.openxmlformats.org/drawingml/2006/main">
-            <a:off x="590550" y="5715000"/>
-            <a:ext cx="11001375" cy="552450"/>
+              <a:defRPr sz="1275" b="0" i="0">
+                <a:solidFill>
+                  <a:srgbClr val="59616D"/>
+                </a:solidFill>
+                <a:latin typeface="Arial"/>
+                <a:ea typeface="Arial"/>
+                <a:cs typeface="Arial"/>
+              </a:defRPr>
+            </a:pPr>
+            <a:r>
+              <a:rPr sz="1275" b="0" i="0">
+                <a:solidFill>
+                  <a:srgbClr val="59616D"/>
+                </a:solidFill>
+                <a:latin typeface="Arial"/>
+                <a:ea typeface="Arial"/>
+                <a:cs typeface="Arial"/>
+              </a:rPr>
+              <a:t>'Make conditioning part of the estimator' means: inspect the local Gram spectrum before each update and apply a declared ridge or pooling rule when it is weak. That changes every returned estimate by design; it is not post-hoc removal of warnings.</a:t>
+            </a:r>
+          </a:p>
+        </p:txBody>
+      </p:sp>
+      <p:sp>
+        <p:nvSpPr>
+          <p:cNvPr id="10" name="next-experiment-band">
+            <a:extLst xmlns:a="http://schemas.openxmlformats.org/drawingml/2006/main">
+              <a:ext uri="{FF2B5EF4-FFF2-40B4-BE49-F238E27FC236}">
+                <a16:creationId xmlns:a16="http://schemas.microsoft.com/office/drawing/2014/main" id="{3CE281FA-BA93-419C-8FC1-E06D49BCB079}"/>
+              </a:ext>
+            </a:extLst>
+          </p:cNvPr>
+          <p:cNvSpPr>
+            <a:spLocks xmlns:a="http://schemas.openxmlformats.org/drawingml/2006/main" noGrp="1"/>
+          </p:cNvSpPr>
+          <p:nvPr/>
+        </p:nvSpPr>
+        <p:spPr>
+          <a:xfrm xmlns:a="http://schemas.openxmlformats.org/drawingml/2006/main">
+            <a:off x="523875" y="5029200"/>
+            <a:ext cx="11096625" cy="1104900"/>
           </a:xfrm>
           <a:prstGeom xmlns:a="http://schemas.openxmlformats.org/drawingml/2006/main" prst="rect">
             <a:avLst/>
@@ -7334,40 +7617,40 @@
       </p:sp>
       <p:sp>
         <p:nvSpPr>
-          <p:cNvPr id="12" name="close-action">
-            <a:extLst xmlns:a="http://schemas.openxmlformats.org/drawingml/2006/main">
-              <a:ext uri="{FF2B5EF4-FFF2-40B4-BE49-F238E27FC236}">
-                <a16:creationId xmlns:a16="http://schemas.microsoft.com/office/drawing/2014/main" id="{17BCBDF6-F53B-489C-98E1-BA3990E70D5F}"/>
-              </a:ext>
-            </a:extLst>
-          </p:cNvPr>
-          <p:cNvSpPr>
-            <a:spLocks xmlns:a="http://schemas.openxmlformats.org/drawingml/2006/main" noGrp="1"/>
-          </p:cNvSpPr>
-          <p:nvPr/>
-        </p:nvSpPr>
-        <p:spPr>
-          <a:xfrm xmlns:a="http://schemas.openxmlformats.org/drawingml/2006/main">
-            <a:off x="781050" y="5848350"/>
-            <a:ext cx="10620375" cy="323850"/>
-          </a:xfrm>
-          <a:prstGeom xmlns:a="http://schemas.openxmlformats.org/drawingml/2006/main" prst="rect">
-            <a:avLst/>
-          </a:prstGeom>
-          <a:noFill xmlns:a="http://schemas.openxmlformats.org/drawingml/2006/main"/>
-          <a:ln xmlns:a="http://schemas.openxmlformats.org/drawingml/2006/main" w="0">
-            <a:noFill/>
-            <a:prstDash val="solid"/>
-          </a:ln>
-        </p:spPr>
-        <p:txBody>
-          <a:bodyPr xmlns:a="http://schemas.openxmlformats.org/drawingml/2006/main" lIns="0" tIns="0" rIns="0" bIns="0" anchor="t">
-            <a:normAutofit fontScale="92137"/>
-          </a:bodyPr>
-          <a:lstStyle xmlns:a="http://schemas.openxmlformats.org/drawingml/2006/main"/>
-          <a:p xmlns:a="http://schemas.openxmlformats.org/drawingml/2006/main">
-            <a:pPr algn="ctr">
-              <a:defRPr sz="1500" b="1" i="0">
+          <p:cNvPr id="11" name="next-experiment-head">
+            <a:extLst xmlns:a="http://schemas.openxmlformats.org/drawingml/2006/main">
+              <a:ext uri="{FF2B5EF4-FFF2-40B4-BE49-F238E27FC236}">
+                <a16:creationId xmlns:a16="http://schemas.microsoft.com/office/drawing/2014/main" id="{3E88652F-B078-4B9B-A7C9-687E3D5B308E}"/>
+              </a:ext>
+            </a:extLst>
+          </p:cNvPr>
+          <p:cNvSpPr>
+            <a:spLocks xmlns:a="http://schemas.openxmlformats.org/drawingml/2006/main" noGrp="1"/>
+          </p:cNvSpPr>
+          <p:nvPr/>
+        </p:nvSpPr>
+        <p:spPr>
+          <a:xfrm xmlns:a="http://schemas.openxmlformats.org/drawingml/2006/main">
+            <a:off x="742950" y="5219700"/>
+            <a:ext cx="3143250" cy="285750"/>
+          </a:xfrm>
+          <a:prstGeom xmlns:a="http://schemas.openxmlformats.org/drawingml/2006/main" prst="rect">
+            <a:avLst/>
+          </a:prstGeom>
+          <a:noFill xmlns:a="http://schemas.openxmlformats.org/drawingml/2006/main"/>
+          <a:ln xmlns:a="http://schemas.openxmlformats.org/drawingml/2006/main" w="0">
+            <a:noFill/>
+            <a:prstDash val="solid"/>
+          </a:ln>
+        </p:spPr>
+        <p:txBody>
+          <a:bodyPr xmlns:a="http://schemas.openxmlformats.org/drawingml/2006/main" lIns="0" tIns="0" rIns="0" bIns="0" anchor="t">
+            <a:noAutofit/>
+          </a:bodyPr>
+          <a:lstStyle xmlns:a="http://schemas.openxmlformats.org/drawingml/2006/main"/>
+          <a:p xmlns:a="http://schemas.openxmlformats.org/drawingml/2006/main">
+            <a:pPr algn="l">
+              <a:defRPr sz="1650" b="1" i="0">
                 <a:solidFill>
                   <a:srgbClr val="000000"/>
                 </a:solidFill>
@@ -7377,7 +7660,7 @@
               </a:defRPr>
             </a:pPr>
             <a:r>
-              <a:rPr sz="1500" b="1" i="0">
+              <a:rPr sz="1650" b="1" i="0">
                 <a:solidFill>
                   <a:srgbClr val="000000"/>
                 </a:solidFill>
@@ -7385,7 +7668,65 @@
                 <a:ea typeface="Arial"/>
                 <a:cs typeface="Arial"/>
               </a:rPr>
-              <a:t>Next: regularize local factor regressions and make conditioning part of the estimator before evaluating the full LOO correction.</a:t>
+              <a:t>The next controlled experiment</a:t>
+            </a:r>
+          </a:p>
+        </p:txBody>
+      </p:sp>
+      <p:sp>
+        <p:nvSpPr>
+          <p:cNvPr id="12" name="next-experiment-body">
+            <a:extLst xmlns:a="http://schemas.openxmlformats.org/drawingml/2006/main">
+              <a:ext uri="{FF2B5EF4-FFF2-40B4-BE49-F238E27FC236}">
+                <a16:creationId xmlns:a16="http://schemas.microsoft.com/office/drawing/2014/main" id="{EC116C61-74A6-4A93-99A1-9F7E0F0F839C}"/>
+              </a:ext>
+            </a:extLst>
+          </p:cNvPr>
+          <p:cNvSpPr>
+            <a:spLocks xmlns:a="http://schemas.openxmlformats.org/drawingml/2006/main" noGrp="1"/>
+          </p:cNvSpPr>
+          <p:nvPr/>
+        </p:nvSpPr>
+        <p:spPr>
+          <a:xfrm xmlns:a="http://schemas.openxmlformats.org/drawingml/2006/main">
+            <a:off x="3714750" y="5181600"/>
+            <a:ext cx="7620000" cy="742950"/>
+          </a:xfrm>
+          <a:prstGeom xmlns:a="http://schemas.openxmlformats.org/drawingml/2006/main" prst="rect">
+            <a:avLst/>
+          </a:prstGeom>
+          <a:noFill xmlns:a="http://schemas.openxmlformats.org/drawingml/2006/main"/>
+          <a:ln xmlns:a="http://schemas.openxmlformats.org/drawingml/2006/main" w="0">
+            <a:noFill/>
+            <a:prstDash val="solid"/>
+          </a:ln>
+        </p:spPr>
+        <p:txBody>
+          <a:bodyPr xmlns:a="http://schemas.openxmlformats.org/drawingml/2006/main" lIns="0" tIns="0" rIns="0" bIns="0" anchor="t">
+            <a:normAutofit fontScale="100000"/>
+          </a:bodyPr>
+          <a:lstStyle xmlns:a="http://schemas.openxmlformats.org/drawingml/2006/main"/>
+          <a:p xmlns:a="http://schemas.openxmlformats.org/drawingml/2006/main">
+            <a:pPr algn="l">
+              <a:defRPr sz="1425" b="1" i="0">
+                <a:solidFill>
+                  <a:srgbClr val="000000"/>
+                </a:solidFill>
+                <a:latin typeface="Arial"/>
+                <a:ea typeface="Arial"/>
+                <a:cs typeface="Arial"/>
+              </a:defRPr>
+            </a:pPr>
+            <a:r>
+              <a:rPr sz="1425" b="1" i="0">
+                <a:solidFill>
+                  <a:srgbClr val="000000"/>
+                </a:solidFill>
+                <a:latin typeface="Arial"/>
+                <a:ea typeface="Arial"/>
+                <a:cs typeface="Arial"/>
+              </a:rPr>
+              <a:t>Hold the DGP draws and seeds fixed; compare the current baseline with declared regularized variants on unconditional RMSE, bias, and warning rate. Until that is run, there is no evidence that the proposed variants improve efficacy.</a:t>
             </a:r>
           </a:p>
         </p:txBody>
@@ -7395,7 +7736,7 @@
           <p:cNvPr id="13" name="slide-8-footer-label">
             <a:extLst xmlns:a="http://schemas.openxmlformats.org/drawingml/2006/main">
               <a:ext uri="{FF2B5EF4-FFF2-40B4-BE49-F238E27FC236}">
-                <a16:creationId xmlns:a16="http://schemas.microsoft.com/office/drawing/2014/main" id="{BC78BEAB-E2A6-4C4A-9268-1500F6DF90E7}"/>
+                <a16:creationId xmlns:a16="http://schemas.microsoft.com/office/drawing/2014/main" id="{160DE013-ADC3-452C-BF95-6D7E84684D0E}"/>
               </a:ext>
             </a:extLst>
           </p:cNvPr>
@@ -7453,7 +7794,7 @@
           <p:cNvPr id="14" name="slide-8-footer-number">
             <a:extLst xmlns:a="http://schemas.openxmlformats.org/drawingml/2006/main">
               <a:ext uri="{FF2B5EF4-FFF2-40B4-BE49-F238E27FC236}">
-                <a16:creationId xmlns:a16="http://schemas.microsoft.com/office/drawing/2014/main" id="{93B2F8AA-5F01-4B25-BF90-7D587B25D092}"/>
+                <a16:creationId xmlns:a16="http://schemas.microsoft.com/office/drawing/2014/main" id="{4D5615B3-76A3-4B17-B7D9-38589BA22E5E}"/>
               </a:ext>
             </a:extLst>
           </p:cNvPr>
@@ -7509,7 +7850,7 @@
     </p:spTree>
     <p:extLst>
       <p:ext uri="{BB962C8B-B14F-4D97-AF65-F5344CB8AC3E}">
-        <p14:creationId xmlns:p14="http://schemas.microsoft.com/office/powerpoint/2010/main" val="1199641420"/>
+        <p14:creationId xmlns:p14="http://schemas.microsoft.com/office/powerpoint/2010/main" val="198257159"/>
       </p:ext>
     </p:extLst>
   </p:cSld>
